--- a/Presentacion_CoderHouse.pptx
+++ b/Presentacion_CoderHouse.pptx
@@ -5,7 +5,7 @@
     <p:sldMasterId id="2147483659" r:id="rId1"/>
   </p:sldMasterIdLst>
   <p:notesMasterIdLst>
-    <p:notesMasterId r:id="rId14"/>
+    <p:notesMasterId r:id="rId20"/>
   </p:notesMasterIdLst>
   <p:sldIdLst>
     <p:sldId id="287" r:id="rId2"/>
@@ -19,24 +19,30 @@
     <p:sldId id="297" r:id="rId10"/>
     <p:sldId id="298" r:id="rId11"/>
     <p:sldId id="299" r:id="rId12"/>
-    <p:sldId id="269" r:id="rId13"/>
+    <p:sldId id="301" r:id="rId13"/>
+    <p:sldId id="302" r:id="rId14"/>
+    <p:sldId id="303" r:id="rId15"/>
+    <p:sldId id="305" r:id="rId16"/>
+    <p:sldId id="306" r:id="rId17"/>
+    <p:sldId id="308" r:id="rId18"/>
+    <p:sldId id="269" r:id="rId19"/>
   </p:sldIdLst>
   <p:sldSz cx="9144000" cy="5143500" type="screen16x9"/>
   <p:notesSz cx="6858000" cy="9144000"/>
   <p:embeddedFontLst>
     <p:embeddedFont>
       <p:font typeface="Montserrat" panose="00000500000000000000" pitchFamily="2" charset="0"/>
-      <p:regular r:id="rId15"/>
-      <p:bold r:id="rId16"/>
-      <p:italic r:id="rId17"/>
-      <p:boldItalic r:id="rId18"/>
+      <p:regular r:id="rId21"/>
+      <p:bold r:id="rId22"/>
+      <p:italic r:id="rId23"/>
+      <p:boldItalic r:id="rId24"/>
     </p:embeddedFont>
     <p:embeddedFont>
       <p:font typeface="Montserrat SemiBold" panose="00000700000000000000" pitchFamily="2" charset="0"/>
-      <p:regular r:id="rId19"/>
-      <p:bold r:id="rId20"/>
-      <p:italic r:id="rId21"/>
-      <p:boldItalic r:id="rId22"/>
+      <p:regular r:id="rId25"/>
+      <p:bold r:id="rId26"/>
+      <p:italic r:id="rId27"/>
+      <p:boldItalic r:id="rId28"/>
     </p:embeddedFont>
   </p:embeddedFontLst>
   <p:defaultTextStyle>
@@ -365,7 +371,7 @@
 <file path=ppt/revisionInfo.xml><?xml version="1.0" encoding="utf-8"?>
 <p1510:revInfo xmlns:a="http://schemas.openxmlformats.org/drawingml/2006/main" xmlns:r="http://schemas.openxmlformats.org/officeDocument/2006/relationships" xmlns:p1510="http://schemas.microsoft.com/office/powerpoint/2015/10/main">
   <p1510:revLst>
-    <p1510:client id="{CF27E628-3BF0-4823-ACFC-2CE4B8912D0E}" v="58" dt="2025-08-05T15:36:36.546"/>
+    <p1510:client id="{FF81D52A-5BCB-4250-AE6E-C4EBC8D403B7}" v="28" dt="2025-09-26T08:18:51.450"/>
   </p1510:revLst>
 </p1510:revInfo>
 </file>
@@ -385,22 +391,6 @@
           <pc:docMk/>
           <pc:sldMk cId="0" sldId="269"/>
         </pc:sldMkLst>
-        <pc:spChg chg="mod">
-          <ac:chgData name="Facundo Bosch" userId="58229a8a99125e28" providerId="LiveId" clId="{CF27E628-3BF0-4823-ACFC-2CE4B8912D0E}" dt="2025-08-05T15:38:09.933" v="1650" actId="20577"/>
-          <ac:spMkLst>
-            <pc:docMk/>
-            <pc:sldMk cId="0" sldId="269"/>
-            <ac:spMk id="182" creationId="{00000000-0000-0000-0000-000000000000}"/>
-          </ac:spMkLst>
-        </pc:spChg>
-        <pc:spChg chg="mod">
-          <ac:chgData name="Facundo Bosch" userId="58229a8a99125e28" providerId="LiveId" clId="{CF27E628-3BF0-4823-ACFC-2CE4B8912D0E}" dt="2025-08-05T15:38:21.371" v="1690" actId="20577"/>
-          <ac:spMkLst>
-            <pc:docMk/>
-            <pc:sldMk cId="0" sldId="269"/>
-            <ac:spMk id="183" creationId="{00000000-0000-0000-0000-000000000000}"/>
-          </ac:spMkLst>
-        </pc:spChg>
       </pc:sldChg>
       <pc:sldChg chg="modSp mod">
         <pc:chgData name="Facundo Bosch" userId="58229a8a99125e28" providerId="LiveId" clId="{CF27E628-3BF0-4823-ACFC-2CE4B8912D0E}" dt="2025-08-05T14:53:34.652" v="49" actId="207"/>
@@ -408,14 +398,6 @@
           <pc:docMk/>
           <pc:sldMk cId="635517703" sldId="289"/>
         </pc:sldMkLst>
-        <pc:spChg chg="mod">
-          <ac:chgData name="Facundo Bosch" userId="58229a8a99125e28" providerId="LiveId" clId="{CF27E628-3BF0-4823-ACFC-2CE4B8912D0E}" dt="2025-08-05T14:53:34.652" v="49" actId="207"/>
-          <ac:spMkLst>
-            <pc:docMk/>
-            <pc:sldMk cId="635517703" sldId="289"/>
-            <ac:spMk id="155" creationId="{A65F30CD-DE0D-099A-C4BB-FECB37482928}"/>
-          </ac:spMkLst>
-        </pc:spChg>
       </pc:sldChg>
       <pc:sldChg chg="modSp mod">
         <pc:chgData name="Facundo Bosch" userId="58229a8a99125e28" providerId="LiveId" clId="{CF27E628-3BF0-4823-ACFC-2CE4B8912D0E}" dt="2025-08-05T14:53:38.826" v="50" actId="207"/>
@@ -423,14 +405,6 @@
           <pc:docMk/>
           <pc:sldMk cId="4087488221" sldId="290"/>
         </pc:sldMkLst>
-        <pc:spChg chg="mod">
-          <ac:chgData name="Facundo Bosch" userId="58229a8a99125e28" providerId="LiveId" clId="{CF27E628-3BF0-4823-ACFC-2CE4B8912D0E}" dt="2025-08-05T14:53:38.826" v="50" actId="207"/>
-          <ac:spMkLst>
-            <pc:docMk/>
-            <pc:sldMk cId="4087488221" sldId="290"/>
-            <ac:spMk id="155" creationId="{58A6B85D-88FB-5111-F344-949EA353BA89}"/>
-          </ac:spMkLst>
-        </pc:spChg>
       </pc:sldChg>
       <pc:sldChg chg="addSp modSp mod">
         <pc:chgData name="Facundo Bosch" userId="58229a8a99125e28" providerId="LiveId" clId="{CF27E628-3BF0-4823-ACFC-2CE4B8912D0E}" dt="2025-08-05T14:57:42.337" v="96" actId="20577"/>
@@ -438,30 +412,6 @@
           <pc:docMk/>
           <pc:sldMk cId="3365202999" sldId="291"/>
         </pc:sldMkLst>
-        <pc:spChg chg="mod">
-          <ac:chgData name="Facundo Bosch" userId="58229a8a99125e28" providerId="LiveId" clId="{CF27E628-3BF0-4823-ACFC-2CE4B8912D0E}" dt="2025-08-05T14:56:07.541" v="67" actId="20577"/>
-          <ac:spMkLst>
-            <pc:docMk/>
-            <pc:sldMk cId="3365202999" sldId="291"/>
-            <ac:spMk id="155" creationId="{411A87ED-AA8C-30CB-CFDC-AD8A5E60CE84}"/>
-          </ac:spMkLst>
-        </pc:spChg>
-        <pc:graphicFrameChg chg="add mod modGraphic">
-          <ac:chgData name="Facundo Bosch" userId="58229a8a99125e28" providerId="LiveId" clId="{CF27E628-3BF0-4823-ACFC-2CE4B8912D0E}" dt="2025-08-05T14:57:31.278" v="95" actId="14100"/>
-          <ac:graphicFrameMkLst>
-            <pc:docMk/>
-            <pc:sldMk cId="3365202999" sldId="291"/>
-            <ac:graphicFrameMk id="4" creationId="{D8C7C2AB-3527-7438-0370-59C228C6DB2E}"/>
-          </ac:graphicFrameMkLst>
-        </pc:graphicFrameChg>
-        <pc:graphicFrameChg chg="add mod modGraphic">
-          <ac:chgData name="Facundo Bosch" userId="58229a8a99125e28" providerId="LiveId" clId="{CF27E628-3BF0-4823-ACFC-2CE4B8912D0E}" dt="2025-08-05T14:57:42.337" v="96" actId="20577"/>
-          <ac:graphicFrameMkLst>
-            <pc:docMk/>
-            <pc:sldMk cId="3365202999" sldId="291"/>
-            <ac:graphicFrameMk id="6" creationId="{9EB35355-2459-B07C-2381-82CC20315012}"/>
-          </ac:graphicFrameMkLst>
-        </pc:graphicFrameChg>
       </pc:sldChg>
       <pc:sldChg chg="new del">
         <pc:chgData name="Facundo Bosch" userId="58229a8a99125e28" providerId="LiveId" clId="{CF27E628-3BF0-4823-ACFC-2CE4B8912D0E}" dt="2025-08-05T15:26:25.510" v="1517" actId="47"/>
@@ -476,94 +426,6 @@
           <pc:docMk/>
           <pc:sldMk cId="2070269500" sldId="293"/>
         </pc:sldMkLst>
-        <pc:spChg chg="add mod">
-          <ac:chgData name="Facundo Bosch" userId="58229a8a99125e28" providerId="LiveId" clId="{CF27E628-3BF0-4823-ACFC-2CE4B8912D0E}" dt="2025-08-05T15:07:04.215" v="305" actId="1076"/>
-          <ac:spMkLst>
-            <pc:docMk/>
-            <pc:sldMk cId="2070269500" sldId="293"/>
-            <ac:spMk id="9" creationId="{619F9042-7B02-409F-37FA-CD58A00FB68E}"/>
-          </ac:spMkLst>
-        </pc:spChg>
-        <pc:spChg chg="add mod">
-          <ac:chgData name="Facundo Bosch" userId="58229a8a99125e28" providerId="LiveId" clId="{CF27E628-3BF0-4823-ACFC-2CE4B8912D0E}" dt="2025-08-05T15:05:46.652" v="274" actId="113"/>
-          <ac:spMkLst>
-            <pc:docMk/>
-            <pc:sldMk cId="2070269500" sldId="293"/>
-            <ac:spMk id="17" creationId="{1FD72C86-B0DE-4CB6-A96C-E36822F601F0}"/>
-          </ac:spMkLst>
-        </pc:spChg>
-        <pc:spChg chg="add mod">
-          <ac:chgData name="Facundo Bosch" userId="58229a8a99125e28" providerId="LiveId" clId="{CF27E628-3BF0-4823-ACFC-2CE4B8912D0E}" dt="2025-08-05T15:07:49.026" v="316" actId="1076"/>
-          <ac:spMkLst>
-            <pc:docMk/>
-            <pc:sldMk cId="2070269500" sldId="293"/>
-            <ac:spMk id="18" creationId="{B06C7AE0-82FC-38BE-910C-A4FCF0947EC9}"/>
-          </ac:spMkLst>
-        </pc:spChg>
-        <pc:spChg chg="mod">
-          <ac:chgData name="Facundo Bosch" userId="58229a8a99125e28" providerId="LiveId" clId="{CF27E628-3BF0-4823-ACFC-2CE4B8912D0E}" dt="2025-08-05T14:58:41.577" v="142" actId="20577"/>
-          <ac:spMkLst>
-            <pc:docMk/>
-            <pc:sldMk cId="2070269500" sldId="293"/>
-            <ac:spMk id="155" creationId="{95405D1F-5DF5-5E57-8E92-68B60E3AC453}"/>
-          </ac:spMkLst>
-        </pc:spChg>
-        <pc:graphicFrameChg chg="del">
-          <ac:chgData name="Facundo Bosch" userId="58229a8a99125e28" providerId="LiveId" clId="{CF27E628-3BF0-4823-ACFC-2CE4B8912D0E}" dt="2025-08-05T14:58:28.058" v="99" actId="478"/>
-          <ac:graphicFrameMkLst>
-            <pc:docMk/>
-            <pc:sldMk cId="2070269500" sldId="293"/>
-            <ac:graphicFrameMk id="4" creationId="{AC2CBCF3-A648-F288-0C4C-488797EE3A3F}"/>
-          </ac:graphicFrameMkLst>
-        </pc:graphicFrameChg>
-        <pc:graphicFrameChg chg="del">
-          <ac:chgData name="Facundo Bosch" userId="58229a8a99125e28" providerId="LiveId" clId="{CF27E628-3BF0-4823-ACFC-2CE4B8912D0E}" dt="2025-08-05T14:58:29.885" v="100" actId="478"/>
-          <ac:graphicFrameMkLst>
-            <pc:docMk/>
-            <pc:sldMk cId="2070269500" sldId="293"/>
-            <ac:graphicFrameMk id="6" creationId="{411A322F-F895-9230-2950-905AC2486A3D}"/>
-          </ac:graphicFrameMkLst>
-        </pc:graphicFrameChg>
-        <pc:picChg chg="add del mod">
-          <ac:chgData name="Facundo Bosch" userId="58229a8a99125e28" providerId="LiveId" clId="{CF27E628-3BF0-4823-ACFC-2CE4B8912D0E}" dt="2025-08-05T15:01:35.301" v="167" actId="478"/>
-          <ac:picMkLst>
-            <pc:docMk/>
-            <pc:sldMk cId="2070269500" sldId="293"/>
-            <ac:picMk id="5" creationId="{BED86F60-3E46-8271-3F00-8937926E01C2}"/>
-          </ac:picMkLst>
-        </pc:picChg>
-        <pc:picChg chg="add del mod">
-          <ac:chgData name="Facundo Bosch" userId="58229a8a99125e28" providerId="LiveId" clId="{CF27E628-3BF0-4823-ACFC-2CE4B8912D0E}" dt="2025-08-05T15:01:35.761" v="168" actId="478"/>
-          <ac:picMkLst>
-            <pc:docMk/>
-            <pc:sldMk cId="2070269500" sldId="293"/>
-            <ac:picMk id="8" creationId="{18845981-18BE-7E9C-8BD0-D3398CC9AFD7}"/>
-          </ac:picMkLst>
-        </pc:picChg>
-        <pc:picChg chg="add mod">
-          <ac:chgData name="Facundo Bosch" userId="58229a8a99125e28" providerId="LiveId" clId="{CF27E628-3BF0-4823-ACFC-2CE4B8912D0E}" dt="2025-08-05T15:06:24.436" v="287" actId="1076"/>
-          <ac:picMkLst>
-            <pc:docMk/>
-            <pc:sldMk cId="2070269500" sldId="293"/>
-            <ac:picMk id="11" creationId="{0D143362-A2BF-D8A6-169A-3464CE60B9CA}"/>
-          </ac:picMkLst>
-        </pc:picChg>
-        <pc:picChg chg="add mod">
-          <ac:chgData name="Facundo Bosch" userId="58229a8a99125e28" providerId="LiveId" clId="{CF27E628-3BF0-4823-ACFC-2CE4B8912D0E}" dt="2025-08-05T15:07:14.103" v="309" actId="14100"/>
-          <ac:picMkLst>
-            <pc:docMk/>
-            <pc:sldMk cId="2070269500" sldId="293"/>
-            <ac:picMk id="13" creationId="{08A9B9DB-F0FC-7ECE-8E33-97D901FD19C6}"/>
-          </ac:picMkLst>
-        </pc:picChg>
-        <pc:picChg chg="add del mod">
-          <ac:chgData name="Facundo Bosch" userId="58229a8a99125e28" providerId="LiveId" clId="{CF27E628-3BF0-4823-ACFC-2CE4B8912D0E}" dt="2025-08-05T15:04:32.650" v="181" actId="478"/>
-          <ac:picMkLst>
-            <pc:docMk/>
-            <pc:sldMk cId="2070269500" sldId="293"/>
-            <ac:picMk id="15" creationId="{5F88E29F-4D26-76EB-D562-4B2CC25F5618}"/>
-          </ac:picMkLst>
-        </pc:picChg>
       </pc:sldChg>
       <pc:sldChg chg="new del">
         <pc:chgData name="Facundo Bosch" userId="58229a8a99125e28" providerId="LiveId" clId="{CF27E628-3BF0-4823-ACFC-2CE4B8912D0E}" dt="2025-08-05T15:01:33.502" v="166" actId="47"/>
@@ -578,38 +440,6 @@
           <pc:docMk/>
           <pc:sldMk cId="549718314" sldId="295"/>
         </pc:sldMkLst>
-        <pc:spChg chg="add mod">
-          <ac:chgData name="Facundo Bosch" userId="58229a8a99125e28" providerId="LiveId" clId="{CF27E628-3BF0-4823-ACFC-2CE4B8912D0E}" dt="2025-08-05T15:14:14.480" v="1080" actId="113"/>
-          <ac:spMkLst>
-            <pc:docMk/>
-            <pc:sldMk cId="549718314" sldId="295"/>
-            <ac:spMk id="3" creationId="{F7C2575D-75CE-443C-0ADD-8BDD3317C166}"/>
-          </ac:spMkLst>
-        </pc:spChg>
-        <pc:spChg chg="mod">
-          <ac:chgData name="Facundo Bosch" userId="58229a8a99125e28" providerId="LiveId" clId="{CF27E628-3BF0-4823-ACFC-2CE4B8912D0E}" dt="2025-08-05T15:12:14.794" v="724"/>
-          <ac:spMkLst>
-            <pc:docMk/>
-            <pc:sldMk cId="549718314" sldId="295"/>
-            <ac:spMk id="9" creationId="{3903B0E6-2167-D836-9B72-33C507065275}"/>
-          </ac:spMkLst>
-        </pc:spChg>
-        <pc:spChg chg="mod">
-          <ac:chgData name="Facundo Bosch" userId="58229a8a99125e28" providerId="LiveId" clId="{CF27E628-3BF0-4823-ACFC-2CE4B8912D0E}" dt="2025-08-05T15:26:36.053" v="1520" actId="207"/>
-          <ac:spMkLst>
-            <pc:docMk/>
-            <pc:sldMk cId="549718314" sldId="295"/>
-            <ac:spMk id="155" creationId="{C39791C8-BE2D-6E99-8F21-8004759D5793}"/>
-          </ac:spMkLst>
-        </pc:spChg>
-        <pc:picChg chg="mod">
-          <ac:chgData name="Facundo Bosch" userId="58229a8a99125e28" providerId="LiveId" clId="{CF27E628-3BF0-4823-ACFC-2CE4B8912D0E}" dt="2025-08-05T15:09:49.825" v="339" actId="1076"/>
-          <ac:picMkLst>
-            <pc:docMk/>
-            <pc:sldMk cId="549718314" sldId="295"/>
-            <ac:picMk id="5" creationId="{4A8B7874-EE87-2A3B-DB42-0B89CDD0B237}"/>
-          </ac:picMkLst>
-        </pc:picChg>
       </pc:sldChg>
       <pc:sldChg chg="addSp delSp modSp add mod">
         <pc:chgData name="Facundo Bosch" userId="58229a8a99125e28" providerId="LiveId" clId="{CF27E628-3BF0-4823-ACFC-2CE4B8912D0E}" dt="2025-08-05T15:26:39.913" v="1521" actId="207"/>
@@ -617,78 +447,6 @@
           <pc:docMk/>
           <pc:sldMk cId="24769437" sldId="296"/>
         </pc:sldMkLst>
-        <pc:spChg chg="add mod">
-          <ac:chgData name="Facundo Bosch" userId="58229a8a99125e28" providerId="LiveId" clId="{CF27E628-3BF0-4823-ACFC-2CE4B8912D0E}" dt="2025-08-05T15:18:26.189" v="1119" actId="1076"/>
-          <ac:spMkLst>
-            <pc:docMk/>
-            <pc:sldMk cId="24769437" sldId="296"/>
-            <ac:spMk id="8" creationId="{D15EC6C4-A7DE-4CA3-F4E7-C17588CAEA14}"/>
-          </ac:spMkLst>
-        </pc:spChg>
-        <pc:spChg chg="mod">
-          <ac:chgData name="Facundo Bosch" userId="58229a8a99125e28" providerId="LiveId" clId="{CF27E628-3BF0-4823-ACFC-2CE4B8912D0E}" dt="2025-08-05T15:17:29.468" v="1104" actId="1076"/>
-          <ac:spMkLst>
-            <pc:docMk/>
-            <pc:sldMk cId="24769437" sldId="296"/>
-            <ac:spMk id="9" creationId="{55A028D1-88E9-1F75-BE93-D372A716F507}"/>
-          </ac:spMkLst>
-        </pc:spChg>
-        <pc:spChg chg="mod">
-          <ac:chgData name="Facundo Bosch" userId="58229a8a99125e28" providerId="LiveId" clId="{CF27E628-3BF0-4823-ACFC-2CE4B8912D0E}" dt="2025-08-05T15:17:41.405" v="1109" actId="1076"/>
-          <ac:spMkLst>
-            <pc:docMk/>
-            <pc:sldMk cId="24769437" sldId="296"/>
-            <ac:spMk id="18" creationId="{16D275B0-196D-1439-2309-26AB06BE0F78}"/>
-          </ac:spMkLst>
-        </pc:spChg>
-        <pc:spChg chg="mod">
-          <ac:chgData name="Facundo Bosch" userId="58229a8a99125e28" providerId="LiveId" clId="{CF27E628-3BF0-4823-ACFC-2CE4B8912D0E}" dt="2025-08-05T15:26:39.913" v="1521" actId="207"/>
-          <ac:spMkLst>
-            <pc:docMk/>
-            <pc:sldMk cId="24769437" sldId="296"/>
-            <ac:spMk id="155" creationId="{D9909DBC-EE01-25E3-09AE-404A97C58BE3}"/>
-          </ac:spMkLst>
-        </pc:spChg>
-        <pc:picChg chg="add mod">
-          <ac:chgData name="Facundo Bosch" userId="58229a8a99125e28" providerId="LiveId" clId="{CF27E628-3BF0-4823-ACFC-2CE4B8912D0E}" dt="2025-08-05T15:17:27.375" v="1103" actId="1076"/>
-          <ac:picMkLst>
-            <pc:docMk/>
-            <pc:sldMk cId="24769437" sldId="296"/>
-            <ac:picMk id="4" creationId="{A41E4485-6D86-4B39-C3CC-EE08416A29BC}"/>
-          </ac:picMkLst>
-        </pc:picChg>
-        <pc:picChg chg="add mod">
-          <ac:chgData name="Facundo Bosch" userId="58229a8a99125e28" providerId="LiveId" clId="{CF27E628-3BF0-4823-ACFC-2CE4B8912D0E}" dt="2025-08-05T15:17:37.332" v="1108" actId="1076"/>
-          <ac:picMkLst>
-            <pc:docMk/>
-            <pc:sldMk cId="24769437" sldId="296"/>
-            <ac:picMk id="6" creationId="{D6689369-43C6-577D-C610-010B129214E7}"/>
-          </ac:picMkLst>
-        </pc:picChg>
-        <pc:picChg chg="add mod">
-          <ac:chgData name="Facundo Bosch" userId="58229a8a99125e28" providerId="LiveId" clId="{CF27E628-3BF0-4823-ACFC-2CE4B8912D0E}" dt="2025-08-05T15:17:36.206" v="1107" actId="1076"/>
-          <ac:picMkLst>
-            <pc:docMk/>
-            <pc:sldMk cId="24769437" sldId="296"/>
-            <ac:picMk id="7" creationId="{7947C4D2-1CCC-8256-1412-3EEDA4C89A35}"/>
-          </ac:picMkLst>
-        </pc:picChg>
-        <pc:picChg chg="del">
-          <ac:chgData name="Facundo Bosch" userId="58229a8a99125e28" providerId="LiveId" clId="{CF27E628-3BF0-4823-ACFC-2CE4B8912D0E}" dt="2025-08-05T15:08:26.948" v="318" actId="478"/>
-          <ac:picMkLst>
-            <pc:docMk/>
-            <pc:sldMk cId="24769437" sldId="296"/>
-            <ac:picMk id="11" creationId="{1ED40A92-3835-49A4-595E-EA88843EF486}"/>
-          </ac:picMkLst>
-        </pc:picChg>
-        <pc:picChg chg="del">
-          <ac:chgData name="Facundo Bosch" userId="58229a8a99125e28" providerId="LiveId" clId="{CF27E628-3BF0-4823-ACFC-2CE4B8912D0E}" dt="2025-08-05T15:08:31.946" v="323" actId="478"/>
-          <ac:picMkLst>
-            <pc:docMk/>
-            <pc:sldMk cId="24769437" sldId="296"/>
-            <ac:picMk id="13" creationId="{E675A422-F436-CE00-05F7-26B78A4F8884}"/>
-          </ac:picMkLst>
-        </pc:picChg>
       </pc:sldChg>
       <pc:sldChg chg="addSp delSp modSp add mod">
         <pc:chgData name="Facundo Bosch" userId="58229a8a99125e28" providerId="LiveId" clId="{CF27E628-3BF0-4823-ACFC-2CE4B8912D0E}" dt="2025-08-05T15:26:33.690" v="1519" actId="207"/>
@@ -696,62 +454,6 @@
           <pc:docMk/>
           <pc:sldMk cId="2019166762" sldId="297"/>
         </pc:sldMkLst>
-        <pc:spChg chg="del">
-          <ac:chgData name="Facundo Bosch" userId="58229a8a99125e28" providerId="LiveId" clId="{CF27E628-3BF0-4823-ACFC-2CE4B8912D0E}" dt="2025-08-05T15:20:21.854" v="1188" actId="478"/>
-          <ac:spMkLst>
-            <pc:docMk/>
-            <pc:sldMk cId="2019166762" sldId="297"/>
-            <ac:spMk id="3" creationId="{F4404E92-AEAC-A974-61CC-A138811A802F}"/>
-          </ac:spMkLst>
-        </pc:spChg>
-        <pc:spChg chg="mod">
-          <ac:chgData name="Facundo Bosch" userId="58229a8a99125e28" providerId="LiveId" clId="{CF27E628-3BF0-4823-ACFC-2CE4B8912D0E}" dt="2025-08-05T15:20:32.168" v="1194" actId="1076"/>
-          <ac:spMkLst>
-            <pc:docMk/>
-            <pc:sldMk cId="2019166762" sldId="297"/>
-            <ac:spMk id="9" creationId="{14B9A64C-2C18-4E00-E661-572239267517}"/>
-          </ac:spMkLst>
-        </pc:spChg>
-        <pc:spChg chg="mod">
-          <ac:chgData name="Facundo Bosch" userId="58229a8a99125e28" providerId="LiveId" clId="{CF27E628-3BF0-4823-ACFC-2CE4B8912D0E}" dt="2025-08-05T15:26:33.690" v="1519" actId="207"/>
-          <ac:spMkLst>
-            <pc:docMk/>
-            <pc:sldMk cId="2019166762" sldId="297"/>
-            <ac:spMk id="155" creationId="{0951CF2D-84C7-98CA-4457-B12AA3F58C38}"/>
-          </ac:spMkLst>
-        </pc:spChg>
-        <pc:picChg chg="del">
-          <ac:chgData name="Facundo Bosch" userId="58229a8a99125e28" providerId="LiveId" clId="{CF27E628-3BF0-4823-ACFC-2CE4B8912D0E}" dt="2025-08-05T15:14:26.811" v="1082" actId="478"/>
-          <ac:picMkLst>
-            <pc:docMk/>
-            <pc:sldMk cId="2019166762" sldId="297"/>
-            <ac:picMk id="5" creationId="{3727172D-692C-4789-E6FF-F810C9B14DE1}"/>
-          </ac:picMkLst>
-        </pc:picChg>
-        <pc:picChg chg="add del mod">
-          <ac:chgData name="Facundo Bosch" userId="58229a8a99125e28" providerId="LiveId" clId="{CF27E628-3BF0-4823-ACFC-2CE4B8912D0E}" dt="2025-08-05T15:18:31.101" v="1120" actId="478"/>
-          <ac:picMkLst>
-            <pc:docMk/>
-            <pc:sldMk cId="2019166762" sldId="297"/>
-            <ac:picMk id="6" creationId="{97BA096A-A78F-1F80-9FED-622F35D2AC83}"/>
-          </ac:picMkLst>
-        </pc:picChg>
-        <pc:picChg chg="del">
-          <ac:chgData name="Facundo Bosch" userId="58229a8a99125e28" providerId="LiveId" clId="{CF27E628-3BF0-4823-ACFC-2CE4B8912D0E}" dt="2025-08-05T15:14:44.401" v="1088" actId="478"/>
-          <ac:picMkLst>
-            <pc:docMk/>
-            <pc:sldMk cId="2019166762" sldId="297"/>
-            <ac:picMk id="8" creationId="{7616027E-A80F-A68A-7CB4-979C69B50158}"/>
-          </ac:picMkLst>
-        </pc:picChg>
-        <pc:picChg chg="add mod">
-          <ac:chgData name="Facundo Bosch" userId="58229a8a99125e28" providerId="LiveId" clId="{CF27E628-3BF0-4823-ACFC-2CE4B8912D0E}" dt="2025-08-05T15:20:28.850" v="1193" actId="14100"/>
-          <ac:picMkLst>
-            <pc:docMk/>
-            <pc:sldMk cId="2019166762" sldId="297"/>
-            <ac:picMk id="10" creationId="{1EC62F15-2B33-CC94-757E-B4DBB0E7DF15}"/>
-          </ac:picMkLst>
-        </pc:picChg>
       </pc:sldChg>
       <pc:sldChg chg="addSp delSp modSp add mod">
         <pc:chgData name="Facundo Bosch" userId="58229a8a99125e28" providerId="LiveId" clId="{CF27E628-3BF0-4823-ACFC-2CE4B8912D0E}" dt="2025-08-05T15:26:31.001" v="1518" actId="207"/>
@@ -759,174 +461,6 @@
           <pc:docMk/>
           <pc:sldMk cId="1224471509" sldId="298"/>
         </pc:sldMkLst>
-        <pc:spChg chg="add">
-          <ac:chgData name="Facundo Bosch" userId="58229a8a99125e28" providerId="LiveId" clId="{CF27E628-3BF0-4823-ACFC-2CE4B8912D0E}" dt="2025-08-05T15:23:04.149" v="1207"/>
-          <ac:spMkLst>
-            <pc:docMk/>
-            <pc:sldMk cId="1224471509" sldId="298"/>
-            <ac:spMk id="3" creationId="{2E59284C-E8CF-4C1A-7199-45549B3D8079}"/>
-          </ac:spMkLst>
-        </pc:spChg>
-        <pc:spChg chg="add">
-          <ac:chgData name="Facundo Bosch" userId="58229a8a99125e28" providerId="LiveId" clId="{CF27E628-3BF0-4823-ACFC-2CE4B8912D0E}" dt="2025-08-05T15:23:04.149" v="1207"/>
-          <ac:spMkLst>
-            <pc:docMk/>
-            <pc:sldMk cId="1224471509" sldId="298"/>
-            <ac:spMk id="4" creationId="{B0934595-E399-A21A-B401-34D42AB14297}"/>
-          </ac:spMkLst>
-        </pc:spChg>
-        <pc:spChg chg="add">
-          <ac:chgData name="Facundo Bosch" userId="58229a8a99125e28" providerId="LiveId" clId="{CF27E628-3BF0-4823-ACFC-2CE4B8912D0E}" dt="2025-08-05T15:23:04.149" v="1207"/>
-          <ac:spMkLst>
-            <pc:docMk/>
-            <pc:sldMk cId="1224471509" sldId="298"/>
-            <ac:spMk id="5" creationId="{15F0229D-14E8-0709-1962-2E03DD0856A5}"/>
-          </ac:spMkLst>
-        </pc:spChg>
-        <pc:spChg chg="add">
-          <ac:chgData name="Facundo Bosch" userId="58229a8a99125e28" providerId="LiveId" clId="{CF27E628-3BF0-4823-ACFC-2CE4B8912D0E}" dt="2025-08-05T15:23:04.149" v="1207"/>
-          <ac:spMkLst>
-            <pc:docMk/>
-            <pc:sldMk cId="1224471509" sldId="298"/>
-            <ac:spMk id="6" creationId="{CED2AA14-7E0D-7158-70C2-0ADF3388A113}"/>
-          </ac:spMkLst>
-        </pc:spChg>
-        <pc:spChg chg="add">
-          <ac:chgData name="Facundo Bosch" userId="58229a8a99125e28" providerId="LiveId" clId="{CF27E628-3BF0-4823-ACFC-2CE4B8912D0E}" dt="2025-08-05T15:23:04.149" v="1207"/>
-          <ac:spMkLst>
-            <pc:docMk/>
-            <pc:sldMk cId="1224471509" sldId="298"/>
-            <ac:spMk id="7" creationId="{784764B2-702B-7D34-B3FF-ABFB4FC24EE8}"/>
-          </ac:spMkLst>
-        </pc:spChg>
-        <pc:spChg chg="add">
-          <ac:chgData name="Facundo Bosch" userId="58229a8a99125e28" providerId="LiveId" clId="{CF27E628-3BF0-4823-ACFC-2CE4B8912D0E}" dt="2025-08-05T15:23:04.149" v="1207"/>
-          <ac:spMkLst>
-            <pc:docMk/>
-            <pc:sldMk cId="1224471509" sldId="298"/>
-            <ac:spMk id="8" creationId="{BBFFEFB8-5304-A188-8B7A-F192F3FD4844}"/>
-          </ac:spMkLst>
-        </pc:spChg>
-        <pc:spChg chg="mod">
-          <ac:chgData name="Facundo Bosch" userId="58229a8a99125e28" providerId="LiveId" clId="{CF27E628-3BF0-4823-ACFC-2CE4B8912D0E}" dt="2025-08-05T15:26:13.755" v="1515" actId="1076"/>
-          <ac:spMkLst>
-            <pc:docMk/>
-            <pc:sldMk cId="1224471509" sldId="298"/>
-            <ac:spMk id="9" creationId="{DD6A59C4-2966-C5F7-694E-58971498F913}"/>
-          </ac:spMkLst>
-        </pc:spChg>
-        <pc:spChg chg="add">
-          <ac:chgData name="Facundo Bosch" userId="58229a8a99125e28" providerId="LiveId" clId="{CF27E628-3BF0-4823-ACFC-2CE4B8912D0E}" dt="2025-08-05T15:23:04.149" v="1207"/>
-          <ac:spMkLst>
-            <pc:docMk/>
-            <pc:sldMk cId="1224471509" sldId="298"/>
-            <ac:spMk id="11" creationId="{441420F5-DFEE-166A-FF82-45A471710F6C}"/>
-          </ac:spMkLst>
-        </pc:spChg>
-        <pc:spChg chg="add mod">
-          <ac:chgData name="Facundo Bosch" userId="58229a8a99125e28" providerId="LiveId" clId="{CF27E628-3BF0-4823-ACFC-2CE4B8912D0E}" dt="2025-08-05T15:23:22.252" v="1211" actId="255"/>
-          <ac:spMkLst>
-            <pc:docMk/>
-            <pc:sldMk cId="1224471509" sldId="298"/>
-            <ac:spMk id="12" creationId="{53C80BCA-55F9-B3C5-0FFE-94A4A2AC7E01}"/>
-          </ac:spMkLst>
-        </pc:spChg>
-        <pc:spChg chg="add mod">
-          <ac:chgData name="Facundo Bosch" userId="58229a8a99125e28" providerId="LiveId" clId="{CF27E628-3BF0-4823-ACFC-2CE4B8912D0E}" dt="2025-08-05T15:23:22.252" v="1211" actId="255"/>
-          <ac:spMkLst>
-            <pc:docMk/>
-            <pc:sldMk cId="1224471509" sldId="298"/>
-            <ac:spMk id="13" creationId="{6D827371-416C-EDB3-F4E6-4C197F358EC4}"/>
-          </ac:spMkLst>
-        </pc:spChg>
-        <pc:spChg chg="add mod">
-          <ac:chgData name="Facundo Bosch" userId="58229a8a99125e28" providerId="LiveId" clId="{CF27E628-3BF0-4823-ACFC-2CE4B8912D0E}" dt="2025-08-05T15:23:22.252" v="1211" actId="255"/>
-          <ac:spMkLst>
-            <pc:docMk/>
-            <pc:sldMk cId="1224471509" sldId="298"/>
-            <ac:spMk id="14" creationId="{2BC11C35-5829-32C0-7676-96BAAD1E3D15}"/>
-          </ac:spMkLst>
-        </pc:spChg>
-        <pc:spChg chg="add mod">
-          <ac:chgData name="Facundo Bosch" userId="58229a8a99125e28" providerId="LiveId" clId="{CF27E628-3BF0-4823-ACFC-2CE4B8912D0E}" dt="2025-08-05T15:23:22.252" v="1211" actId="255"/>
-          <ac:spMkLst>
-            <pc:docMk/>
-            <pc:sldMk cId="1224471509" sldId="298"/>
-            <ac:spMk id="15" creationId="{5BCF8097-DD8B-E537-47F2-F73694656B00}"/>
-          </ac:spMkLst>
-        </pc:spChg>
-        <pc:spChg chg="add mod">
-          <ac:chgData name="Facundo Bosch" userId="58229a8a99125e28" providerId="LiveId" clId="{CF27E628-3BF0-4823-ACFC-2CE4B8912D0E}" dt="2025-08-05T15:23:22.252" v="1211" actId="255"/>
-          <ac:spMkLst>
-            <pc:docMk/>
-            <pc:sldMk cId="1224471509" sldId="298"/>
-            <ac:spMk id="17" creationId="{EE859107-15D4-1B0F-7E8E-A27D86836D22}"/>
-          </ac:spMkLst>
-        </pc:spChg>
-        <pc:spChg chg="add mod">
-          <ac:chgData name="Facundo Bosch" userId="58229a8a99125e28" providerId="LiveId" clId="{CF27E628-3BF0-4823-ACFC-2CE4B8912D0E}" dt="2025-08-05T15:23:22.252" v="1211" actId="255"/>
-          <ac:spMkLst>
-            <pc:docMk/>
-            <pc:sldMk cId="1224471509" sldId="298"/>
-            <ac:spMk id="18" creationId="{C7A15DB8-21FE-1340-DFFC-6F37A614D4B7}"/>
-          </ac:spMkLst>
-        </pc:spChg>
-        <pc:spChg chg="add mod">
-          <ac:chgData name="Facundo Bosch" userId="58229a8a99125e28" providerId="LiveId" clId="{CF27E628-3BF0-4823-ACFC-2CE4B8912D0E}" dt="2025-08-05T15:23:22.252" v="1211" actId="255"/>
-          <ac:spMkLst>
-            <pc:docMk/>
-            <pc:sldMk cId="1224471509" sldId="298"/>
-            <ac:spMk id="19" creationId="{60D8958D-C40D-A8B0-75A1-E3E19631A89C}"/>
-          </ac:spMkLst>
-        </pc:spChg>
-        <pc:spChg chg="add">
-          <ac:chgData name="Facundo Bosch" userId="58229a8a99125e28" providerId="LiveId" clId="{CF27E628-3BF0-4823-ACFC-2CE4B8912D0E}" dt="2025-08-05T15:25:15.637" v="1468"/>
-          <ac:spMkLst>
-            <pc:docMk/>
-            <pc:sldMk cId="1224471509" sldId="298"/>
-            <ac:spMk id="20" creationId="{E4C56168-DEB4-E7A1-662F-0D6EC01E9B91}"/>
-          </ac:spMkLst>
-        </pc:spChg>
-        <pc:spChg chg="add">
-          <ac:chgData name="Facundo Bosch" userId="58229a8a99125e28" providerId="LiveId" clId="{CF27E628-3BF0-4823-ACFC-2CE4B8912D0E}" dt="2025-08-05T15:25:18.404" v="1471"/>
-          <ac:spMkLst>
-            <pc:docMk/>
-            <pc:sldMk cId="1224471509" sldId="298"/>
-            <ac:spMk id="21" creationId="{451720F8-6AF7-93C5-3C8A-57FAAA11E032}"/>
-          </ac:spMkLst>
-        </pc:spChg>
-        <pc:spChg chg="mod">
-          <ac:chgData name="Facundo Bosch" userId="58229a8a99125e28" providerId="LiveId" clId="{CF27E628-3BF0-4823-ACFC-2CE4B8912D0E}" dt="2025-08-05T15:26:31.001" v="1518" actId="207"/>
-          <ac:spMkLst>
-            <pc:docMk/>
-            <pc:sldMk cId="1224471509" sldId="298"/>
-            <ac:spMk id="155" creationId="{0671213C-A60E-6F42-865E-B0E1AC3AF55D}"/>
-          </ac:spMkLst>
-        </pc:spChg>
-        <pc:picChg chg="mod">
-          <ac:chgData name="Facundo Bosch" userId="58229a8a99125e28" providerId="LiveId" clId="{CF27E628-3BF0-4823-ACFC-2CE4B8912D0E}" dt="2025-08-05T15:23:20.473" v="1210" actId="255"/>
-          <ac:picMkLst>
-            <pc:docMk/>
-            <pc:sldMk cId="1224471509" sldId="298"/>
-            <ac:picMk id="2" creationId="{9142AB98-A3A2-FB32-DCCA-4B70CDC2ED2C}"/>
-          </ac:picMkLst>
-        </pc:picChg>
-        <pc:picChg chg="del">
-          <ac:chgData name="Facundo Bosch" userId="58229a8a99125e28" providerId="LiveId" clId="{CF27E628-3BF0-4823-ACFC-2CE4B8912D0E}" dt="2025-08-05T15:20:37.414" v="1196" actId="478"/>
-          <ac:picMkLst>
-            <pc:docMk/>
-            <pc:sldMk cId="1224471509" sldId="298"/>
-            <ac:picMk id="10" creationId="{7E73E731-4F35-B721-EE22-43B0A0DE84BB}"/>
-          </ac:picMkLst>
-        </pc:picChg>
-        <pc:picChg chg="add mod">
-          <ac:chgData name="Facundo Bosch" userId="58229a8a99125e28" providerId="LiveId" clId="{CF27E628-3BF0-4823-ACFC-2CE4B8912D0E}" dt="2025-08-05T15:21:03.150" v="1199" actId="1076"/>
-          <ac:picMkLst>
-            <pc:docMk/>
-            <pc:sldMk cId="1224471509" sldId="298"/>
-            <ac:picMk id="6146" creationId="{8C9886DC-6BD1-AE57-F00D-28DC88E3170D}"/>
-          </ac:picMkLst>
-        </pc:picChg>
       </pc:sldChg>
       <pc:sldChg chg="addSp delSp modSp add mod">
         <pc:chgData name="Facundo Bosch" userId="58229a8a99125e28" providerId="LiveId" clId="{CF27E628-3BF0-4823-ACFC-2CE4B8912D0E}" dt="2025-08-05T15:38:01.604" v="1635" actId="113"/>
@@ -934,78 +468,6 @@
           <pc:docMk/>
           <pc:sldMk cId="1356377977" sldId="299"/>
         </pc:sldMkLst>
-        <pc:spChg chg="del">
-          <ac:chgData name="Facundo Bosch" userId="58229a8a99125e28" providerId="LiveId" clId="{CF27E628-3BF0-4823-ACFC-2CE4B8912D0E}" dt="2025-08-05T15:28:52.371" v="1550" actId="478"/>
-          <ac:spMkLst>
-            <pc:docMk/>
-            <pc:sldMk cId="1356377977" sldId="299"/>
-            <ac:spMk id="3" creationId="{10302E9C-EFEF-8251-9E8D-E204CEB43F01}"/>
-          </ac:spMkLst>
-        </pc:spChg>
-        <pc:spChg chg="mod">
-          <ac:chgData name="Facundo Bosch" userId="58229a8a99125e28" providerId="LiveId" clId="{CF27E628-3BF0-4823-ACFC-2CE4B8912D0E}" dt="2025-08-05T15:38:01.604" v="1635" actId="113"/>
-          <ac:spMkLst>
-            <pc:docMk/>
-            <pc:sldMk cId="1356377977" sldId="299"/>
-            <ac:spMk id="4" creationId="{9439F9F8-5724-DF1E-E0E1-1A9E3A3923DE}"/>
-          </ac:spMkLst>
-        </pc:spChg>
-        <pc:spChg chg="add">
-          <ac:chgData name="Facundo Bosch" userId="58229a8a99125e28" providerId="LiveId" clId="{CF27E628-3BF0-4823-ACFC-2CE4B8912D0E}" dt="2025-08-05T15:34:52.993" v="1584"/>
-          <ac:spMkLst>
-            <pc:docMk/>
-            <pc:sldMk cId="1356377977" sldId="299"/>
-            <ac:spMk id="5" creationId="{3BE04CFD-9252-292E-C562-AC3E6071DF85}"/>
-          </ac:spMkLst>
-        </pc:spChg>
-        <pc:spChg chg="del">
-          <ac:chgData name="Facundo Bosch" userId="58229a8a99125e28" providerId="LiveId" clId="{CF27E628-3BF0-4823-ACFC-2CE4B8912D0E}" dt="2025-08-05T15:28:58.462" v="1552" actId="478"/>
-          <ac:spMkLst>
-            <pc:docMk/>
-            <pc:sldMk cId="1356377977" sldId="299"/>
-            <ac:spMk id="11" creationId="{AE614D79-B49A-05D0-3D7C-1F74858E0BFE}"/>
-          </ac:spMkLst>
-        </pc:spChg>
-        <pc:spChg chg="del">
-          <ac:chgData name="Facundo Bosch" userId="58229a8a99125e28" providerId="LiveId" clId="{CF27E628-3BF0-4823-ACFC-2CE4B8912D0E}" dt="2025-08-05T15:28:58.462" v="1552" actId="478"/>
-          <ac:spMkLst>
-            <pc:docMk/>
-            <pc:sldMk cId="1356377977" sldId="299"/>
-            <ac:spMk id="14" creationId="{B37206D9-4A6D-33BA-F732-56F11571765E}"/>
-          </ac:spMkLst>
-        </pc:spChg>
-        <pc:spChg chg="del">
-          <ac:chgData name="Facundo Bosch" userId="58229a8a99125e28" providerId="LiveId" clId="{CF27E628-3BF0-4823-ACFC-2CE4B8912D0E}" dt="2025-08-05T15:28:58.462" v="1552" actId="478"/>
-          <ac:spMkLst>
-            <pc:docMk/>
-            <pc:sldMk cId="1356377977" sldId="299"/>
-            <ac:spMk id="15" creationId="{7CF859BB-F6BB-B96F-7348-07D72A6F9069}"/>
-          </ac:spMkLst>
-        </pc:spChg>
-        <pc:spChg chg="del">
-          <ac:chgData name="Facundo Bosch" userId="58229a8a99125e28" providerId="LiveId" clId="{CF27E628-3BF0-4823-ACFC-2CE4B8912D0E}" dt="2025-08-05T15:28:58.462" v="1552" actId="478"/>
-          <ac:spMkLst>
-            <pc:docMk/>
-            <pc:sldMk cId="1356377977" sldId="299"/>
-            <ac:spMk id="16" creationId="{148A53EA-8B16-052E-FDD7-34A7AD626A2A}"/>
-          </ac:spMkLst>
-        </pc:spChg>
-        <pc:spChg chg="del">
-          <ac:chgData name="Facundo Bosch" userId="58229a8a99125e28" providerId="LiveId" clId="{CF27E628-3BF0-4823-ACFC-2CE4B8912D0E}" dt="2025-08-05T15:28:55.949" v="1551" actId="478"/>
-          <ac:spMkLst>
-            <pc:docMk/>
-            <pc:sldMk cId="1356377977" sldId="299"/>
-            <ac:spMk id="19" creationId="{D829EF30-8B6A-97B3-955B-1327CBC4469E}"/>
-          </ac:spMkLst>
-        </pc:spChg>
-        <pc:spChg chg="mod">
-          <ac:chgData name="Facundo Bosch" userId="58229a8a99125e28" providerId="LiveId" clId="{CF27E628-3BF0-4823-ACFC-2CE4B8912D0E}" dt="2025-08-05T15:28:49.305" v="1549" actId="1076"/>
-          <ac:spMkLst>
-            <pc:docMk/>
-            <pc:sldMk cId="1356377977" sldId="299"/>
-            <ac:spMk id="155" creationId="{1EE96240-C630-C535-826A-4A547EB608D9}"/>
-          </ac:spMkLst>
-        </pc:spChg>
       </pc:sldChg>
       <pc:sldChg chg="addSp delSp modSp add del mod">
         <pc:chgData name="Facundo Bosch" userId="58229a8a99125e28" providerId="LiveId" clId="{CF27E628-3BF0-4823-ACFC-2CE4B8912D0E}" dt="2025-08-05T15:34:44.082" v="1583" actId="47"/>
@@ -1013,30 +475,6 @@
           <pc:docMk/>
           <pc:sldMk cId="1499083355" sldId="300"/>
         </pc:sldMkLst>
-        <pc:spChg chg="mod">
-          <ac:chgData name="Facundo Bosch" userId="58229a8a99125e28" providerId="LiveId" clId="{CF27E628-3BF0-4823-ACFC-2CE4B8912D0E}" dt="2025-08-05T15:34:35.264" v="1581" actId="1076"/>
-          <ac:spMkLst>
-            <pc:docMk/>
-            <pc:sldMk cId="1499083355" sldId="300"/>
-            <ac:spMk id="9" creationId="{1696D330-9A4A-48B1-92C7-B8CE89BF28DB}"/>
-          </ac:spMkLst>
-        </pc:spChg>
-        <pc:picChg chg="add del mod">
-          <ac:chgData name="Facundo Bosch" userId="58229a8a99125e28" providerId="LiveId" clId="{CF27E628-3BF0-4823-ACFC-2CE4B8912D0E}" dt="2025-08-05T15:34:41.613" v="1582" actId="478"/>
-          <ac:picMkLst>
-            <pc:docMk/>
-            <pc:sldMk cId="1499083355" sldId="300"/>
-            <ac:picMk id="4" creationId="{B1EF9C6E-F247-CF83-E904-A5AD2A4C4C97}"/>
-          </ac:picMkLst>
-        </pc:picChg>
-        <pc:picChg chg="del">
-          <ac:chgData name="Facundo Bosch" userId="58229a8a99125e28" providerId="LiveId" clId="{CF27E628-3BF0-4823-ACFC-2CE4B8912D0E}" dt="2025-08-05T15:31:30.440" v="1557" actId="478"/>
-          <ac:picMkLst>
-            <pc:docMk/>
-            <pc:sldMk cId="1499083355" sldId="300"/>
-            <ac:picMk id="6146" creationId="{74B3B553-57E5-A5FB-75BE-EA5CB57B798F}"/>
-          </ac:picMkLst>
-        </pc:picChg>
       </pc:sldChg>
       <pc:sldMasterChg chg="delSldLayout">
         <pc:chgData name="Facundo Bosch" userId="58229a8a99125e28" providerId="LiveId" clId="{CF27E628-3BF0-4823-ACFC-2CE4B8912D0E}" dt="2025-08-05T15:26:25.510" v="1517" actId="47"/>
@@ -1050,6 +488,588 @@
             <pc:docMk/>
             <pc:sldMasterMk cId="0" sldId="2147483659"/>
             <pc:sldLayoutMk cId="0" sldId="2147483651"/>
+          </pc:sldLayoutMkLst>
+        </pc:sldLayoutChg>
+      </pc:sldMasterChg>
+    </pc:docChg>
+  </pc:docChgLst>
+  <pc:docChgLst>
+    <pc:chgData name="Facundo Bosch" userId="58229a8a99125e28" providerId="LiveId" clId="{A8BC558F-4B81-472C-B1EB-BEE9AD61D7D3}"/>
+    <pc:docChg chg="undo custSel addSld delSld modSld">
+      <pc:chgData name="Facundo Bosch" userId="58229a8a99125e28" providerId="LiveId" clId="{A8BC558F-4B81-472C-B1EB-BEE9AD61D7D3}" dt="2025-09-26T08:19:42.969" v="1347" actId="113"/>
+      <pc:docMkLst>
+        <pc:docMk/>
+      </pc:docMkLst>
+      <pc:sldChg chg="new del">
+        <pc:chgData name="Facundo Bosch" userId="58229a8a99125e28" providerId="LiveId" clId="{A8BC558F-4B81-472C-B1EB-BEE9AD61D7D3}" dt="2025-09-26T08:03:00.522" v="742" actId="47"/>
+        <pc:sldMkLst>
+          <pc:docMk/>
+          <pc:sldMk cId="35811724" sldId="300"/>
+        </pc:sldMkLst>
+      </pc:sldChg>
+      <pc:sldChg chg="addSp delSp modSp add mod">
+        <pc:chgData name="Facundo Bosch" userId="58229a8a99125e28" providerId="LiveId" clId="{A8BC558F-4B81-472C-B1EB-BEE9AD61D7D3}" dt="2025-09-26T07:45:33.671" v="96" actId="12"/>
+        <pc:sldMkLst>
+          <pc:docMk/>
+          <pc:sldMk cId="2390947847" sldId="301"/>
+        </pc:sldMkLst>
+        <pc:spChg chg="add del mod">
+          <ac:chgData name="Facundo Bosch" userId="58229a8a99125e28" providerId="LiveId" clId="{A8BC558F-4B81-472C-B1EB-BEE9AD61D7D3}" dt="2025-09-26T07:39:42.267" v="36" actId="478"/>
+          <ac:spMkLst>
+            <pc:docMk/>
+            <pc:sldMk cId="2390947847" sldId="301"/>
+            <ac:spMk id="3" creationId="{E523BB95-2509-EA4D-AFCA-7E4A854FE157}"/>
+          </ac:spMkLst>
+        </pc:spChg>
+        <pc:spChg chg="del">
+          <ac:chgData name="Facundo Bosch" userId="58229a8a99125e28" providerId="LiveId" clId="{A8BC558F-4B81-472C-B1EB-BEE9AD61D7D3}" dt="2025-09-26T07:38:38.175" v="2" actId="478"/>
+          <ac:spMkLst>
+            <pc:docMk/>
+            <pc:sldMk cId="2390947847" sldId="301"/>
+            <ac:spMk id="4" creationId="{1E9FDF83-529D-5852-3A9A-E702870EBA69}"/>
+          </ac:spMkLst>
+        </pc:spChg>
+        <pc:spChg chg="add del mod">
+          <ac:chgData name="Facundo Bosch" userId="58229a8a99125e28" providerId="LiveId" clId="{A8BC558F-4B81-472C-B1EB-BEE9AD61D7D3}" dt="2025-09-26T07:41:05.509" v="39"/>
+          <ac:spMkLst>
+            <pc:docMk/>
+            <pc:sldMk cId="2390947847" sldId="301"/>
+            <ac:spMk id="5" creationId="{1F64AD28-6E6C-5542-599B-2A8909A8AAC3}"/>
+          </ac:spMkLst>
+        </pc:spChg>
+        <pc:spChg chg="add mod">
+          <ac:chgData name="Facundo Bosch" userId="58229a8a99125e28" providerId="LiveId" clId="{A8BC558F-4B81-472C-B1EB-BEE9AD61D7D3}" dt="2025-09-26T07:44:46.667" v="79" actId="114"/>
+          <ac:spMkLst>
+            <pc:docMk/>
+            <pc:sldMk cId="2390947847" sldId="301"/>
+            <ac:spMk id="6" creationId="{C0736F1C-62CC-AF41-A3C1-ABF5E931AAD7}"/>
+          </ac:spMkLst>
+        </pc:spChg>
+        <pc:spChg chg="add">
+          <ac:chgData name="Facundo Bosch" userId="58229a8a99125e28" providerId="LiveId" clId="{A8BC558F-4B81-472C-B1EB-BEE9AD61D7D3}" dt="2025-09-26T07:42:38.774" v="43"/>
+          <ac:spMkLst>
+            <pc:docMk/>
+            <pc:sldMk cId="2390947847" sldId="301"/>
+            <ac:spMk id="7" creationId="{9BD5D933-FD91-7039-E776-A428D7B0E90B}"/>
+          </ac:spMkLst>
+        </pc:spChg>
+        <pc:spChg chg="add">
+          <ac:chgData name="Facundo Bosch" userId="58229a8a99125e28" providerId="LiveId" clId="{A8BC558F-4B81-472C-B1EB-BEE9AD61D7D3}" dt="2025-09-26T07:42:38.774" v="43"/>
+          <ac:spMkLst>
+            <pc:docMk/>
+            <pc:sldMk cId="2390947847" sldId="301"/>
+            <ac:spMk id="8" creationId="{0C78852F-EFC3-C560-7F60-12FE80EBFA3F}"/>
+          </ac:spMkLst>
+        </pc:spChg>
+        <pc:spChg chg="add">
+          <ac:chgData name="Facundo Bosch" userId="58229a8a99125e28" providerId="LiveId" clId="{A8BC558F-4B81-472C-B1EB-BEE9AD61D7D3}" dt="2025-09-26T07:42:38.774" v="43"/>
+          <ac:spMkLst>
+            <pc:docMk/>
+            <pc:sldMk cId="2390947847" sldId="301"/>
+            <ac:spMk id="9" creationId="{0C402056-DC00-7FDE-5E14-9DB36FE6956A}"/>
+          </ac:spMkLst>
+        </pc:spChg>
+        <pc:spChg chg="add">
+          <ac:chgData name="Facundo Bosch" userId="58229a8a99125e28" providerId="LiveId" clId="{A8BC558F-4B81-472C-B1EB-BEE9AD61D7D3}" dt="2025-09-26T07:42:38.774" v="43"/>
+          <ac:spMkLst>
+            <pc:docMk/>
+            <pc:sldMk cId="2390947847" sldId="301"/>
+            <ac:spMk id="10" creationId="{B82FC62C-BF1F-3FA1-B8DF-F6C254476C19}"/>
+          </ac:spMkLst>
+        </pc:spChg>
+        <pc:spChg chg="add">
+          <ac:chgData name="Facundo Bosch" userId="58229a8a99125e28" providerId="LiveId" clId="{A8BC558F-4B81-472C-B1EB-BEE9AD61D7D3}" dt="2025-09-26T07:42:38.774" v="43"/>
+          <ac:spMkLst>
+            <pc:docMk/>
+            <pc:sldMk cId="2390947847" sldId="301"/>
+            <ac:spMk id="11" creationId="{19C284DF-79A3-FAF8-FC21-6D269E01C779}"/>
+          </ac:spMkLst>
+        </pc:spChg>
+        <pc:spChg chg="add">
+          <ac:chgData name="Facundo Bosch" userId="58229a8a99125e28" providerId="LiveId" clId="{A8BC558F-4B81-472C-B1EB-BEE9AD61D7D3}" dt="2025-09-26T07:42:38.774" v="43"/>
+          <ac:spMkLst>
+            <pc:docMk/>
+            <pc:sldMk cId="2390947847" sldId="301"/>
+            <ac:spMk id="12" creationId="{9948028C-6551-97F1-45C7-620420B26931}"/>
+          </ac:spMkLst>
+        </pc:spChg>
+        <pc:spChg chg="add">
+          <ac:chgData name="Facundo Bosch" userId="58229a8a99125e28" providerId="LiveId" clId="{A8BC558F-4B81-472C-B1EB-BEE9AD61D7D3}" dt="2025-09-26T07:42:38.774" v="43"/>
+          <ac:spMkLst>
+            <pc:docMk/>
+            <pc:sldMk cId="2390947847" sldId="301"/>
+            <ac:spMk id="13" creationId="{4C01028C-C1BA-067C-7F81-7A6B39C52961}"/>
+          </ac:spMkLst>
+        </pc:spChg>
+        <pc:spChg chg="add">
+          <ac:chgData name="Facundo Bosch" userId="58229a8a99125e28" providerId="LiveId" clId="{A8BC558F-4B81-472C-B1EB-BEE9AD61D7D3}" dt="2025-09-26T07:42:38.774" v="43"/>
+          <ac:spMkLst>
+            <pc:docMk/>
+            <pc:sldMk cId="2390947847" sldId="301"/>
+            <ac:spMk id="14" creationId="{6D6582C5-5AC0-5ED7-95D5-A45D28BA2C07}"/>
+          </ac:spMkLst>
+        </pc:spChg>
+        <pc:spChg chg="add">
+          <ac:chgData name="Facundo Bosch" userId="58229a8a99125e28" providerId="LiveId" clId="{A8BC558F-4B81-472C-B1EB-BEE9AD61D7D3}" dt="2025-09-26T07:42:38.774" v="43"/>
+          <ac:spMkLst>
+            <pc:docMk/>
+            <pc:sldMk cId="2390947847" sldId="301"/>
+            <ac:spMk id="15" creationId="{92503EC7-64A8-2179-5A4F-5410E069657F}"/>
+          </ac:spMkLst>
+        </pc:spChg>
+        <pc:spChg chg="add">
+          <ac:chgData name="Facundo Bosch" userId="58229a8a99125e28" providerId="LiveId" clId="{A8BC558F-4B81-472C-B1EB-BEE9AD61D7D3}" dt="2025-09-26T07:42:47.121" v="46"/>
+          <ac:spMkLst>
+            <pc:docMk/>
+            <pc:sldMk cId="2390947847" sldId="301"/>
+            <ac:spMk id="16" creationId="{0E06E5AC-4773-F830-ADCF-F352D9E81E39}"/>
+          </ac:spMkLst>
+        </pc:spChg>
+        <pc:spChg chg="add">
+          <ac:chgData name="Facundo Bosch" userId="58229a8a99125e28" providerId="LiveId" clId="{A8BC558F-4B81-472C-B1EB-BEE9AD61D7D3}" dt="2025-09-26T07:42:47.121" v="46"/>
+          <ac:spMkLst>
+            <pc:docMk/>
+            <pc:sldMk cId="2390947847" sldId="301"/>
+            <ac:spMk id="17" creationId="{D17637AB-E045-CB56-8736-E13728F8ACD4}"/>
+          </ac:spMkLst>
+        </pc:spChg>
+        <pc:spChg chg="add">
+          <ac:chgData name="Facundo Bosch" userId="58229a8a99125e28" providerId="LiveId" clId="{A8BC558F-4B81-472C-B1EB-BEE9AD61D7D3}" dt="2025-09-26T07:42:47.121" v="46"/>
+          <ac:spMkLst>
+            <pc:docMk/>
+            <pc:sldMk cId="2390947847" sldId="301"/>
+            <ac:spMk id="18" creationId="{75E47455-9992-E7BA-D0B9-B0B1C5A20F9A}"/>
+          </ac:spMkLst>
+        </pc:spChg>
+        <pc:spChg chg="add">
+          <ac:chgData name="Facundo Bosch" userId="58229a8a99125e28" providerId="LiveId" clId="{A8BC558F-4B81-472C-B1EB-BEE9AD61D7D3}" dt="2025-09-26T07:42:47.121" v="46"/>
+          <ac:spMkLst>
+            <pc:docMk/>
+            <pc:sldMk cId="2390947847" sldId="301"/>
+            <ac:spMk id="19" creationId="{C450B423-3245-0585-E65D-7D81EAB322F9}"/>
+          </ac:spMkLst>
+        </pc:spChg>
+        <pc:spChg chg="add">
+          <ac:chgData name="Facundo Bosch" userId="58229a8a99125e28" providerId="LiveId" clId="{A8BC558F-4B81-472C-B1EB-BEE9AD61D7D3}" dt="2025-09-26T07:42:47.121" v="46"/>
+          <ac:spMkLst>
+            <pc:docMk/>
+            <pc:sldMk cId="2390947847" sldId="301"/>
+            <ac:spMk id="20" creationId="{85766781-AEBA-7994-580E-0373F713B3CF}"/>
+          </ac:spMkLst>
+        </pc:spChg>
+        <pc:spChg chg="add">
+          <ac:chgData name="Facundo Bosch" userId="58229a8a99125e28" providerId="LiveId" clId="{A8BC558F-4B81-472C-B1EB-BEE9AD61D7D3}" dt="2025-09-26T07:42:47.121" v="46"/>
+          <ac:spMkLst>
+            <pc:docMk/>
+            <pc:sldMk cId="2390947847" sldId="301"/>
+            <ac:spMk id="21" creationId="{CA60DB49-F40F-BD13-BB48-A78DFD9FC575}"/>
+          </ac:spMkLst>
+        </pc:spChg>
+        <pc:spChg chg="add">
+          <ac:chgData name="Facundo Bosch" userId="58229a8a99125e28" providerId="LiveId" clId="{A8BC558F-4B81-472C-B1EB-BEE9AD61D7D3}" dt="2025-09-26T07:42:47.121" v="46"/>
+          <ac:spMkLst>
+            <pc:docMk/>
+            <pc:sldMk cId="2390947847" sldId="301"/>
+            <ac:spMk id="22" creationId="{3965C2B0-A012-9212-4068-EF25717892C4}"/>
+          </ac:spMkLst>
+        </pc:spChg>
+        <pc:spChg chg="add">
+          <ac:chgData name="Facundo Bosch" userId="58229a8a99125e28" providerId="LiveId" clId="{A8BC558F-4B81-472C-B1EB-BEE9AD61D7D3}" dt="2025-09-26T07:42:47.121" v="46"/>
+          <ac:spMkLst>
+            <pc:docMk/>
+            <pc:sldMk cId="2390947847" sldId="301"/>
+            <ac:spMk id="23" creationId="{1C116FE6-1239-6D06-920C-A7EAFD0D0DDC}"/>
+          </ac:spMkLst>
+        </pc:spChg>
+        <pc:spChg chg="add mod">
+          <ac:chgData name="Facundo Bosch" userId="58229a8a99125e28" providerId="LiveId" clId="{A8BC558F-4B81-472C-B1EB-BEE9AD61D7D3}" dt="2025-09-26T07:43:13.942" v="48" actId="6549"/>
+          <ac:spMkLst>
+            <pc:docMk/>
+            <pc:sldMk cId="2390947847" sldId="301"/>
+            <ac:spMk id="24" creationId="{5C72670E-29B2-9E94-ED01-6A02F72B4961}"/>
+          </ac:spMkLst>
+        </pc:spChg>
+        <pc:spChg chg="add mod">
+          <ac:chgData name="Facundo Bosch" userId="58229a8a99125e28" providerId="LiveId" clId="{A8BC558F-4B81-472C-B1EB-BEE9AD61D7D3}" dt="2025-09-26T07:44:15.973" v="63" actId="1076"/>
+          <ac:spMkLst>
+            <pc:docMk/>
+            <pc:sldMk cId="2390947847" sldId="301"/>
+            <ac:spMk id="25" creationId="{393E506C-8709-30FE-1980-00765172C0FA}"/>
+          </ac:spMkLst>
+        </pc:spChg>
+        <pc:spChg chg="add mod">
+          <ac:chgData name="Facundo Bosch" userId="58229a8a99125e28" providerId="LiveId" clId="{A8BC558F-4B81-472C-B1EB-BEE9AD61D7D3}" dt="2025-09-26T07:45:33.671" v="96" actId="12"/>
+          <ac:spMkLst>
+            <pc:docMk/>
+            <pc:sldMk cId="2390947847" sldId="301"/>
+            <ac:spMk id="26" creationId="{6B5FB9E5-0C85-1A38-B927-A7F011DDF6F3}"/>
+          </ac:spMkLst>
+        </pc:spChg>
+        <pc:spChg chg="mod">
+          <ac:chgData name="Facundo Bosch" userId="58229a8a99125e28" providerId="LiveId" clId="{A8BC558F-4B81-472C-B1EB-BEE9AD61D7D3}" dt="2025-09-26T07:39:32.920" v="33" actId="20577"/>
+          <ac:spMkLst>
+            <pc:docMk/>
+            <pc:sldMk cId="2390947847" sldId="301"/>
+            <ac:spMk id="155" creationId="{81F1D96C-C9F6-96C9-1ACF-7CE308CAE084}"/>
+          </ac:spMkLst>
+        </pc:spChg>
+      </pc:sldChg>
+      <pc:sldChg chg="addSp delSp modSp add mod">
+        <pc:chgData name="Facundo Bosch" userId="58229a8a99125e28" providerId="LiveId" clId="{A8BC558F-4B81-472C-B1EB-BEE9AD61D7D3}" dt="2025-09-26T07:55:31.147" v="178" actId="1076"/>
+        <pc:sldMkLst>
+          <pc:docMk/>
+          <pc:sldMk cId="462920700" sldId="302"/>
+        </pc:sldMkLst>
+        <pc:spChg chg="mod">
+          <ac:chgData name="Facundo Bosch" userId="58229a8a99125e28" providerId="LiveId" clId="{A8BC558F-4B81-472C-B1EB-BEE9AD61D7D3}" dt="2025-09-26T07:50:55.408" v="168" actId="20577"/>
+          <ac:spMkLst>
+            <pc:docMk/>
+            <pc:sldMk cId="462920700" sldId="302"/>
+            <ac:spMk id="6" creationId="{5997F801-08D7-C78A-984A-AE7015B70C1D}"/>
+          </ac:spMkLst>
+        </pc:spChg>
+        <pc:spChg chg="del">
+          <ac:chgData name="Facundo Bosch" userId="58229a8a99125e28" providerId="LiveId" clId="{A8BC558F-4B81-472C-B1EB-BEE9AD61D7D3}" dt="2025-09-26T07:45:53.265" v="98" actId="478"/>
+          <ac:spMkLst>
+            <pc:docMk/>
+            <pc:sldMk cId="462920700" sldId="302"/>
+            <ac:spMk id="26" creationId="{5DD59A69-13BB-F6EA-8F25-5E07391785F1}"/>
+          </ac:spMkLst>
+        </pc:spChg>
+        <pc:picChg chg="add del mod">
+          <ac:chgData name="Facundo Bosch" userId="58229a8a99125e28" providerId="LiveId" clId="{A8BC558F-4B81-472C-B1EB-BEE9AD61D7D3}" dt="2025-09-26T07:54:27.162" v="173" actId="478"/>
+          <ac:picMkLst>
+            <pc:docMk/>
+            <pc:sldMk cId="462920700" sldId="302"/>
+            <ac:picMk id="4" creationId="{FB5BBA96-FB02-F7B9-CADE-C3A0F39F72AF}"/>
+          </ac:picMkLst>
+        </pc:picChg>
+        <pc:picChg chg="add mod">
+          <ac:chgData name="Facundo Bosch" userId="58229a8a99125e28" providerId="LiveId" clId="{A8BC558F-4B81-472C-B1EB-BEE9AD61D7D3}" dt="2025-09-26T07:55:31.147" v="178" actId="1076"/>
+          <ac:picMkLst>
+            <pc:docMk/>
+            <pc:sldMk cId="462920700" sldId="302"/>
+            <ac:picMk id="7" creationId="{3EA4690B-6E4D-277C-230D-EAB6C1C7572B}"/>
+          </ac:picMkLst>
+        </pc:picChg>
+      </pc:sldChg>
+      <pc:sldChg chg="addSp delSp modSp add mod">
+        <pc:chgData name="Facundo Bosch" userId="58229a8a99125e28" providerId="LiveId" clId="{A8BC558F-4B81-472C-B1EB-BEE9AD61D7D3}" dt="2025-09-26T08:04:11.332" v="749" actId="1076"/>
+        <pc:sldMkLst>
+          <pc:docMk/>
+          <pc:sldMk cId="1685467900" sldId="303"/>
+        </pc:sldMkLst>
+        <pc:spChg chg="del">
+          <ac:chgData name="Facundo Bosch" userId="58229a8a99125e28" providerId="LiveId" clId="{A8BC558F-4B81-472C-B1EB-BEE9AD61D7D3}" dt="2025-09-26T07:55:40.027" v="180" actId="478"/>
+          <ac:spMkLst>
+            <pc:docMk/>
+            <pc:sldMk cId="1685467900" sldId="303"/>
+            <ac:spMk id="6" creationId="{D93149B4-57BC-EAF3-D6C6-866BE6F50577}"/>
+          </ac:spMkLst>
+        </pc:spChg>
+        <pc:spChg chg="add mod">
+          <ac:chgData name="Facundo Bosch" userId="58229a8a99125e28" providerId="LiveId" clId="{A8BC558F-4B81-472C-B1EB-BEE9AD61D7D3}" dt="2025-09-26T07:58:39.631" v="590" actId="1076"/>
+          <ac:spMkLst>
+            <pc:docMk/>
+            <pc:sldMk cId="1685467900" sldId="303"/>
+            <ac:spMk id="11" creationId="{3BEBD665-E74F-421F-1A3C-9C2C0BA33CE9}"/>
+          </ac:spMkLst>
+        </pc:spChg>
+        <pc:spChg chg="add mod">
+          <ac:chgData name="Facundo Bosch" userId="58229a8a99125e28" providerId="LiveId" clId="{A8BC558F-4B81-472C-B1EB-BEE9AD61D7D3}" dt="2025-09-26T08:04:11.332" v="749" actId="1076"/>
+          <ac:spMkLst>
+            <pc:docMk/>
+            <pc:sldMk cId="1685467900" sldId="303"/>
+            <ac:spMk id="12" creationId="{2AB10787-AD82-24DA-2DF9-9C1999A7B661}"/>
+          </ac:spMkLst>
+        </pc:spChg>
+        <pc:picChg chg="add mod">
+          <ac:chgData name="Facundo Bosch" userId="58229a8a99125e28" providerId="LiveId" clId="{A8BC558F-4B81-472C-B1EB-BEE9AD61D7D3}" dt="2025-09-26T07:56:11.053" v="189" actId="1076"/>
+          <ac:picMkLst>
+            <pc:docMk/>
+            <pc:sldMk cId="1685467900" sldId="303"/>
+            <ac:picMk id="4" creationId="{EAF1DED3-32F9-EEBF-5458-8836AA194D1D}"/>
+          </ac:picMkLst>
+        </pc:picChg>
+        <pc:picChg chg="del mod">
+          <ac:chgData name="Facundo Bosch" userId="58229a8a99125e28" providerId="LiveId" clId="{A8BC558F-4B81-472C-B1EB-BEE9AD61D7D3}" dt="2025-09-26T07:56:09.330" v="188" actId="478"/>
+          <ac:picMkLst>
+            <pc:docMk/>
+            <pc:sldMk cId="1685467900" sldId="303"/>
+            <ac:picMk id="7" creationId="{35FC7CF8-D961-E4E5-A5A0-7E6C7ECD6C1A}"/>
+          </ac:picMkLst>
+        </pc:picChg>
+        <pc:picChg chg="add mod">
+          <ac:chgData name="Facundo Bosch" userId="58229a8a99125e28" providerId="LiveId" clId="{A8BC558F-4B81-472C-B1EB-BEE9AD61D7D3}" dt="2025-09-26T07:56:49.746" v="201" actId="1076"/>
+          <ac:picMkLst>
+            <pc:docMk/>
+            <pc:sldMk cId="1685467900" sldId="303"/>
+            <ac:picMk id="8" creationId="{0A5E503F-92DA-08E1-B54E-0B32F261DA19}"/>
+          </ac:picMkLst>
+        </pc:picChg>
+        <pc:picChg chg="add mod">
+          <ac:chgData name="Facundo Bosch" userId="58229a8a99125e28" providerId="LiveId" clId="{A8BC558F-4B81-472C-B1EB-BEE9AD61D7D3}" dt="2025-09-26T07:56:48.135" v="200" actId="1076"/>
+          <ac:picMkLst>
+            <pc:docMk/>
+            <pc:sldMk cId="1685467900" sldId="303"/>
+            <ac:picMk id="10" creationId="{9DE754A1-204F-D69A-A493-9F318B2D24DE}"/>
+          </ac:picMkLst>
+        </pc:picChg>
+      </pc:sldChg>
+      <pc:sldChg chg="add del">
+        <pc:chgData name="Facundo Bosch" userId="58229a8a99125e28" providerId="LiveId" clId="{A8BC558F-4B81-472C-B1EB-BEE9AD61D7D3}" dt="2025-09-26T08:03:01.323" v="743" actId="47"/>
+        <pc:sldMkLst>
+          <pc:docMk/>
+          <pc:sldMk cId="86365685" sldId="304"/>
+        </pc:sldMkLst>
+      </pc:sldChg>
+      <pc:sldChg chg="addSp delSp modSp add mod">
+        <pc:chgData name="Facundo Bosch" userId="58229a8a99125e28" providerId="LiveId" clId="{A8BC558F-4B81-472C-B1EB-BEE9AD61D7D3}" dt="2025-09-26T08:06:07.448" v="1050" actId="20577"/>
+        <pc:sldMkLst>
+          <pc:docMk/>
+          <pc:sldMk cId="1263034178" sldId="305"/>
+        </pc:sldMkLst>
+        <pc:spChg chg="add mod">
+          <ac:chgData name="Facundo Bosch" userId="58229a8a99125e28" providerId="LiveId" clId="{A8BC558F-4B81-472C-B1EB-BEE9AD61D7D3}" dt="2025-09-26T08:01:30.276" v="733" actId="20577"/>
+          <ac:spMkLst>
+            <pc:docMk/>
+            <pc:sldMk cId="1263034178" sldId="305"/>
+            <ac:spMk id="3" creationId="{B3DB3289-F264-B136-EE56-F81E2CF65885}"/>
+          </ac:spMkLst>
+        </pc:spChg>
+        <pc:spChg chg="del">
+          <ac:chgData name="Facundo Bosch" userId="58229a8a99125e28" providerId="LiveId" clId="{A8BC558F-4B81-472C-B1EB-BEE9AD61D7D3}" dt="2025-09-26T07:59:48.249" v="670" actId="478"/>
+          <ac:spMkLst>
+            <pc:docMk/>
+            <pc:sldMk cId="1263034178" sldId="305"/>
+            <ac:spMk id="11" creationId="{FE45FB72-A51F-BAAD-0539-911ED042F9AD}"/>
+          </ac:spMkLst>
+        </pc:spChg>
+        <pc:spChg chg="add mod">
+          <ac:chgData name="Facundo Bosch" userId="58229a8a99125e28" providerId="LiveId" clId="{A8BC558F-4B81-472C-B1EB-BEE9AD61D7D3}" dt="2025-09-26T08:04:24.965" v="753" actId="1076"/>
+          <ac:spMkLst>
+            <pc:docMk/>
+            <pc:sldMk cId="1263034178" sldId="305"/>
+            <ac:spMk id="12" creationId="{8C7E56B2-41CC-8C75-24A6-AC5E0E795910}"/>
+          </ac:spMkLst>
+        </pc:spChg>
+        <pc:spChg chg="add mod">
+          <ac:chgData name="Facundo Bosch" userId="58229a8a99125e28" providerId="LiveId" clId="{A8BC558F-4B81-472C-B1EB-BEE9AD61D7D3}" dt="2025-09-26T08:06:07.448" v="1050" actId="20577"/>
+          <ac:spMkLst>
+            <pc:docMk/>
+            <pc:sldMk cId="1263034178" sldId="305"/>
+            <ac:spMk id="13" creationId="{6664AE3F-CCA8-CA33-F2DE-F5D066B8C5F5}"/>
+          </ac:spMkLst>
+        </pc:spChg>
+        <pc:spChg chg="mod">
+          <ac:chgData name="Facundo Bosch" userId="58229a8a99125e28" providerId="LiveId" clId="{A8BC558F-4B81-472C-B1EB-BEE9AD61D7D3}" dt="2025-09-26T07:59:51.933" v="672" actId="1076"/>
+          <ac:spMkLst>
+            <pc:docMk/>
+            <pc:sldMk cId="1263034178" sldId="305"/>
+            <ac:spMk id="25" creationId="{11C01839-CFBF-A34B-CBC1-BF262BA00344}"/>
+          </ac:spMkLst>
+        </pc:spChg>
+        <pc:spChg chg="mod">
+          <ac:chgData name="Facundo Bosch" userId="58229a8a99125e28" providerId="LiveId" clId="{A8BC558F-4B81-472C-B1EB-BEE9AD61D7D3}" dt="2025-09-26T07:59:02.738" v="624" actId="20577"/>
+          <ac:spMkLst>
+            <pc:docMk/>
+            <pc:sldMk cId="1263034178" sldId="305"/>
+            <ac:spMk id="155" creationId="{14BFB5DB-409C-1804-F803-5496CAFCD18E}"/>
+          </ac:spMkLst>
+        </pc:spChg>
+        <pc:picChg chg="del">
+          <ac:chgData name="Facundo Bosch" userId="58229a8a99125e28" providerId="LiveId" clId="{A8BC558F-4B81-472C-B1EB-BEE9AD61D7D3}" dt="2025-09-26T07:59:46.004" v="667" actId="478"/>
+          <ac:picMkLst>
+            <pc:docMk/>
+            <pc:sldMk cId="1263034178" sldId="305"/>
+            <ac:picMk id="4" creationId="{8BE5C645-178E-54B1-CB27-4C89C129AE30}"/>
+          </ac:picMkLst>
+        </pc:picChg>
+        <pc:picChg chg="add mod">
+          <ac:chgData name="Facundo Bosch" userId="58229a8a99125e28" providerId="LiveId" clId="{A8BC558F-4B81-472C-B1EB-BEE9AD61D7D3}" dt="2025-09-26T08:01:58.222" v="741" actId="1076"/>
+          <ac:picMkLst>
+            <pc:docMk/>
+            <pc:sldMk cId="1263034178" sldId="305"/>
+            <ac:picMk id="6" creationId="{42844E0E-1389-0AC2-E6CE-40FC977241B2}"/>
+          </ac:picMkLst>
+        </pc:picChg>
+        <pc:picChg chg="del">
+          <ac:chgData name="Facundo Bosch" userId="58229a8a99125e28" providerId="LiveId" clId="{A8BC558F-4B81-472C-B1EB-BEE9AD61D7D3}" dt="2025-09-26T07:59:46.355" v="668" actId="478"/>
+          <ac:picMkLst>
+            <pc:docMk/>
+            <pc:sldMk cId="1263034178" sldId="305"/>
+            <ac:picMk id="8" creationId="{4582C589-0661-8A63-6088-242A14824B50}"/>
+          </ac:picMkLst>
+        </pc:picChg>
+        <pc:picChg chg="add mod">
+          <ac:chgData name="Facundo Bosch" userId="58229a8a99125e28" providerId="LiveId" clId="{A8BC558F-4B81-472C-B1EB-BEE9AD61D7D3}" dt="2025-09-26T08:01:55.401" v="740" actId="14100"/>
+          <ac:picMkLst>
+            <pc:docMk/>
+            <pc:sldMk cId="1263034178" sldId="305"/>
+            <ac:picMk id="9" creationId="{2B6C8D6A-F04A-E405-5907-D53C4E06ED3F}"/>
+          </ac:picMkLst>
+        </pc:picChg>
+        <pc:picChg chg="del">
+          <ac:chgData name="Facundo Bosch" userId="58229a8a99125e28" providerId="LiveId" clId="{A8BC558F-4B81-472C-B1EB-BEE9AD61D7D3}" dt="2025-09-26T07:59:47.034" v="669" actId="478"/>
+          <ac:picMkLst>
+            <pc:docMk/>
+            <pc:sldMk cId="1263034178" sldId="305"/>
+            <ac:picMk id="10" creationId="{47A27E41-521E-0832-A40C-BA899E4CB7F7}"/>
+          </ac:picMkLst>
+        </pc:picChg>
+      </pc:sldChg>
+      <pc:sldChg chg="addSp delSp modSp add mod">
+        <pc:chgData name="Facundo Bosch" userId="58229a8a99125e28" providerId="LiveId" clId="{A8BC558F-4B81-472C-B1EB-BEE9AD61D7D3}" dt="2025-09-26T08:08:31.647" v="1287" actId="20577"/>
+        <pc:sldMkLst>
+          <pc:docMk/>
+          <pc:sldMk cId="65684731" sldId="306"/>
+        </pc:sldMkLst>
+        <pc:spChg chg="mod">
+          <ac:chgData name="Facundo Bosch" userId="58229a8a99125e28" providerId="LiveId" clId="{A8BC558F-4B81-472C-B1EB-BEE9AD61D7D3}" dt="2025-09-26T08:06:30.394" v="1081" actId="108"/>
+          <ac:spMkLst>
+            <pc:docMk/>
+            <pc:sldMk cId="65684731" sldId="306"/>
+            <ac:spMk id="3" creationId="{55719086-712D-88FF-3847-3D060A4E9D11}"/>
+          </ac:spMkLst>
+        </pc:spChg>
+        <pc:spChg chg="del">
+          <ac:chgData name="Facundo Bosch" userId="58229a8a99125e28" providerId="LiveId" clId="{A8BC558F-4B81-472C-B1EB-BEE9AD61D7D3}" dt="2025-09-26T08:07:34.848" v="1096" actId="478"/>
+          <ac:spMkLst>
+            <pc:docMk/>
+            <pc:sldMk cId="65684731" sldId="306"/>
+            <ac:spMk id="12" creationId="{5703E8EE-319E-33A2-812C-7DBCC0E00A6E}"/>
+          </ac:spMkLst>
+        </pc:spChg>
+        <pc:spChg chg="mod">
+          <ac:chgData name="Facundo Bosch" userId="58229a8a99125e28" providerId="LiveId" clId="{A8BC558F-4B81-472C-B1EB-BEE9AD61D7D3}" dt="2025-09-26T08:08:31.647" v="1287" actId="20577"/>
+          <ac:spMkLst>
+            <pc:docMk/>
+            <pc:sldMk cId="65684731" sldId="306"/>
+            <ac:spMk id="13" creationId="{F7B2C11F-C719-898B-059F-F19329EE06D6}"/>
+          </ac:spMkLst>
+        </pc:spChg>
+        <pc:picChg chg="add mod">
+          <ac:chgData name="Facundo Bosch" userId="58229a8a99125e28" providerId="LiveId" clId="{A8BC558F-4B81-472C-B1EB-BEE9AD61D7D3}" dt="2025-09-26T08:06:59.603" v="1086" actId="1076"/>
+          <ac:picMkLst>
+            <pc:docMk/>
+            <pc:sldMk cId="65684731" sldId="306"/>
+            <ac:picMk id="5" creationId="{21ED8CC8-7BB1-5141-064D-2991C6BCACED}"/>
+          </ac:picMkLst>
+        </pc:picChg>
+        <pc:picChg chg="del">
+          <ac:chgData name="Facundo Bosch" userId="58229a8a99125e28" providerId="LiveId" clId="{A8BC558F-4B81-472C-B1EB-BEE9AD61D7D3}" dt="2025-09-26T08:06:51.098" v="1082" actId="478"/>
+          <ac:picMkLst>
+            <pc:docMk/>
+            <pc:sldMk cId="65684731" sldId="306"/>
+            <ac:picMk id="6" creationId="{C9232243-708D-99DB-7613-7BF6597C865D}"/>
+          </ac:picMkLst>
+        </pc:picChg>
+        <pc:picChg chg="add mod">
+          <ac:chgData name="Facundo Bosch" userId="58229a8a99125e28" providerId="LiveId" clId="{A8BC558F-4B81-472C-B1EB-BEE9AD61D7D3}" dt="2025-09-26T08:07:29.762" v="1095" actId="1076"/>
+          <ac:picMkLst>
+            <pc:docMk/>
+            <pc:sldMk cId="65684731" sldId="306"/>
+            <ac:picMk id="8" creationId="{DF283719-E106-41D6-14A4-1CFCF9BA350C}"/>
+          </ac:picMkLst>
+        </pc:picChg>
+        <pc:picChg chg="del">
+          <ac:chgData name="Facundo Bosch" userId="58229a8a99125e28" providerId="LiveId" clId="{A8BC558F-4B81-472C-B1EB-BEE9AD61D7D3}" dt="2025-09-26T08:06:51.580" v="1083" actId="478"/>
+          <ac:picMkLst>
+            <pc:docMk/>
+            <pc:sldMk cId="65684731" sldId="306"/>
+            <ac:picMk id="9" creationId="{B6CDB109-79EC-D18D-B42D-8525325A6525}"/>
+          </ac:picMkLst>
+        </pc:picChg>
+      </pc:sldChg>
+      <pc:sldChg chg="new del">
+        <pc:chgData name="Facundo Bosch" userId="58229a8a99125e28" providerId="LiveId" clId="{A8BC558F-4B81-472C-B1EB-BEE9AD61D7D3}" dt="2025-09-26T08:18:16.932" v="1290" actId="47"/>
+        <pc:sldMkLst>
+          <pc:docMk/>
+          <pc:sldMk cId="1896081170" sldId="307"/>
+        </pc:sldMkLst>
+      </pc:sldChg>
+      <pc:sldChg chg="delSp modSp add mod">
+        <pc:chgData name="Facundo Bosch" userId="58229a8a99125e28" providerId="LiveId" clId="{A8BC558F-4B81-472C-B1EB-BEE9AD61D7D3}" dt="2025-09-26T08:19:42.969" v="1347" actId="113"/>
+        <pc:sldMkLst>
+          <pc:docMk/>
+          <pc:sldMk cId="388345922" sldId="308"/>
+        </pc:sldMkLst>
+        <pc:spChg chg="mod">
+          <ac:chgData name="Facundo Bosch" userId="58229a8a99125e28" providerId="LiveId" clId="{A8BC558F-4B81-472C-B1EB-BEE9AD61D7D3}" dt="2025-09-26T08:19:42.969" v="1347" actId="113"/>
+          <ac:spMkLst>
+            <pc:docMk/>
+            <pc:sldMk cId="388345922" sldId="308"/>
+            <ac:spMk id="3" creationId="{ABB473DA-3CB3-8D9E-EA44-0C4AED885348}"/>
+          </ac:spMkLst>
+        </pc:spChg>
+        <pc:spChg chg="del">
+          <ac:chgData name="Facundo Bosch" userId="58229a8a99125e28" providerId="LiveId" clId="{A8BC558F-4B81-472C-B1EB-BEE9AD61D7D3}" dt="2025-09-26T08:18:33.385" v="1314" actId="478"/>
+          <ac:spMkLst>
+            <pc:docMk/>
+            <pc:sldMk cId="388345922" sldId="308"/>
+            <ac:spMk id="13" creationId="{6BE5CF4A-92F6-4403-A9B1-69B368B3021D}"/>
+          </ac:spMkLst>
+        </pc:spChg>
+        <pc:spChg chg="del mod">
+          <ac:chgData name="Facundo Bosch" userId="58229a8a99125e28" providerId="LiveId" clId="{A8BC558F-4B81-472C-B1EB-BEE9AD61D7D3}" dt="2025-09-26T08:18:28.047" v="1311"/>
+          <ac:spMkLst>
+            <pc:docMk/>
+            <pc:sldMk cId="388345922" sldId="308"/>
+            <ac:spMk id="25" creationId="{D797B668-4CA7-778C-58B9-A747EE46EC8D}"/>
+          </ac:spMkLst>
+        </pc:spChg>
+        <pc:spChg chg="mod">
+          <ac:chgData name="Facundo Bosch" userId="58229a8a99125e28" providerId="LiveId" clId="{A8BC558F-4B81-472C-B1EB-BEE9AD61D7D3}" dt="2025-09-26T08:18:21.792" v="1306" actId="20577"/>
+          <ac:spMkLst>
+            <pc:docMk/>
+            <pc:sldMk cId="388345922" sldId="308"/>
+            <ac:spMk id="155" creationId="{06703FD7-00F7-39E9-3B31-1B03785E4B7F}"/>
+          </ac:spMkLst>
+        </pc:spChg>
+        <pc:picChg chg="del mod">
+          <ac:chgData name="Facundo Bosch" userId="58229a8a99125e28" providerId="LiveId" clId="{A8BC558F-4B81-472C-B1EB-BEE9AD61D7D3}" dt="2025-09-26T08:18:28.046" v="1309" actId="478"/>
+          <ac:picMkLst>
+            <pc:docMk/>
+            <pc:sldMk cId="388345922" sldId="308"/>
+            <ac:picMk id="5" creationId="{9ACE7F2C-1722-4C50-86B3-696BB2148FB2}"/>
+          </ac:picMkLst>
+        </pc:picChg>
+        <pc:picChg chg="del mod">
+          <ac:chgData name="Facundo Bosch" userId="58229a8a99125e28" providerId="LiveId" clId="{A8BC558F-4B81-472C-B1EB-BEE9AD61D7D3}" dt="2025-09-26T08:18:28.436" v="1313" actId="478"/>
+          <ac:picMkLst>
+            <pc:docMk/>
+            <pc:sldMk cId="388345922" sldId="308"/>
+            <ac:picMk id="8" creationId="{D6E06000-F9A9-C2ED-8C80-DD1B53B99B7C}"/>
+          </ac:picMkLst>
+        </pc:picChg>
+      </pc:sldChg>
+      <pc:sldChg chg="add del">
+        <pc:chgData name="Facundo Bosch" userId="58229a8a99125e28" providerId="LiveId" clId="{A8BC558F-4B81-472C-B1EB-BEE9AD61D7D3}" dt="2025-09-26T08:18:41.830" v="1318"/>
+        <pc:sldMkLst>
+          <pc:docMk/>
+          <pc:sldMk cId="2471173695" sldId="309"/>
+        </pc:sldMkLst>
+      </pc:sldChg>
+      <pc:sldMasterChg chg="delSldLayout">
+        <pc:chgData name="Facundo Bosch" userId="58229a8a99125e28" providerId="LiveId" clId="{A8BC558F-4B81-472C-B1EB-BEE9AD61D7D3}" dt="2025-09-26T08:18:16.932" v="1290" actId="47"/>
+        <pc:sldMasterMkLst>
+          <pc:docMk/>
+          <pc:sldMasterMk cId="0" sldId="2147483659"/>
+        </pc:sldMasterMkLst>
+        <pc:sldLayoutChg chg="del">
+          <pc:chgData name="Facundo Bosch" userId="58229a8a99125e28" providerId="LiveId" clId="{A8BC558F-4B81-472C-B1EB-BEE9AD61D7D3}" dt="2025-09-26T08:03:01.323" v="743" actId="47"/>
+          <pc:sldLayoutMkLst>
+            <pc:docMk/>
+            <pc:sldMasterMk cId="0" sldId="2147483659"/>
+            <pc:sldLayoutMk cId="0" sldId="2147483652"/>
+          </pc:sldLayoutMkLst>
+        </pc:sldLayoutChg>
+        <pc:sldLayoutChg chg="del">
+          <pc:chgData name="Facundo Bosch" userId="58229a8a99125e28" providerId="LiveId" clId="{A8BC558F-4B81-472C-B1EB-BEE9AD61D7D3}" dt="2025-09-26T08:18:16.932" v="1290" actId="47"/>
+          <pc:sldLayoutMkLst>
+            <pc:docMk/>
+            <pc:sldMasterMk cId="0" sldId="2147483659"/>
+            <pc:sldLayoutMk cId="0" sldId="2147483653"/>
           </pc:sldLayoutMkLst>
         </pc:sldLayoutChg>
       </pc:sldMasterChg>
@@ -1885,6 +1905,768 @@
   <p:cSld>
     <p:spTree>
       <p:nvGrpSpPr>
+        <p:cNvPr id="1" name="Shape 150">
+          <a:extLst>
+            <a:ext uri="{FF2B5EF4-FFF2-40B4-BE49-F238E27FC236}">
+              <a16:creationId xmlns:a16="http://schemas.microsoft.com/office/drawing/2014/main" id="{8879DFC5-F8D1-4EE8-DF37-B2C7829E1CF2}"/>
+            </a:ext>
+          </a:extLst>
+        </p:cNvPr>
+        <p:cNvGrpSpPr/>
+        <p:nvPr/>
+      </p:nvGrpSpPr>
+      <p:grpSpPr>
+        <a:xfrm>
+          <a:off x="0" y="0"/>
+          <a:ext cx="0" cy="0"/>
+          <a:chOff x="0" y="0"/>
+          <a:chExt cx="0" cy="0"/>
+        </a:xfrm>
+      </p:grpSpPr>
+      <p:sp>
+        <p:nvSpPr>
+          <p:cNvPr id="151" name="Google Shape;151;gb6537f9ec8_0_217:notes">
+            <a:extLst>
+              <a:ext uri="{FF2B5EF4-FFF2-40B4-BE49-F238E27FC236}">
+                <a16:creationId xmlns:a16="http://schemas.microsoft.com/office/drawing/2014/main" id="{B1B6D633-078C-D73B-5BE0-A01DFBFB5BA6}"/>
+              </a:ext>
+            </a:extLst>
+          </p:cNvPr>
+          <p:cNvSpPr>
+            <a:spLocks noGrp="1" noRot="1" noChangeAspect="1"/>
+          </p:cNvSpPr>
+          <p:nvPr>
+            <p:ph type="sldImg" idx="2"/>
+          </p:nvPr>
+        </p:nvSpPr>
+        <p:spPr>
+          <a:xfrm>
+            <a:off x="381000" y="685800"/>
+            <a:ext cx="6096000" cy="3429000"/>
+          </a:xfrm>
+          <a:custGeom>
+            <a:avLst/>
+            <a:gdLst/>
+            <a:ahLst/>
+            <a:cxnLst/>
+            <a:rect l="l" t="t" r="r" b="b"/>
+            <a:pathLst>
+              <a:path w="120000" h="120000" extrusionOk="0">
+                <a:moveTo>
+                  <a:pt x="0" y="0"/>
+                </a:moveTo>
+                <a:lnTo>
+                  <a:pt x="120000" y="0"/>
+                </a:lnTo>
+                <a:lnTo>
+                  <a:pt x="120000" y="120000"/>
+                </a:lnTo>
+                <a:lnTo>
+                  <a:pt x="0" y="120000"/>
+                </a:lnTo>
+                <a:close/>
+              </a:path>
+            </a:pathLst>
+          </a:custGeom>
+        </p:spPr>
+      </p:sp>
+      <p:sp>
+        <p:nvSpPr>
+          <p:cNvPr id="152" name="Google Shape;152;gb6537f9ec8_0_217:notes">
+            <a:extLst>
+              <a:ext uri="{FF2B5EF4-FFF2-40B4-BE49-F238E27FC236}">
+                <a16:creationId xmlns:a16="http://schemas.microsoft.com/office/drawing/2014/main" id="{C4F09343-7BFC-FB38-3E51-171556D92E40}"/>
+              </a:ext>
+            </a:extLst>
+          </p:cNvPr>
+          <p:cNvSpPr txBox="1">
+            <a:spLocks noGrp="1"/>
+          </p:cNvSpPr>
+          <p:nvPr>
+            <p:ph type="body" idx="1"/>
+          </p:nvPr>
+        </p:nvSpPr>
+        <p:spPr>
+          <a:xfrm>
+            <a:off x="685800" y="4343400"/>
+            <a:ext cx="5486400" cy="4114800"/>
+          </a:xfrm>
+          <a:prstGeom prst="rect">
+            <a:avLst/>
+          </a:prstGeom>
+        </p:spPr>
+        <p:txBody>
+          <a:bodyPr spcFirstLastPara="1" wrap="square" lIns="91425" tIns="91425" rIns="91425" bIns="91425" anchor="t" anchorCtr="0">
+            <a:noAutofit/>
+          </a:bodyPr>
+          <a:lstStyle/>
+          <a:p>
+            <a:pPr marL="0" lvl="0" indent="0" algn="l" rtl="0">
+              <a:spcBef>
+                <a:spcPts val="0"/>
+              </a:spcBef>
+              <a:spcAft>
+                <a:spcPts val="0"/>
+              </a:spcAft>
+              <a:buNone/>
+            </a:pPr>
+            <a:endParaRPr/>
+          </a:p>
+        </p:txBody>
+      </p:sp>
+    </p:spTree>
+    <p:extLst>
+      <p:ext uri="{BB962C8B-B14F-4D97-AF65-F5344CB8AC3E}">
+        <p14:creationId xmlns:p14="http://schemas.microsoft.com/office/powerpoint/2010/main" val="3053494526"/>
+      </p:ext>
+    </p:extLst>
+  </p:cSld>
+  <p:clrMapOvr>
+    <a:masterClrMapping/>
+  </p:clrMapOvr>
+</p:notes>
+</file>
+
+<file path=ppt/notesSlides/notesSlide13.xml><?xml version="1.0" encoding="utf-8"?>
+<p:notes xmlns:a="http://schemas.openxmlformats.org/drawingml/2006/main" xmlns:r="http://schemas.openxmlformats.org/officeDocument/2006/relationships" xmlns:p="http://schemas.openxmlformats.org/presentationml/2006/main" showMasterSp="0" showMasterPhAnim="0">
+  <p:cSld>
+    <p:spTree>
+      <p:nvGrpSpPr>
+        <p:cNvPr id="1" name="Shape 150">
+          <a:extLst>
+            <a:ext uri="{FF2B5EF4-FFF2-40B4-BE49-F238E27FC236}">
+              <a16:creationId xmlns:a16="http://schemas.microsoft.com/office/drawing/2014/main" id="{38D368AF-0965-CCE7-1BDC-BBB2B151A980}"/>
+            </a:ext>
+          </a:extLst>
+        </p:cNvPr>
+        <p:cNvGrpSpPr/>
+        <p:nvPr/>
+      </p:nvGrpSpPr>
+      <p:grpSpPr>
+        <a:xfrm>
+          <a:off x="0" y="0"/>
+          <a:ext cx="0" cy="0"/>
+          <a:chOff x="0" y="0"/>
+          <a:chExt cx="0" cy="0"/>
+        </a:xfrm>
+      </p:grpSpPr>
+      <p:sp>
+        <p:nvSpPr>
+          <p:cNvPr id="151" name="Google Shape;151;gb6537f9ec8_0_217:notes">
+            <a:extLst>
+              <a:ext uri="{FF2B5EF4-FFF2-40B4-BE49-F238E27FC236}">
+                <a16:creationId xmlns:a16="http://schemas.microsoft.com/office/drawing/2014/main" id="{C73B1174-C06D-BAA0-ED7C-18F08B288C2D}"/>
+              </a:ext>
+            </a:extLst>
+          </p:cNvPr>
+          <p:cNvSpPr>
+            <a:spLocks noGrp="1" noRot="1" noChangeAspect="1"/>
+          </p:cNvSpPr>
+          <p:nvPr>
+            <p:ph type="sldImg" idx="2"/>
+          </p:nvPr>
+        </p:nvSpPr>
+        <p:spPr>
+          <a:xfrm>
+            <a:off x="381000" y="685800"/>
+            <a:ext cx="6096000" cy="3429000"/>
+          </a:xfrm>
+          <a:custGeom>
+            <a:avLst/>
+            <a:gdLst/>
+            <a:ahLst/>
+            <a:cxnLst/>
+            <a:rect l="l" t="t" r="r" b="b"/>
+            <a:pathLst>
+              <a:path w="120000" h="120000" extrusionOk="0">
+                <a:moveTo>
+                  <a:pt x="0" y="0"/>
+                </a:moveTo>
+                <a:lnTo>
+                  <a:pt x="120000" y="0"/>
+                </a:lnTo>
+                <a:lnTo>
+                  <a:pt x="120000" y="120000"/>
+                </a:lnTo>
+                <a:lnTo>
+                  <a:pt x="0" y="120000"/>
+                </a:lnTo>
+                <a:close/>
+              </a:path>
+            </a:pathLst>
+          </a:custGeom>
+        </p:spPr>
+      </p:sp>
+      <p:sp>
+        <p:nvSpPr>
+          <p:cNvPr id="152" name="Google Shape;152;gb6537f9ec8_0_217:notes">
+            <a:extLst>
+              <a:ext uri="{FF2B5EF4-FFF2-40B4-BE49-F238E27FC236}">
+                <a16:creationId xmlns:a16="http://schemas.microsoft.com/office/drawing/2014/main" id="{22CFF83F-D0CE-3AAF-E876-85F1A4175024}"/>
+              </a:ext>
+            </a:extLst>
+          </p:cNvPr>
+          <p:cNvSpPr txBox="1">
+            <a:spLocks noGrp="1"/>
+          </p:cNvSpPr>
+          <p:nvPr>
+            <p:ph type="body" idx="1"/>
+          </p:nvPr>
+        </p:nvSpPr>
+        <p:spPr>
+          <a:xfrm>
+            <a:off x="685800" y="4343400"/>
+            <a:ext cx="5486400" cy="4114800"/>
+          </a:xfrm>
+          <a:prstGeom prst="rect">
+            <a:avLst/>
+          </a:prstGeom>
+        </p:spPr>
+        <p:txBody>
+          <a:bodyPr spcFirstLastPara="1" wrap="square" lIns="91425" tIns="91425" rIns="91425" bIns="91425" anchor="t" anchorCtr="0">
+            <a:noAutofit/>
+          </a:bodyPr>
+          <a:lstStyle/>
+          <a:p>
+            <a:pPr marL="0" lvl="0" indent="0" algn="l" rtl="0">
+              <a:spcBef>
+                <a:spcPts val="0"/>
+              </a:spcBef>
+              <a:spcAft>
+                <a:spcPts val="0"/>
+              </a:spcAft>
+              <a:buNone/>
+            </a:pPr>
+            <a:endParaRPr/>
+          </a:p>
+        </p:txBody>
+      </p:sp>
+    </p:spTree>
+    <p:extLst>
+      <p:ext uri="{BB962C8B-B14F-4D97-AF65-F5344CB8AC3E}">
+        <p14:creationId xmlns:p14="http://schemas.microsoft.com/office/powerpoint/2010/main" val="301760925"/>
+      </p:ext>
+    </p:extLst>
+  </p:cSld>
+  <p:clrMapOvr>
+    <a:masterClrMapping/>
+  </p:clrMapOvr>
+</p:notes>
+</file>
+
+<file path=ppt/notesSlides/notesSlide14.xml><?xml version="1.0" encoding="utf-8"?>
+<p:notes xmlns:a="http://schemas.openxmlformats.org/drawingml/2006/main" xmlns:r="http://schemas.openxmlformats.org/officeDocument/2006/relationships" xmlns:p="http://schemas.openxmlformats.org/presentationml/2006/main" showMasterSp="0" showMasterPhAnim="0">
+  <p:cSld>
+    <p:spTree>
+      <p:nvGrpSpPr>
+        <p:cNvPr id="1" name="Shape 150">
+          <a:extLst>
+            <a:ext uri="{FF2B5EF4-FFF2-40B4-BE49-F238E27FC236}">
+              <a16:creationId xmlns:a16="http://schemas.microsoft.com/office/drawing/2014/main" id="{AFEDBBD0-4B32-2099-797F-801F2D5573F5}"/>
+            </a:ext>
+          </a:extLst>
+        </p:cNvPr>
+        <p:cNvGrpSpPr/>
+        <p:nvPr/>
+      </p:nvGrpSpPr>
+      <p:grpSpPr>
+        <a:xfrm>
+          <a:off x="0" y="0"/>
+          <a:ext cx="0" cy="0"/>
+          <a:chOff x="0" y="0"/>
+          <a:chExt cx="0" cy="0"/>
+        </a:xfrm>
+      </p:grpSpPr>
+      <p:sp>
+        <p:nvSpPr>
+          <p:cNvPr id="151" name="Google Shape;151;gb6537f9ec8_0_217:notes">
+            <a:extLst>
+              <a:ext uri="{FF2B5EF4-FFF2-40B4-BE49-F238E27FC236}">
+                <a16:creationId xmlns:a16="http://schemas.microsoft.com/office/drawing/2014/main" id="{8C65E107-1070-97D4-8B0B-6F8D568E2536}"/>
+              </a:ext>
+            </a:extLst>
+          </p:cNvPr>
+          <p:cNvSpPr>
+            <a:spLocks noGrp="1" noRot="1" noChangeAspect="1"/>
+          </p:cNvSpPr>
+          <p:nvPr>
+            <p:ph type="sldImg" idx="2"/>
+          </p:nvPr>
+        </p:nvSpPr>
+        <p:spPr>
+          <a:xfrm>
+            <a:off x="381000" y="685800"/>
+            <a:ext cx="6096000" cy="3429000"/>
+          </a:xfrm>
+          <a:custGeom>
+            <a:avLst/>
+            <a:gdLst/>
+            <a:ahLst/>
+            <a:cxnLst/>
+            <a:rect l="l" t="t" r="r" b="b"/>
+            <a:pathLst>
+              <a:path w="120000" h="120000" extrusionOk="0">
+                <a:moveTo>
+                  <a:pt x="0" y="0"/>
+                </a:moveTo>
+                <a:lnTo>
+                  <a:pt x="120000" y="0"/>
+                </a:lnTo>
+                <a:lnTo>
+                  <a:pt x="120000" y="120000"/>
+                </a:lnTo>
+                <a:lnTo>
+                  <a:pt x="0" y="120000"/>
+                </a:lnTo>
+                <a:close/>
+              </a:path>
+            </a:pathLst>
+          </a:custGeom>
+        </p:spPr>
+      </p:sp>
+      <p:sp>
+        <p:nvSpPr>
+          <p:cNvPr id="152" name="Google Shape;152;gb6537f9ec8_0_217:notes">
+            <a:extLst>
+              <a:ext uri="{FF2B5EF4-FFF2-40B4-BE49-F238E27FC236}">
+                <a16:creationId xmlns:a16="http://schemas.microsoft.com/office/drawing/2014/main" id="{1E5099F5-6E5C-6A4E-F614-7150594D63B7}"/>
+              </a:ext>
+            </a:extLst>
+          </p:cNvPr>
+          <p:cNvSpPr txBox="1">
+            <a:spLocks noGrp="1"/>
+          </p:cNvSpPr>
+          <p:nvPr>
+            <p:ph type="body" idx="1"/>
+          </p:nvPr>
+        </p:nvSpPr>
+        <p:spPr>
+          <a:xfrm>
+            <a:off x="685800" y="4343400"/>
+            <a:ext cx="5486400" cy="4114800"/>
+          </a:xfrm>
+          <a:prstGeom prst="rect">
+            <a:avLst/>
+          </a:prstGeom>
+        </p:spPr>
+        <p:txBody>
+          <a:bodyPr spcFirstLastPara="1" wrap="square" lIns="91425" tIns="91425" rIns="91425" bIns="91425" anchor="t" anchorCtr="0">
+            <a:noAutofit/>
+          </a:bodyPr>
+          <a:lstStyle/>
+          <a:p>
+            <a:pPr marL="0" lvl="0" indent="0" algn="l" rtl="0">
+              <a:spcBef>
+                <a:spcPts val="0"/>
+              </a:spcBef>
+              <a:spcAft>
+                <a:spcPts val="0"/>
+              </a:spcAft>
+              <a:buNone/>
+            </a:pPr>
+            <a:endParaRPr/>
+          </a:p>
+        </p:txBody>
+      </p:sp>
+    </p:spTree>
+    <p:extLst>
+      <p:ext uri="{BB962C8B-B14F-4D97-AF65-F5344CB8AC3E}">
+        <p14:creationId xmlns:p14="http://schemas.microsoft.com/office/powerpoint/2010/main" val="1572723745"/>
+      </p:ext>
+    </p:extLst>
+  </p:cSld>
+  <p:clrMapOvr>
+    <a:masterClrMapping/>
+  </p:clrMapOvr>
+</p:notes>
+</file>
+
+<file path=ppt/notesSlides/notesSlide15.xml><?xml version="1.0" encoding="utf-8"?>
+<p:notes xmlns:a="http://schemas.openxmlformats.org/drawingml/2006/main" xmlns:r="http://schemas.openxmlformats.org/officeDocument/2006/relationships" xmlns:p="http://schemas.openxmlformats.org/presentationml/2006/main" showMasterSp="0" showMasterPhAnim="0">
+  <p:cSld>
+    <p:spTree>
+      <p:nvGrpSpPr>
+        <p:cNvPr id="1" name="Shape 150">
+          <a:extLst>
+            <a:ext uri="{FF2B5EF4-FFF2-40B4-BE49-F238E27FC236}">
+              <a16:creationId xmlns:a16="http://schemas.microsoft.com/office/drawing/2014/main" id="{A9EED837-5F18-4E75-7A61-7071C7070E96}"/>
+            </a:ext>
+          </a:extLst>
+        </p:cNvPr>
+        <p:cNvGrpSpPr/>
+        <p:nvPr/>
+      </p:nvGrpSpPr>
+      <p:grpSpPr>
+        <a:xfrm>
+          <a:off x="0" y="0"/>
+          <a:ext cx="0" cy="0"/>
+          <a:chOff x="0" y="0"/>
+          <a:chExt cx="0" cy="0"/>
+        </a:xfrm>
+      </p:grpSpPr>
+      <p:sp>
+        <p:nvSpPr>
+          <p:cNvPr id="151" name="Google Shape;151;gb6537f9ec8_0_217:notes">
+            <a:extLst>
+              <a:ext uri="{FF2B5EF4-FFF2-40B4-BE49-F238E27FC236}">
+                <a16:creationId xmlns:a16="http://schemas.microsoft.com/office/drawing/2014/main" id="{822F2DAC-B14A-D266-34B7-D406E0AEA55E}"/>
+              </a:ext>
+            </a:extLst>
+          </p:cNvPr>
+          <p:cNvSpPr>
+            <a:spLocks noGrp="1" noRot="1" noChangeAspect="1"/>
+          </p:cNvSpPr>
+          <p:nvPr>
+            <p:ph type="sldImg" idx="2"/>
+          </p:nvPr>
+        </p:nvSpPr>
+        <p:spPr>
+          <a:xfrm>
+            <a:off x="381000" y="685800"/>
+            <a:ext cx="6096000" cy="3429000"/>
+          </a:xfrm>
+          <a:custGeom>
+            <a:avLst/>
+            <a:gdLst/>
+            <a:ahLst/>
+            <a:cxnLst/>
+            <a:rect l="l" t="t" r="r" b="b"/>
+            <a:pathLst>
+              <a:path w="120000" h="120000" extrusionOk="0">
+                <a:moveTo>
+                  <a:pt x="0" y="0"/>
+                </a:moveTo>
+                <a:lnTo>
+                  <a:pt x="120000" y="0"/>
+                </a:lnTo>
+                <a:lnTo>
+                  <a:pt x="120000" y="120000"/>
+                </a:lnTo>
+                <a:lnTo>
+                  <a:pt x="0" y="120000"/>
+                </a:lnTo>
+                <a:close/>
+              </a:path>
+            </a:pathLst>
+          </a:custGeom>
+        </p:spPr>
+      </p:sp>
+      <p:sp>
+        <p:nvSpPr>
+          <p:cNvPr id="152" name="Google Shape;152;gb6537f9ec8_0_217:notes">
+            <a:extLst>
+              <a:ext uri="{FF2B5EF4-FFF2-40B4-BE49-F238E27FC236}">
+                <a16:creationId xmlns:a16="http://schemas.microsoft.com/office/drawing/2014/main" id="{32DC7F6A-9954-EE9F-1FC0-6304C102CFFF}"/>
+              </a:ext>
+            </a:extLst>
+          </p:cNvPr>
+          <p:cNvSpPr txBox="1">
+            <a:spLocks noGrp="1"/>
+          </p:cNvSpPr>
+          <p:nvPr>
+            <p:ph type="body" idx="1"/>
+          </p:nvPr>
+        </p:nvSpPr>
+        <p:spPr>
+          <a:xfrm>
+            <a:off x="685800" y="4343400"/>
+            <a:ext cx="5486400" cy="4114800"/>
+          </a:xfrm>
+          <a:prstGeom prst="rect">
+            <a:avLst/>
+          </a:prstGeom>
+        </p:spPr>
+        <p:txBody>
+          <a:bodyPr spcFirstLastPara="1" wrap="square" lIns="91425" tIns="91425" rIns="91425" bIns="91425" anchor="t" anchorCtr="0">
+            <a:noAutofit/>
+          </a:bodyPr>
+          <a:lstStyle/>
+          <a:p>
+            <a:pPr marL="0" lvl="0" indent="0" algn="l" rtl="0">
+              <a:spcBef>
+                <a:spcPts val="0"/>
+              </a:spcBef>
+              <a:spcAft>
+                <a:spcPts val="0"/>
+              </a:spcAft>
+              <a:buNone/>
+            </a:pPr>
+            <a:endParaRPr/>
+          </a:p>
+        </p:txBody>
+      </p:sp>
+    </p:spTree>
+    <p:extLst>
+      <p:ext uri="{BB962C8B-B14F-4D97-AF65-F5344CB8AC3E}">
+        <p14:creationId xmlns:p14="http://schemas.microsoft.com/office/powerpoint/2010/main" val="993840816"/>
+      </p:ext>
+    </p:extLst>
+  </p:cSld>
+  <p:clrMapOvr>
+    <a:masterClrMapping/>
+  </p:clrMapOvr>
+</p:notes>
+</file>
+
+<file path=ppt/notesSlides/notesSlide16.xml><?xml version="1.0" encoding="utf-8"?>
+<p:notes xmlns:a="http://schemas.openxmlformats.org/drawingml/2006/main" xmlns:r="http://schemas.openxmlformats.org/officeDocument/2006/relationships" xmlns:p="http://schemas.openxmlformats.org/presentationml/2006/main" showMasterSp="0" showMasterPhAnim="0">
+  <p:cSld>
+    <p:spTree>
+      <p:nvGrpSpPr>
+        <p:cNvPr id="1" name="Shape 150">
+          <a:extLst>
+            <a:ext uri="{FF2B5EF4-FFF2-40B4-BE49-F238E27FC236}">
+              <a16:creationId xmlns:a16="http://schemas.microsoft.com/office/drawing/2014/main" id="{1887A03D-4CDD-0527-D1AF-56D8F7CE71F1}"/>
+            </a:ext>
+          </a:extLst>
+        </p:cNvPr>
+        <p:cNvGrpSpPr/>
+        <p:nvPr/>
+      </p:nvGrpSpPr>
+      <p:grpSpPr>
+        <a:xfrm>
+          <a:off x="0" y="0"/>
+          <a:ext cx="0" cy="0"/>
+          <a:chOff x="0" y="0"/>
+          <a:chExt cx="0" cy="0"/>
+        </a:xfrm>
+      </p:grpSpPr>
+      <p:sp>
+        <p:nvSpPr>
+          <p:cNvPr id="151" name="Google Shape;151;gb6537f9ec8_0_217:notes">
+            <a:extLst>
+              <a:ext uri="{FF2B5EF4-FFF2-40B4-BE49-F238E27FC236}">
+                <a16:creationId xmlns:a16="http://schemas.microsoft.com/office/drawing/2014/main" id="{251A3721-F1BC-E87C-1396-E1448C5BF64C}"/>
+              </a:ext>
+            </a:extLst>
+          </p:cNvPr>
+          <p:cNvSpPr>
+            <a:spLocks noGrp="1" noRot="1" noChangeAspect="1"/>
+          </p:cNvSpPr>
+          <p:nvPr>
+            <p:ph type="sldImg" idx="2"/>
+          </p:nvPr>
+        </p:nvSpPr>
+        <p:spPr>
+          <a:xfrm>
+            <a:off x="381000" y="685800"/>
+            <a:ext cx="6096000" cy="3429000"/>
+          </a:xfrm>
+          <a:custGeom>
+            <a:avLst/>
+            <a:gdLst/>
+            <a:ahLst/>
+            <a:cxnLst/>
+            <a:rect l="l" t="t" r="r" b="b"/>
+            <a:pathLst>
+              <a:path w="120000" h="120000" extrusionOk="0">
+                <a:moveTo>
+                  <a:pt x="0" y="0"/>
+                </a:moveTo>
+                <a:lnTo>
+                  <a:pt x="120000" y="0"/>
+                </a:lnTo>
+                <a:lnTo>
+                  <a:pt x="120000" y="120000"/>
+                </a:lnTo>
+                <a:lnTo>
+                  <a:pt x="0" y="120000"/>
+                </a:lnTo>
+                <a:close/>
+              </a:path>
+            </a:pathLst>
+          </a:custGeom>
+        </p:spPr>
+      </p:sp>
+      <p:sp>
+        <p:nvSpPr>
+          <p:cNvPr id="152" name="Google Shape;152;gb6537f9ec8_0_217:notes">
+            <a:extLst>
+              <a:ext uri="{FF2B5EF4-FFF2-40B4-BE49-F238E27FC236}">
+                <a16:creationId xmlns:a16="http://schemas.microsoft.com/office/drawing/2014/main" id="{CE4D7E87-8867-4CEE-E21A-ED7EAE904798}"/>
+              </a:ext>
+            </a:extLst>
+          </p:cNvPr>
+          <p:cNvSpPr txBox="1">
+            <a:spLocks noGrp="1"/>
+          </p:cNvSpPr>
+          <p:nvPr>
+            <p:ph type="body" idx="1"/>
+          </p:nvPr>
+        </p:nvSpPr>
+        <p:spPr>
+          <a:xfrm>
+            <a:off x="685800" y="4343400"/>
+            <a:ext cx="5486400" cy="4114800"/>
+          </a:xfrm>
+          <a:prstGeom prst="rect">
+            <a:avLst/>
+          </a:prstGeom>
+        </p:spPr>
+        <p:txBody>
+          <a:bodyPr spcFirstLastPara="1" wrap="square" lIns="91425" tIns="91425" rIns="91425" bIns="91425" anchor="t" anchorCtr="0">
+            <a:noAutofit/>
+          </a:bodyPr>
+          <a:lstStyle/>
+          <a:p>
+            <a:pPr marL="0" lvl="0" indent="0" algn="l" rtl="0">
+              <a:spcBef>
+                <a:spcPts val="0"/>
+              </a:spcBef>
+              <a:spcAft>
+                <a:spcPts val="0"/>
+              </a:spcAft>
+              <a:buNone/>
+            </a:pPr>
+            <a:endParaRPr/>
+          </a:p>
+        </p:txBody>
+      </p:sp>
+    </p:spTree>
+    <p:extLst>
+      <p:ext uri="{BB962C8B-B14F-4D97-AF65-F5344CB8AC3E}">
+        <p14:creationId xmlns:p14="http://schemas.microsoft.com/office/powerpoint/2010/main" val="383451046"/>
+      </p:ext>
+    </p:extLst>
+  </p:cSld>
+  <p:clrMapOvr>
+    <a:masterClrMapping/>
+  </p:clrMapOvr>
+</p:notes>
+</file>
+
+<file path=ppt/notesSlides/notesSlide17.xml><?xml version="1.0" encoding="utf-8"?>
+<p:notes xmlns:a="http://schemas.openxmlformats.org/drawingml/2006/main" xmlns:r="http://schemas.openxmlformats.org/officeDocument/2006/relationships" xmlns:p="http://schemas.openxmlformats.org/presentationml/2006/main" showMasterSp="0" showMasterPhAnim="0">
+  <p:cSld>
+    <p:spTree>
+      <p:nvGrpSpPr>
+        <p:cNvPr id="1" name="Shape 150">
+          <a:extLst>
+            <a:ext uri="{FF2B5EF4-FFF2-40B4-BE49-F238E27FC236}">
+              <a16:creationId xmlns:a16="http://schemas.microsoft.com/office/drawing/2014/main" id="{001A347B-704D-CAFD-C0B1-9B0A9C307DF0}"/>
+            </a:ext>
+          </a:extLst>
+        </p:cNvPr>
+        <p:cNvGrpSpPr/>
+        <p:nvPr/>
+      </p:nvGrpSpPr>
+      <p:grpSpPr>
+        <a:xfrm>
+          <a:off x="0" y="0"/>
+          <a:ext cx="0" cy="0"/>
+          <a:chOff x="0" y="0"/>
+          <a:chExt cx="0" cy="0"/>
+        </a:xfrm>
+      </p:grpSpPr>
+      <p:sp>
+        <p:nvSpPr>
+          <p:cNvPr id="151" name="Google Shape;151;gb6537f9ec8_0_217:notes">
+            <a:extLst>
+              <a:ext uri="{FF2B5EF4-FFF2-40B4-BE49-F238E27FC236}">
+                <a16:creationId xmlns:a16="http://schemas.microsoft.com/office/drawing/2014/main" id="{F8DA8F8E-42F1-1C6F-9F75-533064119E3E}"/>
+              </a:ext>
+            </a:extLst>
+          </p:cNvPr>
+          <p:cNvSpPr>
+            <a:spLocks noGrp="1" noRot="1" noChangeAspect="1"/>
+          </p:cNvSpPr>
+          <p:nvPr>
+            <p:ph type="sldImg" idx="2"/>
+          </p:nvPr>
+        </p:nvSpPr>
+        <p:spPr>
+          <a:xfrm>
+            <a:off x="381000" y="685800"/>
+            <a:ext cx="6096000" cy="3429000"/>
+          </a:xfrm>
+          <a:custGeom>
+            <a:avLst/>
+            <a:gdLst/>
+            <a:ahLst/>
+            <a:cxnLst/>
+            <a:rect l="l" t="t" r="r" b="b"/>
+            <a:pathLst>
+              <a:path w="120000" h="120000" extrusionOk="0">
+                <a:moveTo>
+                  <a:pt x="0" y="0"/>
+                </a:moveTo>
+                <a:lnTo>
+                  <a:pt x="120000" y="0"/>
+                </a:lnTo>
+                <a:lnTo>
+                  <a:pt x="120000" y="120000"/>
+                </a:lnTo>
+                <a:lnTo>
+                  <a:pt x="0" y="120000"/>
+                </a:lnTo>
+                <a:close/>
+              </a:path>
+            </a:pathLst>
+          </a:custGeom>
+        </p:spPr>
+      </p:sp>
+      <p:sp>
+        <p:nvSpPr>
+          <p:cNvPr id="152" name="Google Shape;152;gb6537f9ec8_0_217:notes">
+            <a:extLst>
+              <a:ext uri="{FF2B5EF4-FFF2-40B4-BE49-F238E27FC236}">
+                <a16:creationId xmlns:a16="http://schemas.microsoft.com/office/drawing/2014/main" id="{FB60C524-1ED3-FD30-BBA6-5BA158630671}"/>
+              </a:ext>
+            </a:extLst>
+          </p:cNvPr>
+          <p:cNvSpPr txBox="1">
+            <a:spLocks noGrp="1"/>
+          </p:cNvSpPr>
+          <p:nvPr>
+            <p:ph type="body" idx="1"/>
+          </p:nvPr>
+        </p:nvSpPr>
+        <p:spPr>
+          <a:xfrm>
+            <a:off x="685800" y="4343400"/>
+            <a:ext cx="5486400" cy="4114800"/>
+          </a:xfrm>
+          <a:prstGeom prst="rect">
+            <a:avLst/>
+          </a:prstGeom>
+        </p:spPr>
+        <p:txBody>
+          <a:bodyPr spcFirstLastPara="1" wrap="square" lIns="91425" tIns="91425" rIns="91425" bIns="91425" anchor="t" anchorCtr="0">
+            <a:noAutofit/>
+          </a:bodyPr>
+          <a:lstStyle/>
+          <a:p>
+            <a:pPr marL="0" lvl="0" indent="0" algn="l" rtl="0">
+              <a:spcBef>
+                <a:spcPts val="0"/>
+              </a:spcBef>
+              <a:spcAft>
+                <a:spcPts val="0"/>
+              </a:spcAft>
+              <a:buNone/>
+            </a:pPr>
+            <a:endParaRPr/>
+          </a:p>
+        </p:txBody>
+      </p:sp>
+    </p:spTree>
+    <p:extLst>
+      <p:ext uri="{BB962C8B-B14F-4D97-AF65-F5344CB8AC3E}">
+        <p14:creationId xmlns:p14="http://schemas.microsoft.com/office/powerpoint/2010/main" val="2313954647"/>
+      </p:ext>
+    </p:extLst>
+  </p:cSld>
+  <p:clrMapOvr>
+    <a:masterClrMapping/>
+  </p:clrMapOvr>
+</p:notes>
+</file>
+
+<file path=ppt/notesSlides/notesSlide18.xml><?xml version="1.0" encoding="utf-8"?>
+<p:notes xmlns:a="http://schemas.openxmlformats.org/drawingml/2006/main" xmlns:r="http://schemas.openxmlformats.org/officeDocument/2006/relationships" xmlns:p="http://schemas.openxmlformats.org/presentationml/2006/main" showMasterSp="0" showMasterPhAnim="0">
+  <p:cSld>
+    <p:spTree>
+      <p:nvGrpSpPr>
         <p:cNvPr id="1" name="Shape 177"/>
         <p:cNvGrpSpPr/>
         <p:nvPr/>
@@ -3390,601 +4172,6 @@
 </file>
 
 <file path=ppt/slideLayouts/slideLayout2.xml><?xml version="1.0" encoding="utf-8"?>
-<p:sldLayout xmlns:a="http://schemas.openxmlformats.org/drawingml/2006/main" xmlns:r="http://schemas.openxmlformats.org/officeDocument/2006/relationships" xmlns:p="http://schemas.openxmlformats.org/presentationml/2006/main" matchingName="Title only" type="titleOnly">
-  <p:cSld name="TITLE_ONLY">
-    <p:spTree>
-      <p:nvGrpSpPr>
-        <p:cNvPr id="1" name="Shape 25"/>
-        <p:cNvGrpSpPr/>
-        <p:nvPr/>
-      </p:nvGrpSpPr>
-      <p:grpSpPr>
-        <a:xfrm>
-          <a:off x="0" y="0"/>
-          <a:ext cx="0" cy="0"/>
-          <a:chOff x="0" y="0"/>
-          <a:chExt cx="0" cy="0"/>
-        </a:xfrm>
-      </p:grpSpPr>
-      <p:sp>
-        <p:nvSpPr>
-          <p:cNvPr id="26" name="Google Shape;26;p6"/>
-          <p:cNvSpPr txBox="1">
-            <a:spLocks noGrp="1"/>
-          </p:cNvSpPr>
-          <p:nvPr>
-            <p:ph type="title"/>
-          </p:nvPr>
-        </p:nvSpPr>
-        <p:spPr>
-          <a:xfrm>
-            <a:off x="311700" y="445025"/>
-            <a:ext cx="8520600" cy="572700"/>
-          </a:xfrm>
-          <a:prstGeom prst="rect">
-            <a:avLst/>
-          </a:prstGeom>
-        </p:spPr>
-        <p:txBody>
-          <a:bodyPr spcFirstLastPara="1" wrap="square" lIns="91425" tIns="91425" rIns="91425" bIns="91425" anchor="t" anchorCtr="0">
-            <a:noAutofit/>
-          </a:bodyPr>
-          <a:lstStyle>
-            <a:lvl1pPr lvl="0">
-              <a:spcBef>
-                <a:spcPts val="0"/>
-              </a:spcBef>
-              <a:spcAft>
-                <a:spcPts val="0"/>
-              </a:spcAft>
-              <a:buSzPts val="2800"/>
-              <a:buNone/>
-              <a:defRPr/>
-            </a:lvl1pPr>
-            <a:lvl2pPr lvl="1">
-              <a:spcBef>
-                <a:spcPts val="0"/>
-              </a:spcBef>
-              <a:spcAft>
-                <a:spcPts val="0"/>
-              </a:spcAft>
-              <a:buSzPts val="2800"/>
-              <a:buNone/>
-              <a:defRPr/>
-            </a:lvl2pPr>
-            <a:lvl3pPr lvl="2">
-              <a:spcBef>
-                <a:spcPts val="0"/>
-              </a:spcBef>
-              <a:spcAft>
-                <a:spcPts val="0"/>
-              </a:spcAft>
-              <a:buSzPts val="2800"/>
-              <a:buNone/>
-              <a:defRPr/>
-            </a:lvl3pPr>
-            <a:lvl4pPr lvl="3">
-              <a:spcBef>
-                <a:spcPts val="0"/>
-              </a:spcBef>
-              <a:spcAft>
-                <a:spcPts val="0"/>
-              </a:spcAft>
-              <a:buSzPts val="2800"/>
-              <a:buNone/>
-              <a:defRPr/>
-            </a:lvl4pPr>
-            <a:lvl5pPr lvl="4">
-              <a:spcBef>
-                <a:spcPts val="0"/>
-              </a:spcBef>
-              <a:spcAft>
-                <a:spcPts val="0"/>
-              </a:spcAft>
-              <a:buSzPts val="2800"/>
-              <a:buNone/>
-              <a:defRPr/>
-            </a:lvl5pPr>
-            <a:lvl6pPr lvl="5">
-              <a:spcBef>
-                <a:spcPts val="0"/>
-              </a:spcBef>
-              <a:spcAft>
-                <a:spcPts val="0"/>
-              </a:spcAft>
-              <a:buSzPts val="2800"/>
-              <a:buNone/>
-              <a:defRPr/>
-            </a:lvl6pPr>
-            <a:lvl7pPr lvl="6">
-              <a:spcBef>
-                <a:spcPts val="0"/>
-              </a:spcBef>
-              <a:spcAft>
-                <a:spcPts val="0"/>
-              </a:spcAft>
-              <a:buSzPts val="2800"/>
-              <a:buNone/>
-              <a:defRPr/>
-            </a:lvl7pPr>
-            <a:lvl8pPr lvl="7">
-              <a:spcBef>
-                <a:spcPts val="0"/>
-              </a:spcBef>
-              <a:spcAft>
-                <a:spcPts val="0"/>
-              </a:spcAft>
-              <a:buSzPts val="2800"/>
-              <a:buNone/>
-              <a:defRPr/>
-            </a:lvl8pPr>
-            <a:lvl9pPr lvl="8">
-              <a:spcBef>
-                <a:spcPts val="0"/>
-              </a:spcBef>
-              <a:spcAft>
-                <a:spcPts val="0"/>
-              </a:spcAft>
-              <a:buSzPts val="2800"/>
-              <a:buNone/>
-              <a:defRPr/>
-            </a:lvl9pPr>
-          </a:lstStyle>
-          <a:p>
-            <a:endParaRPr/>
-          </a:p>
-        </p:txBody>
-      </p:sp>
-      <p:sp>
-        <p:nvSpPr>
-          <p:cNvPr id="27" name="Google Shape;27;p6"/>
-          <p:cNvSpPr txBox="1">
-            <a:spLocks noGrp="1"/>
-          </p:cNvSpPr>
-          <p:nvPr>
-            <p:ph type="sldNum" idx="12"/>
-          </p:nvPr>
-        </p:nvSpPr>
-        <p:spPr>
-          <a:xfrm>
-            <a:off x="8472458" y="4663217"/>
-            <a:ext cx="548700" cy="393600"/>
-          </a:xfrm>
-          <a:prstGeom prst="rect">
-            <a:avLst/>
-          </a:prstGeom>
-        </p:spPr>
-        <p:txBody>
-          <a:bodyPr spcFirstLastPara="1" wrap="square" lIns="91425" tIns="91425" rIns="91425" bIns="91425" anchor="ctr" anchorCtr="0">
-            <a:noAutofit/>
-          </a:bodyPr>
-          <a:lstStyle>
-            <a:lvl1pPr lvl="0">
-              <a:buNone/>
-              <a:defRPr/>
-            </a:lvl1pPr>
-            <a:lvl2pPr lvl="1">
-              <a:buNone/>
-              <a:defRPr/>
-            </a:lvl2pPr>
-            <a:lvl3pPr lvl="2">
-              <a:buNone/>
-              <a:defRPr/>
-            </a:lvl3pPr>
-            <a:lvl4pPr lvl="3">
-              <a:buNone/>
-              <a:defRPr/>
-            </a:lvl4pPr>
-            <a:lvl5pPr lvl="4">
-              <a:buNone/>
-              <a:defRPr/>
-            </a:lvl5pPr>
-            <a:lvl6pPr lvl="5">
-              <a:buNone/>
-              <a:defRPr/>
-            </a:lvl6pPr>
-            <a:lvl7pPr lvl="6">
-              <a:buNone/>
-              <a:defRPr/>
-            </a:lvl7pPr>
-            <a:lvl8pPr lvl="7">
-              <a:buNone/>
-              <a:defRPr/>
-            </a:lvl8pPr>
-            <a:lvl9pPr lvl="8">
-              <a:buNone/>
-              <a:defRPr/>
-            </a:lvl9pPr>
-          </a:lstStyle>
-          <a:p>
-            <a:pPr marL="0" lvl="0" indent="0" algn="r" rtl="0">
-              <a:spcBef>
-                <a:spcPts val="0"/>
-              </a:spcBef>
-              <a:spcAft>
-                <a:spcPts val="0"/>
-              </a:spcAft>
-              <a:buNone/>
-            </a:pPr>
-            <a:fld id="{00000000-1234-1234-1234-123412341234}" type="slidenum">
-              <a:rPr lang="de"/>
-              <a:t>‹Nº›</a:t>
-            </a:fld>
-            <a:endParaRPr/>
-          </a:p>
-        </p:txBody>
-      </p:sp>
-    </p:spTree>
-  </p:cSld>
-  <p:clrMapOvr>
-    <a:masterClrMapping/>
-  </p:clrMapOvr>
-</p:sldLayout>
-</file>
-
-<file path=ppt/slideLayouts/slideLayout3.xml><?xml version="1.0" encoding="utf-8"?>
-<p:sldLayout xmlns:a="http://schemas.openxmlformats.org/drawingml/2006/main" xmlns:r="http://schemas.openxmlformats.org/officeDocument/2006/relationships" xmlns:p="http://schemas.openxmlformats.org/presentationml/2006/main" matchingName="One column text">
-  <p:cSld name="ONE_COLUMN_TEXT">
-    <p:spTree>
-      <p:nvGrpSpPr>
-        <p:cNvPr id="1" name="Shape 28"/>
-        <p:cNvGrpSpPr/>
-        <p:nvPr/>
-      </p:nvGrpSpPr>
-      <p:grpSpPr>
-        <a:xfrm>
-          <a:off x="0" y="0"/>
-          <a:ext cx="0" cy="0"/>
-          <a:chOff x="0" y="0"/>
-          <a:chExt cx="0" cy="0"/>
-        </a:xfrm>
-      </p:grpSpPr>
-      <p:sp>
-        <p:nvSpPr>
-          <p:cNvPr id="29" name="Google Shape;29;p7"/>
-          <p:cNvSpPr txBox="1">
-            <a:spLocks noGrp="1"/>
-          </p:cNvSpPr>
-          <p:nvPr>
-            <p:ph type="title"/>
-          </p:nvPr>
-        </p:nvSpPr>
-        <p:spPr>
-          <a:xfrm>
-            <a:off x="311700" y="555600"/>
-            <a:ext cx="2808000" cy="755700"/>
-          </a:xfrm>
-          <a:prstGeom prst="rect">
-            <a:avLst/>
-          </a:prstGeom>
-        </p:spPr>
-        <p:txBody>
-          <a:bodyPr spcFirstLastPara="1" wrap="square" lIns="91425" tIns="91425" rIns="91425" bIns="91425" anchor="b" anchorCtr="0">
-            <a:noAutofit/>
-          </a:bodyPr>
-          <a:lstStyle>
-            <a:lvl1pPr lvl="0">
-              <a:spcBef>
-                <a:spcPts val="0"/>
-              </a:spcBef>
-              <a:spcAft>
-                <a:spcPts val="0"/>
-              </a:spcAft>
-              <a:buSzPts val="2400"/>
-              <a:buNone/>
-              <a:defRPr sz="2400"/>
-            </a:lvl1pPr>
-            <a:lvl2pPr lvl="1">
-              <a:spcBef>
-                <a:spcPts val="0"/>
-              </a:spcBef>
-              <a:spcAft>
-                <a:spcPts val="0"/>
-              </a:spcAft>
-              <a:buSzPts val="2400"/>
-              <a:buNone/>
-              <a:defRPr sz="2400"/>
-            </a:lvl2pPr>
-            <a:lvl3pPr lvl="2">
-              <a:spcBef>
-                <a:spcPts val="0"/>
-              </a:spcBef>
-              <a:spcAft>
-                <a:spcPts val="0"/>
-              </a:spcAft>
-              <a:buSzPts val="2400"/>
-              <a:buNone/>
-              <a:defRPr sz="2400"/>
-            </a:lvl3pPr>
-            <a:lvl4pPr lvl="3">
-              <a:spcBef>
-                <a:spcPts val="0"/>
-              </a:spcBef>
-              <a:spcAft>
-                <a:spcPts val="0"/>
-              </a:spcAft>
-              <a:buSzPts val="2400"/>
-              <a:buNone/>
-              <a:defRPr sz="2400"/>
-            </a:lvl4pPr>
-            <a:lvl5pPr lvl="4">
-              <a:spcBef>
-                <a:spcPts val="0"/>
-              </a:spcBef>
-              <a:spcAft>
-                <a:spcPts val="0"/>
-              </a:spcAft>
-              <a:buSzPts val="2400"/>
-              <a:buNone/>
-              <a:defRPr sz="2400"/>
-            </a:lvl5pPr>
-            <a:lvl6pPr lvl="5">
-              <a:spcBef>
-                <a:spcPts val="0"/>
-              </a:spcBef>
-              <a:spcAft>
-                <a:spcPts val="0"/>
-              </a:spcAft>
-              <a:buSzPts val="2400"/>
-              <a:buNone/>
-              <a:defRPr sz="2400"/>
-            </a:lvl6pPr>
-            <a:lvl7pPr lvl="6">
-              <a:spcBef>
-                <a:spcPts val="0"/>
-              </a:spcBef>
-              <a:spcAft>
-                <a:spcPts val="0"/>
-              </a:spcAft>
-              <a:buSzPts val="2400"/>
-              <a:buNone/>
-              <a:defRPr sz="2400"/>
-            </a:lvl7pPr>
-            <a:lvl8pPr lvl="7">
-              <a:spcBef>
-                <a:spcPts val="0"/>
-              </a:spcBef>
-              <a:spcAft>
-                <a:spcPts val="0"/>
-              </a:spcAft>
-              <a:buSzPts val="2400"/>
-              <a:buNone/>
-              <a:defRPr sz="2400"/>
-            </a:lvl8pPr>
-            <a:lvl9pPr lvl="8">
-              <a:spcBef>
-                <a:spcPts val="0"/>
-              </a:spcBef>
-              <a:spcAft>
-                <a:spcPts val="0"/>
-              </a:spcAft>
-              <a:buSzPts val="2400"/>
-              <a:buNone/>
-              <a:defRPr sz="2400"/>
-            </a:lvl9pPr>
-          </a:lstStyle>
-          <a:p>
-            <a:endParaRPr/>
-          </a:p>
-        </p:txBody>
-      </p:sp>
-      <p:sp>
-        <p:nvSpPr>
-          <p:cNvPr id="30" name="Google Shape;30;p7"/>
-          <p:cNvSpPr txBox="1">
-            <a:spLocks noGrp="1"/>
-          </p:cNvSpPr>
-          <p:nvPr>
-            <p:ph type="body" idx="1"/>
-          </p:nvPr>
-        </p:nvSpPr>
-        <p:spPr>
-          <a:xfrm>
-            <a:off x="311700" y="1389600"/>
-            <a:ext cx="2808000" cy="3179400"/>
-          </a:xfrm>
-          <a:prstGeom prst="rect">
-            <a:avLst/>
-          </a:prstGeom>
-        </p:spPr>
-        <p:txBody>
-          <a:bodyPr spcFirstLastPara="1" wrap="square" lIns="91425" tIns="91425" rIns="91425" bIns="91425" anchor="t" anchorCtr="0">
-            <a:noAutofit/>
-          </a:bodyPr>
-          <a:lstStyle>
-            <a:lvl1pPr marL="457200" lvl="0" indent="-304800">
-              <a:spcBef>
-                <a:spcPts val="0"/>
-              </a:spcBef>
-              <a:spcAft>
-                <a:spcPts val="0"/>
-              </a:spcAft>
-              <a:buSzPts val="1200"/>
-              <a:buChar char="●"/>
-              <a:defRPr sz="1200"/>
-            </a:lvl1pPr>
-            <a:lvl2pPr marL="914400" lvl="1" indent="-304800">
-              <a:spcBef>
-                <a:spcPts val="1600"/>
-              </a:spcBef>
-              <a:spcAft>
-                <a:spcPts val="0"/>
-              </a:spcAft>
-              <a:buSzPts val="1200"/>
-              <a:buChar char="○"/>
-              <a:defRPr sz="1200"/>
-            </a:lvl2pPr>
-            <a:lvl3pPr marL="1371600" lvl="2" indent="-304800">
-              <a:spcBef>
-                <a:spcPts val="1600"/>
-              </a:spcBef>
-              <a:spcAft>
-                <a:spcPts val="0"/>
-              </a:spcAft>
-              <a:buSzPts val="1200"/>
-              <a:buChar char="■"/>
-              <a:defRPr sz="1200"/>
-            </a:lvl3pPr>
-            <a:lvl4pPr marL="1828800" lvl="3" indent="-304800">
-              <a:spcBef>
-                <a:spcPts val="1600"/>
-              </a:spcBef>
-              <a:spcAft>
-                <a:spcPts val="0"/>
-              </a:spcAft>
-              <a:buSzPts val="1200"/>
-              <a:buChar char="●"/>
-              <a:defRPr sz="1200"/>
-            </a:lvl4pPr>
-            <a:lvl5pPr marL="2286000" lvl="4" indent="-304800">
-              <a:spcBef>
-                <a:spcPts val="1600"/>
-              </a:spcBef>
-              <a:spcAft>
-                <a:spcPts val="0"/>
-              </a:spcAft>
-              <a:buSzPts val="1200"/>
-              <a:buChar char="○"/>
-              <a:defRPr sz="1200"/>
-            </a:lvl5pPr>
-            <a:lvl6pPr marL="2743200" lvl="5" indent="-304800">
-              <a:spcBef>
-                <a:spcPts val="1600"/>
-              </a:spcBef>
-              <a:spcAft>
-                <a:spcPts val="0"/>
-              </a:spcAft>
-              <a:buSzPts val="1200"/>
-              <a:buChar char="■"/>
-              <a:defRPr sz="1200"/>
-            </a:lvl6pPr>
-            <a:lvl7pPr marL="3200400" lvl="6" indent="-304800">
-              <a:spcBef>
-                <a:spcPts val="1600"/>
-              </a:spcBef>
-              <a:spcAft>
-                <a:spcPts val="0"/>
-              </a:spcAft>
-              <a:buSzPts val="1200"/>
-              <a:buChar char="●"/>
-              <a:defRPr sz="1200"/>
-            </a:lvl7pPr>
-            <a:lvl8pPr marL="3657600" lvl="7" indent="-304800">
-              <a:spcBef>
-                <a:spcPts val="1600"/>
-              </a:spcBef>
-              <a:spcAft>
-                <a:spcPts val="0"/>
-              </a:spcAft>
-              <a:buSzPts val="1200"/>
-              <a:buChar char="○"/>
-              <a:defRPr sz="1200"/>
-            </a:lvl8pPr>
-            <a:lvl9pPr marL="4114800" lvl="8" indent="-304800">
-              <a:spcBef>
-                <a:spcPts val="1600"/>
-              </a:spcBef>
-              <a:spcAft>
-                <a:spcPts val="1600"/>
-              </a:spcAft>
-              <a:buSzPts val="1200"/>
-              <a:buChar char="■"/>
-              <a:defRPr sz="1200"/>
-            </a:lvl9pPr>
-          </a:lstStyle>
-          <a:p>
-            <a:endParaRPr/>
-          </a:p>
-        </p:txBody>
-      </p:sp>
-      <p:sp>
-        <p:nvSpPr>
-          <p:cNvPr id="31" name="Google Shape;31;p7"/>
-          <p:cNvSpPr txBox="1">
-            <a:spLocks noGrp="1"/>
-          </p:cNvSpPr>
-          <p:nvPr>
-            <p:ph type="sldNum" idx="12"/>
-          </p:nvPr>
-        </p:nvSpPr>
-        <p:spPr>
-          <a:xfrm>
-            <a:off x="8472458" y="4663217"/>
-            <a:ext cx="548700" cy="393600"/>
-          </a:xfrm>
-          <a:prstGeom prst="rect">
-            <a:avLst/>
-          </a:prstGeom>
-        </p:spPr>
-        <p:txBody>
-          <a:bodyPr spcFirstLastPara="1" wrap="square" lIns="91425" tIns="91425" rIns="91425" bIns="91425" anchor="ctr" anchorCtr="0">
-            <a:noAutofit/>
-          </a:bodyPr>
-          <a:lstStyle>
-            <a:lvl1pPr lvl="0">
-              <a:buNone/>
-              <a:defRPr/>
-            </a:lvl1pPr>
-            <a:lvl2pPr lvl="1">
-              <a:buNone/>
-              <a:defRPr/>
-            </a:lvl2pPr>
-            <a:lvl3pPr lvl="2">
-              <a:buNone/>
-              <a:defRPr/>
-            </a:lvl3pPr>
-            <a:lvl4pPr lvl="3">
-              <a:buNone/>
-              <a:defRPr/>
-            </a:lvl4pPr>
-            <a:lvl5pPr lvl="4">
-              <a:buNone/>
-              <a:defRPr/>
-            </a:lvl5pPr>
-            <a:lvl6pPr lvl="5">
-              <a:buNone/>
-              <a:defRPr/>
-            </a:lvl6pPr>
-            <a:lvl7pPr lvl="6">
-              <a:buNone/>
-              <a:defRPr/>
-            </a:lvl7pPr>
-            <a:lvl8pPr lvl="7">
-              <a:buNone/>
-              <a:defRPr/>
-            </a:lvl8pPr>
-            <a:lvl9pPr lvl="8">
-              <a:buNone/>
-              <a:defRPr/>
-            </a:lvl9pPr>
-          </a:lstStyle>
-          <a:p>
-            <a:pPr marL="0" lvl="0" indent="0" algn="r" rtl="0">
-              <a:spcBef>
-                <a:spcPts val="0"/>
-              </a:spcBef>
-              <a:spcAft>
-                <a:spcPts val="0"/>
-              </a:spcAft>
-              <a:buNone/>
-            </a:pPr>
-            <a:fld id="{00000000-1234-1234-1234-123412341234}" type="slidenum">
-              <a:rPr lang="de"/>
-              <a:t>‹Nº›</a:t>
-            </a:fld>
-            <a:endParaRPr/>
-          </a:p>
-        </p:txBody>
-      </p:sp>
-    </p:spTree>
-  </p:cSld>
-  <p:clrMapOvr>
-    <a:masterClrMapping/>
-  </p:clrMapOvr>
-</p:sldLayout>
-</file>
-
-<file path=ppt/slideLayouts/slideLayout4.xml><?xml version="1.0" encoding="utf-8"?>
 <p:sldLayout xmlns:a="http://schemas.openxmlformats.org/drawingml/2006/main" xmlns:r="http://schemas.openxmlformats.org/officeDocument/2006/relationships" xmlns:p="http://schemas.openxmlformats.org/presentationml/2006/main" matchingName="Main point">
   <p:cSld name="MAIN_POINT">
     <p:spTree>
@@ -4217,7 +4404,7 @@
 </p:sldLayout>
 </file>
 
-<file path=ppt/slideLayouts/slideLayout5.xml><?xml version="1.0" encoding="utf-8"?>
+<file path=ppt/slideLayouts/slideLayout3.xml><?xml version="1.0" encoding="utf-8"?>
 <p:sldLayout xmlns:a="http://schemas.openxmlformats.org/drawingml/2006/main" xmlns:r="http://schemas.openxmlformats.org/officeDocument/2006/relationships" xmlns:p="http://schemas.openxmlformats.org/presentationml/2006/main" matchingName="Section title and description">
   <p:cSld name="SECTION_TITLE_AND_DESCRIPTION">
     <p:spTree>
@@ -4775,7 +4962,7 @@
 </p:sldLayout>
 </file>
 
-<file path=ppt/slideLayouts/slideLayout6.xml><?xml version="1.0" encoding="utf-8"?>
+<file path=ppt/slideLayouts/slideLayout4.xml><?xml version="1.0" encoding="utf-8"?>
 <p:sldLayout xmlns:a="http://schemas.openxmlformats.org/drawingml/2006/main" xmlns:r="http://schemas.openxmlformats.org/officeDocument/2006/relationships" xmlns:p="http://schemas.openxmlformats.org/presentationml/2006/main" matchingName="Caption">
   <p:cSld name="CAPTION_ONLY">
     <p:spTree>
@@ -4923,7 +5110,7 @@
 </p:sldLayout>
 </file>
 
-<file path=ppt/slideLayouts/slideLayout7.xml><?xml version="1.0" encoding="utf-8"?>
+<file path=ppt/slideLayouts/slideLayout5.xml><?xml version="1.0" encoding="utf-8"?>
 <p:sldLayout xmlns:a="http://schemas.openxmlformats.org/drawingml/2006/main" xmlns:r="http://schemas.openxmlformats.org/officeDocument/2006/relationships" xmlns:p="http://schemas.openxmlformats.org/presentationml/2006/main" matchingName="Big number">
   <p:cSld name="BIG_NUMBER">
     <p:spTree>
@@ -5287,7 +5474,7 @@
 </p:sldLayout>
 </file>
 
-<file path=ppt/slideLayouts/slideLayout8.xml><?xml version="1.0" encoding="utf-8"?>
+<file path=ppt/slideLayouts/slideLayout6.xml><?xml version="1.0" encoding="utf-8"?>
 <p:sldLayout xmlns:a="http://schemas.openxmlformats.org/drawingml/2006/main" xmlns:r="http://schemas.openxmlformats.org/officeDocument/2006/relationships" xmlns:p="http://schemas.openxmlformats.org/presentationml/2006/main" matchingName="Blank" type="blank">
   <p:cSld name="BLANK">
     <p:spTree>
@@ -5959,13 +6146,11 @@
   <p:clrMap bg1="lt1" tx1="dk1" bg2="dk2" tx2="lt2" accent1="accent1" accent2="accent2" accent3="accent3" accent4="accent4" accent5="accent5" accent6="accent6" hlink="hlink" folHlink="folHlink"/>
   <p:sldLayoutIdLst>
     <p:sldLayoutId id="2147483648" r:id="rId1"/>
-    <p:sldLayoutId id="2147483652" r:id="rId2"/>
-    <p:sldLayoutId id="2147483653" r:id="rId3"/>
-    <p:sldLayoutId id="2147483654" r:id="rId4"/>
-    <p:sldLayoutId id="2147483655" r:id="rId5"/>
-    <p:sldLayoutId id="2147483656" r:id="rId6"/>
-    <p:sldLayoutId id="2147483657" r:id="rId7"/>
-    <p:sldLayoutId id="2147483658" r:id="rId8"/>
+    <p:sldLayoutId id="2147483654" r:id="rId2"/>
+    <p:sldLayoutId id="2147483655" r:id="rId3"/>
+    <p:sldLayoutId id="2147483656" r:id="rId4"/>
+    <p:sldLayoutId id="2147483657" r:id="rId5"/>
+    <p:sldLayoutId id="2147483658" r:id="rId6"/>
   </p:sldLayoutIdLst>
   <p:hf sldNum="0" hdr="0" ftr="0" dt="0"/>
   <p:txStyles>
@@ -7771,6 +7956,2565 @@
 </file>
 
 <file path=ppt/slides/slide12.xml><?xml version="1.0" encoding="utf-8"?>
+<p:sld xmlns:a="http://schemas.openxmlformats.org/drawingml/2006/main" xmlns:r="http://schemas.openxmlformats.org/officeDocument/2006/relationships" xmlns:p="http://schemas.openxmlformats.org/presentationml/2006/main">
+  <p:cSld>
+    <p:spTree>
+      <p:nvGrpSpPr>
+        <p:cNvPr id="1" name="Shape 153">
+          <a:extLst>
+            <a:ext uri="{FF2B5EF4-FFF2-40B4-BE49-F238E27FC236}">
+              <a16:creationId xmlns:a16="http://schemas.microsoft.com/office/drawing/2014/main" id="{74043A95-B8D7-4272-9885-F5E04D3906C9}"/>
+            </a:ext>
+          </a:extLst>
+        </p:cNvPr>
+        <p:cNvGrpSpPr/>
+        <p:nvPr/>
+      </p:nvGrpSpPr>
+      <p:grpSpPr>
+        <a:xfrm>
+          <a:off x="0" y="0"/>
+          <a:ext cx="0" cy="0"/>
+          <a:chOff x="0" y="0"/>
+          <a:chExt cx="0" cy="0"/>
+        </a:xfrm>
+      </p:grpSpPr>
+      <p:sp>
+        <p:nvSpPr>
+          <p:cNvPr id="155" name="Google Shape;155;p24">
+            <a:extLst>
+              <a:ext uri="{FF2B5EF4-FFF2-40B4-BE49-F238E27FC236}">
+                <a16:creationId xmlns:a16="http://schemas.microsoft.com/office/drawing/2014/main" id="{81F1D96C-C9F6-96C9-1ACF-7CE308CAE084}"/>
+              </a:ext>
+            </a:extLst>
+          </p:cNvPr>
+          <p:cNvSpPr txBox="1"/>
+          <p:nvPr/>
+        </p:nvSpPr>
+        <p:spPr>
+          <a:xfrm>
+            <a:off x="356011" y="62251"/>
+            <a:ext cx="7105752" cy="696535"/>
+          </a:xfrm>
+          <a:prstGeom prst="rect">
+            <a:avLst/>
+          </a:prstGeom>
+          <a:noFill/>
+          <a:ln>
+            <a:noFill/>
+          </a:ln>
+        </p:spPr>
+        <p:txBody>
+          <a:bodyPr spcFirstLastPara="1" wrap="square" lIns="91425" tIns="91425" rIns="91425" bIns="91425" anchor="t" anchorCtr="0">
+            <a:noAutofit/>
+          </a:bodyPr>
+          <a:lstStyle/>
+          <a:p>
+            <a:pPr marL="0" lvl="0" indent="0" algn="l" rtl="0">
+              <a:lnSpc>
+                <a:spcPct val="90000"/>
+              </a:lnSpc>
+              <a:spcBef>
+                <a:spcPts val="0"/>
+              </a:spcBef>
+              <a:spcAft>
+                <a:spcPts val="0"/>
+              </a:spcAft>
+              <a:buClr>
+                <a:schemeClr val="dk1"/>
+              </a:buClr>
+              <a:buSzPts val="1100"/>
+              <a:buFont typeface="Arial"/>
+              <a:buNone/>
+            </a:pPr>
+            <a:r>
+              <a:rPr lang="es-ES" sz="2600" dirty="0">
+                <a:solidFill>
+                  <a:schemeClr val="accent3"/>
+                </a:solidFill>
+              </a:rPr>
+              <a:t>ML: MODELO DE CLASIFICACIÓN</a:t>
+            </a:r>
+            <a:endParaRPr sz="2600" dirty="0">
+              <a:solidFill>
+                <a:schemeClr val="accent3"/>
+              </a:solidFill>
+            </a:endParaRPr>
+          </a:p>
+        </p:txBody>
+      </p:sp>
+      <p:pic>
+        <p:nvPicPr>
+          <p:cNvPr id="2" name="Picture 6">
+            <a:extLst>
+              <a:ext uri="{FF2B5EF4-FFF2-40B4-BE49-F238E27FC236}">
+                <a16:creationId xmlns:a16="http://schemas.microsoft.com/office/drawing/2014/main" id="{305758A0-1186-0A82-1998-1F7B1CD1A4DC}"/>
+              </a:ext>
+            </a:extLst>
+          </p:cNvPr>
+          <p:cNvPicPr>
+            <a:picLocks noChangeAspect="1" noChangeArrowheads="1"/>
+          </p:cNvPicPr>
+          <p:nvPr/>
+        </p:nvPicPr>
+        <p:blipFill>
+          <a:blip r:embed="rId3">
+            <a:extLst>
+              <a:ext uri="{28A0092B-C50C-407E-A947-70E740481C1C}">
+                <a14:useLocalDpi xmlns:a14="http://schemas.microsoft.com/office/drawing/2010/main" val="0"/>
+              </a:ext>
+            </a:extLst>
+          </a:blip>
+          <a:srcRect/>
+          <a:stretch>
+            <a:fillRect/>
+          </a:stretch>
+        </p:blipFill>
+        <p:spPr bwMode="auto">
+          <a:xfrm>
+            <a:off x="7820094" y="134738"/>
+            <a:ext cx="1184562" cy="275781"/>
+          </a:xfrm>
+          <a:prstGeom prst="rect">
+            <a:avLst/>
+          </a:prstGeom>
+          <a:noFill/>
+          <a:extLst>
+            <a:ext uri="{909E8E84-426E-40DD-AFC4-6F175D3DCCD1}">
+              <a14:hiddenFill xmlns:a14="http://schemas.microsoft.com/office/drawing/2010/main">
+                <a:solidFill>
+                  <a:srgbClr val="FFFFFF"/>
+                </a:solidFill>
+              </a14:hiddenFill>
+            </a:ext>
+          </a:extLst>
+        </p:spPr>
+      </p:pic>
+      <p:sp>
+        <p:nvSpPr>
+          <p:cNvPr id="6" name="CuadroTexto 5">
+            <a:extLst>
+              <a:ext uri="{FF2B5EF4-FFF2-40B4-BE49-F238E27FC236}">
+                <a16:creationId xmlns:a16="http://schemas.microsoft.com/office/drawing/2014/main" id="{C0736F1C-62CC-AF41-A3C1-ABF5E931AAD7}"/>
+              </a:ext>
+            </a:extLst>
+          </p:cNvPr>
+          <p:cNvSpPr txBox="1"/>
+          <p:nvPr/>
+        </p:nvSpPr>
+        <p:spPr>
+          <a:xfrm>
+            <a:off x="681470" y="1316638"/>
+            <a:ext cx="7670530" cy="707886"/>
+          </a:xfrm>
+          <a:prstGeom prst="rect">
+            <a:avLst/>
+          </a:prstGeom>
+          <a:noFill/>
+        </p:spPr>
+        <p:txBody>
+          <a:bodyPr wrap="square" rtlCol="0">
+            <a:spAutoFit/>
+          </a:bodyPr>
+          <a:lstStyle/>
+          <a:p>
+            <a:r>
+              <a:rPr lang="es-ES" sz="1000" dirty="0">
+                <a:latin typeface="Montserrat" panose="00000500000000000000" pitchFamily="2" charset="0"/>
+              </a:rPr>
+              <a:t>🔍 </a:t>
+            </a:r>
+            <a:r>
+              <a:rPr lang="es-ES" sz="1000" i="1" dirty="0">
+                <a:latin typeface="Montserrat" panose="00000500000000000000" pitchFamily="2" charset="0"/>
+              </a:rPr>
+              <a:t>Variable Objetivo: </a:t>
+            </a:r>
+            <a:r>
+              <a:rPr lang="es-ES" sz="1000" dirty="0" err="1">
+                <a:latin typeface="Montserrat" panose="00000500000000000000" pitchFamily="2" charset="0"/>
+              </a:rPr>
+              <a:t>booking_status</a:t>
+            </a:r>
+            <a:r>
+              <a:rPr lang="es-ES" sz="1000" dirty="0">
+                <a:latin typeface="Montserrat" panose="00000500000000000000" pitchFamily="2" charset="0"/>
+              </a:rPr>
+              <a:t>: Cancelada (1) / No Cancelada (0)</a:t>
+            </a:r>
+          </a:p>
+          <a:p>
+            <a:endParaRPr lang="es-ES" sz="1000" dirty="0">
+              <a:latin typeface="Montserrat" panose="00000500000000000000" pitchFamily="2" charset="0"/>
+            </a:endParaRPr>
+          </a:p>
+          <a:p>
+            <a:r>
+              <a:rPr lang="es-ES" sz="1000" dirty="0">
+                <a:latin typeface="Montserrat" panose="00000500000000000000" pitchFamily="2" charset="0"/>
+              </a:rPr>
+              <a:t>	</a:t>
+            </a:r>
+            <a:r>
+              <a:rPr lang="es-ES" sz="1000" i="1" dirty="0">
+                <a:latin typeface="Montserrat" panose="00000500000000000000" pitchFamily="2" charset="0"/>
+              </a:rPr>
+              <a:t>Objetivo: Anticipar si una reserva será cancelada</a:t>
+            </a:r>
+          </a:p>
+          <a:p>
+            <a:endParaRPr lang="es-ES" sz="1000" dirty="0">
+              <a:latin typeface="Montserrat" panose="00000500000000000000" pitchFamily="2" charset="0"/>
+            </a:endParaRPr>
+          </a:p>
+        </p:txBody>
+      </p:sp>
+      <p:sp>
+        <p:nvSpPr>
+          <p:cNvPr id="25" name="CuadroTexto 24">
+            <a:extLst>
+              <a:ext uri="{FF2B5EF4-FFF2-40B4-BE49-F238E27FC236}">
+                <a16:creationId xmlns:a16="http://schemas.microsoft.com/office/drawing/2014/main" id="{393E506C-8709-30FE-1980-00765172C0FA}"/>
+              </a:ext>
+            </a:extLst>
+          </p:cNvPr>
+          <p:cNvSpPr txBox="1"/>
+          <p:nvPr/>
+        </p:nvSpPr>
+        <p:spPr>
+          <a:xfrm>
+            <a:off x="271070" y="793418"/>
+            <a:ext cx="5841730" cy="523220"/>
+          </a:xfrm>
+          <a:prstGeom prst="rect">
+            <a:avLst/>
+          </a:prstGeom>
+          <a:noFill/>
+        </p:spPr>
+        <p:txBody>
+          <a:bodyPr wrap="square" rtlCol="0">
+            <a:spAutoFit/>
+          </a:bodyPr>
+          <a:lstStyle/>
+          <a:p>
+            <a:r>
+              <a:rPr lang="es-ES" dirty="0">
+                <a:latin typeface="Montserrat" panose="00000500000000000000" pitchFamily="2" charset="0"/>
+              </a:rPr>
+              <a:t> 🎯 </a:t>
+            </a:r>
+            <a:r>
+              <a:rPr lang="es-ES" b="1" dirty="0">
+                <a:latin typeface="Montserrat" panose="00000500000000000000" pitchFamily="2" charset="0"/>
+              </a:rPr>
+              <a:t>Predicción de Cancelaciones</a:t>
+            </a:r>
+            <a:r>
+              <a:rPr lang="es-ES" dirty="0">
+                <a:latin typeface="Montserrat" panose="00000500000000000000" pitchFamily="2" charset="0"/>
+              </a:rPr>
+              <a:t>: Variables y Modelos</a:t>
+            </a:r>
+          </a:p>
+          <a:p>
+            <a:endParaRPr lang="es-ES" dirty="0"/>
+          </a:p>
+        </p:txBody>
+      </p:sp>
+      <p:sp>
+        <p:nvSpPr>
+          <p:cNvPr id="26" name="CuadroTexto 25">
+            <a:extLst>
+              <a:ext uri="{FF2B5EF4-FFF2-40B4-BE49-F238E27FC236}">
+                <a16:creationId xmlns:a16="http://schemas.microsoft.com/office/drawing/2014/main" id="{6B5FB9E5-0C85-1A38-B927-A7F011DDF6F3}"/>
+              </a:ext>
+            </a:extLst>
+          </p:cNvPr>
+          <p:cNvSpPr txBox="1"/>
+          <p:nvPr/>
+        </p:nvSpPr>
+        <p:spPr>
+          <a:xfrm>
+            <a:off x="777600" y="2080800"/>
+            <a:ext cx="6684163" cy="2369880"/>
+          </a:xfrm>
+          <a:prstGeom prst="rect">
+            <a:avLst/>
+          </a:prstGeom>
+          <a:noFill/>
+        </p:spPr>
+        <p:txBody>
+          <a:bodyPr wrap="square" rtlCol="0">
+            <a:spAutoFit/>
+          </a:bodyPr>
+          <a:lstStyle/>
+          <a:p>
+            <a:r>
+              <a:rPr lang="es-ES" b="1" dirty="0"/>
+              <a:t>🧩 </a:t>
+            </a:r>
+            <a:r>
+              <a:rPr lang="es-ES" sz="1000" dirty="0">
+                <a:latin typeface="Montserrat" panose="00000500000000000000" pitchFamily="2" charset="0"/>
+              </a:rPr>
+              <a:t>Variables Predictoras Seleccionadas:</a:t>
+            </a:r>
+          </a:p>
+          <a:p>
+            <a:endParaRPr lang="es-ES" sz="1000" dirty="0">
+              <a:latin typeface="Montserrat" panose="00000500000000000000" pitchFamily="2" charset="0"/>
+            </a:endParaRPr>
+          </a:p>
+          <a:p>
+            <a:r>
+              <a:rPr lang="es-ES" sz="1000" dirty="0">
+                <a:latin typeface="Montserrat" panose="00000500000000000000" pitchFamily="2" charset="0"/>
+              </a:rPr>
+              <a:t>- Basadas en análisis exploratorio y </a:t>
+            </a:r>
+            <a:r>
+              <a:rPr lang="es-ES" sz="1000" dirty="0" err="1">
+                <a:latin typeface="Montserrat" panose="00000500000000000000" pitchFamily="2" charset="0"/>
+              </a:rPr>
+              <a:t>feature</a:t>
+            </a:r>
+            <a:r>
+              <a:rPr lang="es-ES" sz="1000" dirty="0">
+                <a:latin typeface="Montserrat" panose="00000500000000000000" pitchFamily="2" charset="0"/>
+              </a:rPr>
+              <a:t> </a:t>
+            </a:r>
+            <a:r>
+              <a:rPr lang="es-ES" sz="1000" dirty="0" err="1">
+                <a:latin typeface="Montserrat" panose="00000500000000000000" pitchFamily="2" charset="0"/>
+              </a:rPr>
+              <a:t>engineering</a:t>
+            </a:r>
+            <a:r>
+              <a:rPr lang="es-ES" sz="1000" dirty="0">
+                <a:latin typeface="Montserrat" panose="00000500000000000000" pitchFamily="2" charset="0"/>
+              </a:rPr>
+              <a:t>:</a:t>
+            </a:r>
+          </a:p>
+          <a:p>
+            <a:endParaRPr lang="es-ES" sz="1000" dirty="0">
+              <a:latin typeface="Montserrat" panose="00000500000000000000" pitchFamily="2" charset="0"/>
+            </a:endParaRPr>
+          </a:p>
+          <a:p>
+            <a:pPr marL="171450" indent="-171450">
+              <a:buFont typeface="Arial" panose="020B0604020202020204" pitchFamily="34" charset="0"/>
+              <a:buChar char="•"/>
+            </a:pPr>
+            <a:r>
+              <a:rPr lang="es-ES" sz="1000" dirty="0" err="1">
+                <a:latin typeface="Montserrat" panose="00000500000000000000" pitchFamily="2" charset="0"/>
+              </a:rPr>
+              <a:t>market_segment_type</a:t>
+            </a:r>
+            <a:r>
+              <a:rPr lang="es-ES" sz="1000" dirty="0">
+                <a:latin typeface="Montserrat" panose="00000500000000000000" pitchFamily="2" charset="0"/>
+              </a:rPr>
+              <a:t>: Canal de reserva</a:t>
+            </a:r>
+          </a:p>
+          <a:p>
+            <a:pPr marL="171450" indent="-171450">
+              <a:buFont typeface="Arial" panose="020B0604020202020204" pitchFamily="34" charset="0"/>
+              <a:buChar char="•"/>
+            </a:pPr>
+            <a:r>
+              <a:rPr lang="es-ES" sz="1000" dirty="0" err="1">
+                <a:latin typeface="Montserrat" panose="00000500000000000000" pitchFamily="2" charset="0"/>
+              </a:rPr>
+              <a:t>special_requests</a:t>
+            </a:r>
+            <a:r>
+              <a:rPr lang="es-ES" sz="1000" dirty="0">
+                <a:latin typeface="Montserrat" panose="00000500000000000000" pitchFamily="2" charset="0"/>
+              </a:rPr>
+              <a:t>: Pedidos especiales realizados</a:t>
+            </a:r>
+          </a:p>
+          <a:p>
+            <a:pPr marL="171450" indent="-171450">
+              <a:buFont typeface="Arial" panose="020B0604020202020204" pitchFamily="34" charset="0"/>
+              <a:buChar char="•"/>
+            </a:pPr>
+            <a:r>
+              <a:rPr lang="es-ES" sz="1000" dirty="0" err="1">
+                <a:latin typeface="Montserrat" panose="00000500000000000000" pitchFamily="2" charset="0"/>
+              </a:rPr>
+              <a:t>repeated</a:t>
+            </a:r>
+            <a:r>
+              <a:rPr lang="es-ES" sz="1000" dirty="0">
+                <a:latin typeface="Montserrat" panose="00000500000000000000" pitchFamily="2" charset="0"/>
+              </a:rPr>
+              <a:t>: Cliente recurrente</a:t>
+            </a:r>
+          </a:p>
+          <a:p>
+            <a:pPr marL="171450" indent="-171450">
+              <a:buFont typeface="Arial" panose="020B0604020202020204" pitchFamily="34" charset="0"/>
+              <a:buChar char="•"/>
+            </a:pPr>
+            <a:r>
+              <a:rPr lang="es-ES" sz="1000" dirty="0" err="1">
+                <a:latin typeface="Montserrat" panose="00000500000000000000" pitchFamily="2" charset="0"/>
+              </a:rPr>
+              <a:t>season</a:t>
+            </a:r>
+            <a:r>
+              <a:rPr lang="es-ES" sz="1000" dirty="0">
+                <a:latin typeface="Montserrat" panose="00000500000000000000" pitchFamily="2" charset="0"/>
+              </a:rPr>
+              <a:t>: Estación del año</a:t>
+            </a:r>
+          </a:p>
+          <a:p>
+            <a:pPr marL="171450" indent="-171450">
+              <a:buFont typeface="Arial" panose="020B0604020202020204" pitchFamily="34" charset="0"/>
+              <a:buChar char="•"/>
+            </a:pPr>
+            <a:r>
+              <a:rPr lang="es-ES" sz="1000" dirty="0" err="1">
+                <a:latin typeface="Montserrat" panose="00000500000000000000" pitchFamily="2" charset="0"/>
+              </a:rPr>
+              <a:t>lead_time_category</a:t>
+            </a:r>
+            <a:r>
+              <a:rPr lang="es-ES" sz="1000" dirty="0">
+                <a:latin typeface="Montserrat" panose="00000500000000000000" pitchFamily="2" charset="0"/>
+              </a:rPr>
+              <a:t>: Anticipación de la reserva</a:t>
+            </a:r>
+          </a:p>
+          <a:p>
+            <a:pPr marL="171450" indent="-171450">
+              <a:buFont typeface="Arial" panose="020B0604020202020204" pitchFamily="34" charset="0"/>
+              <a:buChar char="•"/>
+            </a:pPr>
+            <a:r>
+              <a:rPr lang="es-ES" sz="1000" dirty="0" err="1">
+                <a:latin typeface="Montserrat" panose="00000500000000000000" pitchFamily="2" charset="0"/>
+              </a:rPr>
+              <a:t>total_nights</a:t>
+            </a:r>
+            <a:r>
+              <a:rPr lang="es-ES" sz="1000" dirty="0">
+                <a:latin typeface="Montserrat" panose="00000500000000000000" pitchFamily="2" charset="0"/>
+              </a:rPr>
+              <a:t>: Duración total de la estadía</a:t>
+            </a:r>
+          </a:p>
+          <a:p>
+            <a:pPr marL="171450" indent="-171450">
+              <a:buFont typeface="Arial" panose="020B0604020202020204" pitchFamily="34" charset="0"/>
+              <a:buChar char="•"/>
+            </a:pPr>
+            <a:r>
+              <a:rPr lang="es-ES" sz="1000" dirty="0" err="1">
+                <a:latin typeface="Montserrat" panose="00000500000000000000" pitchFamily="2" charset="0"/>
+              </a:rPr>
+              <a:t>total_guests</a:t>
+            </a:r>
+            <a:r>
+              <a:rPr lang="es-ES" sz="1000" dirty="0">
+                <a:latin typeface="Montserrat" panose="00000500000000000000" pitchFamily="2" charset="0"/>
+              </a:rPr>
+              <a:t>: Número total de personas</a:t>
+            </a:r>
+          </a:p>
+          <a:p>
+            <a:pPr marL="171450" indent="-171450">
+              <a:buFont typeface="Arial" panose="020B0604020202020204" pitchFamily="34" charset="0"/>
+              <a:buChar char="•"/>
+            </a:pPr>
+            <a:r>
+              <a:rPr lang="es-ES" sz="1000" dirty="0" err="1">
+                <a:latin typeface="Montserrat" panose="00000500000000000000" pitchFamily="2" charset="0"/>
+              </a:rPr>
+              <a:t>room_type</a:t>
+            </a:r>
+            <a:r>
+              <a:rPr lang="es-ES" sz="1000" dirty="0">
+                <a:latin typeface="Montserrat" panose="00000500000000000000" pitchFamily="2" charset="0"/>
+              </a:rPr>
+              <a:t>: Tipo de habitación</a:t>
+            </a:r>
+          </a:p>
+          <a:p>
+            <a:pPr marL="171450" indent="-171450">
+              <a:buFont typeface="Arial" panose="020B0604020202020204" pitchFamily="34" charset="0"/>
+              <a:buChar char="•"/>
+            </a:pPr>
+            <a:r>
+              <a:rPr lang="es-ES" sz="1000" dirty="0" err="1">
+                <a:latin typeface="Montserrat" panose="00000500000000000000" pitchFamily="2" charset="0"/>
+              </a:rPr>
+              <a:t>average_price</a:t>
+            </a:r>
+            <a:r>
+              <a:rPr lang="es-ES" sz="1000" dirty="0">
+                <a:latin typeface="Montserrat" panose="00000500000000000000" pitchFamily="2" charset="0"/>
+              </a:rPr>
+              <a:t>: Precio promedio por noche</a:t>
+            </a:r>
+          </a:p>
+          <a:p>
+            <a:endParaRPr lang="es-ES" dirty="0"/>
+          </a:p>
+        </p:txBody>
+      </p:sp>
+    </p:spTree>
+    <p:extLst>
+      <p:ext uri="{BB962C8B-B14F-4D97-AF65-F5344CB8AC3E}">
+        <p14:creationId xmlns:p14="http://schemas.microsoft.com/office/powerpoint/2010/main" val="2390947847"/>
+      </p:ext>
+    </p:extLst>
+  </p:cSld>
+  <p:clrMapOvr>
+    <a:masterClrMapping/>
+  </p:clrMapOvr>
+</p:sld>
+</file>
+
+<file path=ppt/slides/slide13.xml><?xml version="1.0" encoding="utf-8"?>
+<p:sld xmlns:a="http://schemas.openxmlformats.org/drawingml/2006/main" xmlns:r="http://schemas.openxmlformats.org/officeDocument/2006/relationships" xmlns:p="http://schemas.openxmlformats.org/presentationml/2006/main">
+  <p:cSld>
+    <p:spTree>
+      <p:nvGrpSpPr>
+        <p:cNvPr id="1" name="Shape 153">
+          <a:extLst>
+            <a:ext uri="{FF2B5EF4-FFF2-40B4-BE49-F238E27FC236}">
+              <a16:creationId xmlns:a16="http://schemas.microsoft.com/office/drawing/2014/main" id="{AEAF3720-43AF-7E01-92B9-4404671FB6CC}"/>
+            </a:ext>
+          </a:extLst>
+        </p:cNvPr>
+        <p:cNvGrpSpPr/>
+        <p:nvPr/>
+      </p:nvGrpSpPr>
+      <p:grpSpPr>
+        <a:xfrm>
+          <a:off x="0" y="0"/>
+          <a:ext cx="0" cy="0"/>
+          <a:chOff x="0" y="0"/>
+          <a:chExt cx="0" cy="0"/>
+        </a:xfrm>
+      </p:grpSpPr>
+      <p:sp>
+        <p:nvSpPr>
+          <p:cNvPr id="155" name="Google Shape;155;p24">
+            <a:extLst>
+              <a:ext uri="{FF2B5EF4-FFF2-40B4-BE49-F238E27FC236}">
+                <a16:creationId xmlns:a16="http://schemas.microsoft.com/office/drawing/2014/main" id="{473FC056-DAD8-851B-EEEE-D1EAB1C0C78A}"/>
+              </a:ext>
+            </a:extLst>
+          </p:cNvPr>
+          <p:cNvSpPr txBox="1"/>
+          <p:nvPr/>
+        </p:nvSpPr>
+        <p:spPr>
+          <a:xfrm>
+            <a:off x="356011" y="62251"/>
+            <a:ext cx="7105752" cy="696535"/>
+          </a:xfrm>
+          <a:prstGeom prst="rect">
+            <a:avLst/>
+          </a:prstGeom>
+          <a:noFill/>
+          <a:ln>
+            <a:noFill/>
+          </a:ln>
+        </p:spPr>
+        <p:txBody>
+          <a:bodyPr spcFirstLastPara="1" wrap="square" lIns="91425" tIns="91425" rIns="91425" bIns="91425" anchor="t" anchorCtr="0">
+            <a:noAutofit/>
+          </a:bodyPr>
+          <a:lstStyle/>
+          <a:p>
+            <a:pPr marL="0" lvl="0" indent="0" algn="l" rtl="0">
+              <a:lnSpc>
+                <a:spcPct val="90000"/>
+              </a:lnSpc>
+              <a:spcBef>
+                <a:spcPts val="0"/>
+              </a:spcBef>
+              <a:spcAft>
+                <a:spcPts val="0"/>
+              </a:spcAft>
+              <a:buClr>
+                <a:schemeClr val="dk1"/>
+              </a:buClr>
+              <a:buSzPts val="1100"/>
+              <a:buFont typeface="Arial"/>
+              <a:buNone/>
+            </a:pPr>
+            <a:r>
+              <a:rPr lang="es-ES" sz="2600" dirty="0">
+                <a:solidFill>
+                  <a:schemeClr val="accent3"/>
+                </a:solidFill>
+              </a:rPr>
+              <a:t>ML: MODELO DE CLASIFICACIÓN</a:t>
+            </a:r>
+            <a:endParaRPr sz="2600" dirty="0">
+              <a:solidFill>
+                <a:schemeClr val="accent3"/>
+              </a:solidFill>
+            </a:endParaRPr>
+          </a:p>
+        </p:txBody>
+      </p:sp>
+      <p:pic>
+        <p:nvPicPr>
+          <p:cNvPr id="2" name="Picture 6">
+            <a:extLst>
+              <a:ext uri="{FF2B5EF4-FFF2-40B4-BE49-F238E27FC236}">
+                <a16:creationId xmlns:a16="http://schemas.microsoft.com/office/drawing/2014/main" id="{DA009502-E837-D9ED-924F-386290292879}"/>
+              </a:ext>
+            </a:extLst>
+          </p:cNvPr>
+          <p:cNvPicPr>
+            <a:picLocks noChangeAspect="1" noChangeArrowheads="1"/>
+          </p:cNvPicPr>
+          <p:nvPr/>
+        </p:nvPicPr>
+        <p:blipFill>
+          <a:blip r:embed="rId3">
+            <a:extLst>
+              <a:ext uri="{28A0092B-C50C-407E-A947-70E740481C1C}">
+                <a14:useLocalDpi xmlns:a14="http://schemas.microsoft.com/office/drawing/2010/main" val="0"/>
+              </a:ext>
+            </a:extLst>
+          </a:blip>
+          <a:srcRect/>
+          <a:stretch>
+            <a:fillRect/>
+          </a:stretch>
+        </p:blipFill>
+        <p:spPr bwMode="auto">
+          <a:xfrm>
+            <a:off x="7820094" y="134738"/>
+            <a:ext cx="1184562" cy="275781"/>
+          </a:xfrm>
+          <a:prstGeom prst="rect">
+            <a:avLst/>
+          </a:prstGeom>
+          <a:noFill/>
+          <a:extLst>
+            <a:ext uri="{909E8E84-426E-40DD-AFC4-6F175D3DCCD1}">
+              <a14:hiddenFill xmlns:a14="http://schemas.microsoft.com/office/drawing/2010/main">
+                <a:solidFill>
+                  <a:srgbClr val="FFFFFF"/>
+                </a:solidFill>
+              </a14:hiddenFill>
+            </a:ext>
+          </a:extLst>
+        </p:spPr>
+      </p:pic>
+      <p:sp>
+        <p:nvSpPr>
+          <p:cNvPr id="6" name="CuadroTexto 5">
+            <a:extLst>
+              <a:ext uri="{FF2B5EF4-FFF2-40B4-BE49-F238E27FC236}">
+                <a16:creationId xmlns:a16="http://schemas.microsoft.com/office/drawing/2014/main" id="{5997F801-08D7-C78A-984A-AE7015B70C1D}"/>
+              </a:ext>
+            </a:extLst>
+          </p:cNvPr>
+          <p:cNvSpPr txBox="1"/>
+          <p:nvPr/>
+        </p:nvSpPr>
+        <p:spPr>
+          <a:xfrm>
+            <a:off x="741845" y="1316638"/>
+            <a:ext cx="7670530" cy="1477328"/>
+          </a:xfrm>
+          <a:prstGeom prst="rect">
+            <a:avLst/>
+          </a:prstGeom>
+          <a:noFill/>
+        </p:spPr>
+        <p:txBody>
+          <a:bodyPr wrap="square" rtlCol="0">
+            <a:spAutoFit/>
+          </a:bodyPr>
+          <a:lstStyle/>
+          <a:p>
+            <a:r>
+              <a:rPr lang="es-ES" sz="1000" b="1" dirty="0">
+                <a:latin typeface="Montserrat" panose="00000500000000000000" pitchFamily="2" charset="0"/>
+              </a:rPr>
+              <a:t>Modelos Utilizados en Primera Instancia</a:t>
+            </a:r>
+          </a:p>
+          <a:p>
+            <a:r>
+              <a:rPr lang="es-ES" sz="1000" dirty="0">
+                <a:latin typeface="Montserrat" panose="00000500000000000000" pitchFamily="2" charset="0"/>
+              </a:rPr>
+              <a:t> 	- Árbol de Decisión</a:t>
+            </a:r>
+          </a:p>
+          <a:p>
+            <a:r>
+              <a:rPr lang="es-ES" sz="1000" dirty="0">
+                <a:latin typeface="Montserrat" panose="00000500000000000000" pitchFamily="2" charset="0"/>
+              </a:rPr>
+              <a:t>	- </a:t>
+            </a:r>
+            <a:r>
+              <a:rPr lang="es-ES" sz="1000" dirty="0" err="1">
+                <a:latin typeface="Montserrat" panose="00000500000000000000" pitchFamily="2" charset="0"/>
+              </a:rPr>
+              <a:t>Random</a:t>
+            </a:r>
+            <a:r>
+              <a:rPr lang="es-ES" sz="1000" dirty="0">
+                <a:latin typeface="Montserrat" panose="00000500000000000000" pitchFamily="2" charset="0"/>
+              </a:rPr>
+              <a:t> Forest</a:t>
+            </a:r>
+          </a:p>
+          <a:p>
+            <a:r>
+              <a:rPr lang="es-ES" sz="1000" dirty="0">
+                <a:latin typeface="Montserrat" panose="00000500000000000000" pitchFamily="2" charset="0"/>
+              </a:rPr>
+              <a:t>	- </a:t>
+            </a:r>
+            <a:r>
+              <a:rPr lang="es-ES" sz="1000" dirty="0" err="1">
+                <a:latin typeface="Montserrat" panose="00000500000000000000" pitchFamily="2" charset="0"/>
+              </a:rPr>
+              <a:t>XGBoost</a:t>
+            </a:r>
+            <a:endParaRPr lang="es-ES" sz="1000" dirty="0">
+              <a:latin typeface="Montserrat" panose="00000500000000000000" pitchFamily="2" charset="0"/>
+            </a:endParaRPr>
+          </a:p>
+          <a:p>
+            <a:r>
+              <a:rPr lang="es-ES" sz="1000" dirty="0">
+                <a:latin typeface="Montserrat" panose="00000500000000000000" pitchFamily="2" charset="0"/>
+              </a:rPr>
+              <a:t>	</a:t>
+            </a:r>
+          </a:p>
+          <a:p>
+            <a:endParaRPr lang="es-ES" sz="1000" dirty="0">
+              <a:latin typeface="Montserrat" panose="00000500000000000000" pitchFamily="2" charset="0"/>
+            </a:endParaRPr>
+          </a:p>
+          <a:p>
+            <a:r>
+              <a:rPr lang="es-ES" sz="1000" dirty="0">
+                <a:latin typeface="Montserrat" panose="00000500000000000000" pitchFamily="2" charset="0"/>
+              </a:rPr>
+              <a:t>📌 Criterio de Éxito:</a:t>
+            </a:r>
+            <a:br>
+              <a:rPr lang="es-ES" sz="1000" dirty="0">
+                <a:latin typeface="Montserrat" panose="00000500000000000000" pitchFamily="2" charset="0"/>
+              </a:rPr>
+            </a:br>
+            <a:r>
+              <a:rPr lang="es-ES" sz="1000" dirty="0">
+                <a:latin typeface="Montserrat" panose="00000500000000000000" pitchFamily="2" charset="0"/>
+              </a:rPr>
+              <a:t>Priorizar alto </a:t>
+            </a:r>
+            <a:r>
+              <a:rPr lang="es-ES" sz="1000" dirty="0" err="1">
+                <a:latin typeface="Montserrat" panose="00000500000000000000" pitchFamily="2" charset="0"/>
+              </a:rPr>
+              <a:t>recall</a:t>
+            </a:r>
+            <a:r>
+              <a:rPr lang="es-ES" sz="1000" dirty="0">
+                <a:latin typeface="Montserrat" panose="00000500000000000000" pitchFamily="2" charset="0"/>
+              </a:rPr>
+              <a:t> en la clase “Cancelada” para minimizar falsos negativos</a:t>
+            </a:r>
+          </a:p>
+          <a:p>
+            <a:endParaRPr lang="es-ES" sz="1000" dirty="0">
+              <a:latin typeface="Montserrat" panose="00000500000000000000" pitchFamily="2" charset="0"/>
+            </a:endParaRPr>
+          </a:p>
+        </p:txBody>
+      </p:sp>
+      <p:sp>
+        <p:nvSpPr>
+          <p:cNvPr id="25" name="CuadroTexto 24">
+            <a:extLst>
+              <a:ext uri="{FF2B5EF4-FFF2-40B4-BE49-F238E27FC236}">
+                <a16:creationId xmlns:a16="http://schemas.microsoft.com/office/drawing/2014/main" id="{DAC558E3-E08B-DCF0-AAF7-F5538BD1B390}"/>
+              </a:ext>
+            </a:extLst>
+          </p:cNvPr>
+          <p:cNvSpPr txBox="1"/>
+          <p:nvPr/>
+        </p:nvSpPr>
+        <p:spPr>
+          <a:xfrm>
+            <a:off x="271070" y="793418"/>
+            <a:ext cx="5841730" cy="523220"/>
+          </a:xfrm>
+          <a:prstGeom prst="rect">
+            <a:avLst/>
+          </a:prstGeom>
+          <a:noFill/>
+        </p:spPr>
+        <p:txBody>
+          <a:bodyPr wrap="square" rtlCol="0">
+            <a:spAutoFit/>
+          </a:bodyPr>
+          <a:lstStyle/>
+          <a:p>
+            <a:r>
+              <a:rPr lang="es-ES" dirty="0">
+                <a:latin typeface="Montserrat" panose="00000500000000000000" pitchFamily="2" charset="0"/>
+              </a:rPr>
+              <a:t> 🎯 </a:t>
+            </a:r>
+            <a:r>
+              <a:rPr lang="es-ES" b="1" dirty="0">
+                <a:latin typeface="Montserrat" panose="00000500000000000000" pitchFamily="2" charset="0"/>
+              </a:rPr>
+              <a:t>Predicción de Cancelaciones</a:t>
+            </a:r>
+            <a:r>
+              <a:rPr lang="es-ES" dirty="0">
+                <a:latin typeface="Montserrat" panose="00000500000000000000" pitchFamily="2" charset="0"/>
+              </a:rPr>
+              <a:t>: Variables y Modelos</a:t>
+            </a:r>
+          </a:p>
+          <a:p>
+            <a:endParaRPr lang="es-ES" dirty="0"/>
+          </a:p>
+        </p:txBody>
+      </p:sp>
+      <p:pic>
+        <p:nvPicPr>
+          <p:cNvPr id="7" name="Imagen 6">
+            <a:extLst>
+              <a:ext uri="{FF2B5EF4-FFF2-40B4-BE49-F238E27FC236}">
+                <a16:creationId xmlns:a16="http://schemas.microsoft.com/office/drawing/2014/main" id="{3EA4690B-6E4D-277C-230D-EAB6C1C7572B}"/>
+              </a:ext>
+            </a:extLst>
+          </p:cNvPr>
+          <p:cNvPicPr>
+            <a:picLocks noChangeAspect="1"/>
+          </p:cNvPicPr>
+          <p:nvPr/>
+        </p:nvPicPr>
+        <p:blipFill>
+          <a:blip r:embed="rId4"/>
+          <a:stretch>
+            <a:fillRect/>
+          </a:stretch>
+        </p:blipFill>
+        <p:spPr>
+          <a:xfrm>
+            <a:off x="856555" y="2799883"/>
+            <a:ext cx="7545600" cy="2053959"/>
+          </a:xfrm>
+          <a:prstGeom prst="rect">
+            <a:avLst/>
+          </a:prstGeom>
+        </p:spPr>
+      </p:pic>
+    </p:spTree>
+    <p:extLst>
+      <p:ext uri="{BB962C8B-B14F-4D97-AF65-F5344CB8AC3E}">
+        <p14:creationId xmlns:p14="http://schemas.microsoft.com/office/powerpoint/2010/main" val="462920700"/>
+      </p:ext>
+    </p:extLst>
+  </p:cSld>
+  <p:clrMapOvr>
+    <a:masterClrMapping/>
+  </p:clrMapOvr>
+</p:sld>
+</file>
+
+<file path=ppt/slides/slide14.xml><?xml version="1.0" encoding="utf-8"?>
+<p:sld xmlns:a="http://schemas.openxmlformats.org/drawingml/2006/main" xmlns:r="http://schemas.openxmlformats.org/officeDocument/2006/relationships" xmlns:p="http://schemas.openxmlformats.org/presentationml/2006/main">
+  <p:cSld>
+    <p:spTree>
+      <p:nvGrpSpPr>
+        <p:cNvPr id="1" name="Shape 153">
+          <a:extLst>
+            <a:ext uri="{FF2B5EF4-FFF2-40B4-BE49-F238E27FC236}">
+              <a16:creationId xmlns:a16="http://schemas.microsoft.com/office/drawing/2014/main" id="{E4CBF326-9861-1E6B-4369-3B30B56F8FB5}"/>
+            </a:ext>
+          </a:extLst>
+        </p:cNvPr>
+        <p:cNvGrpSpPr/>
+        <p:nvPr/>
+      </p:nvGrpSpPr>
+      <p:grpSpPr>
+        <a:xfrm>
+          <a:off x="0" y="0"/>
+          <a:ext cx="0" cy="0"/>
+          <a:chOff x="0" y="0"/>
+          <a:chExt cx="0" cy="0"/>
+        </a:xfrm>
+      </p:grpSpPr>
+      <p:sp>
+        <p:nvSpPr>
+          <p:cNvPr id="155" name="Google Shape;155;p24">
+            <a:extLst>
+              <a:ext uri="{FF2B5EF4-FFF2-40B4-BE49-F238E27FC236}">
+                <a16:creationId xmlns:a16="http://schemas.microsoft.com/office/drawing/2014/main" id="{956A4B10-B3EE-19A6-5234-6A5A251CDB57}"/>
+              </a:ext>
+            </a:extLst>
+          </p:cNvPr>
+          <p:cNvSpPr txBox="1"/>
+          <p:nvPr/>
+        </p:nvSpPr>
+        <p:spPr>
+          <a:xfrm>
+            <a:off x="356011" y="62251"/>
+            <a:ext cx="7105752" cy="696535"/>
+          </a:xfrm>
+          <a:prstGeom prst="rect">
+            <a:avLst/>
+          </a:prstGeom>
+          <a:noFill/>
+          <a:ln>
+            <a:noFill/>
+          </a:ln>
+        </p:spPr>
+        <p:txBody>
+          <a:bodyPr spcFirstLastPara="1" wrap="square" lIns="91425" tIns="91425" rIns="91425" bIns="91425" anchor="t" anchorCtr="0">
+            <a:noAutofit/>
+          </a:bodyPr>
+          <a:lstStyle/>
+          <a:p>
+            <a:pPr marL="0" lvl="0" indent="0" algn="l" rtl="0">
+              <a:lnSpc>
+                <a:spcPct val="90000"/>
+              </a:lnSpc>
+              <a:spcBef>
+                <a:spcPts val="0"/>
+              </a:spcBef>
+              <a:spcAft>
+                <a:spcPts val="0"/>
+              </a:spcAft>
+              <a:buClr>
+                <a:schemeClr val="dk1"/>
+              </a:buClr>
+              <a:buSzPts val="1100"/>
+              <a:buFont typeface="Arial"/>
+              <a:buNone/>
+            </a:pPr>
+            <a:r>
+              <a:rPr lang="es-ES" sz="2600" dirty="0">
+                <a:solidFill>
+                  <a:schemeClr val="accent3"/>
+                </a:solidFill>
+              </a:rPr>
+              <a:t>ML: MODELO DE CLASIFICACIÓN</a:t>
+            </a:r>
+            <a:endParaRPr sz="2600" dirty="0">
+              <a:solidFill>
+                <a:schemeClr val="accent3"/>
+              </a:solidFill>
+            </a:endParaRPr>
+          </a:p>
+        </p:txBody>
+      </p:sp>
+      <p:pic>
+        <p:nvPicPr>
+          <p:cNvPr id="2" name="Picture 6">
+            <a:extLst>
+              <a:ext uri="{FF2B5EF4-FFF2-40B4-BE49-F238E27FC236}">
+                <a16:creationId xmlns:a16="http://schemas.microsoft.com/office/drawing/2014/main" id="{A34F36A3-5BD1-5B8C-C4AD-CEF6010068F7}"/>
+              </a:ext>
+            </a:extLst>
+          </p:cNvPr>
+          <p:cNvPicPr>
+            <a:picLocks noChangeAspect="1" noChangeArrowheads="1"/>
+          </p:cNvPicPr>
+          <p:nvPr/>
+        </p:nvPicPr>
+        <p:blipFill>
+          <a:blip r:embed="rId3">
+            <a:extLst>
+              <a:ext uri="{28A0092B-C50C-407E-A947-70E740481C1C}">
+                <a14:useLocalDpi xmlns:a14="http://schemas.microsoft.com/office/drawing/2010/main" val="0"/>
+              </a:ext>
+            </a:extLst>
+          </a:blip>
+          <a:srcRect/>
+          <a:stretch>
+            <a:fillRect/>
+          </a:stretch>
+        </p:blipFill>
+        <p:spPr bwMode="auto">
+          <a:xfrm>
+            <a:off x="7820094" y="134738"/>
+            <a:ext cx="1184562" cy="275781"/>
+          </a:xfrm>
+          <a:prstGeom prst="rect">
+            <a:avLst/>
+          </a:prstGeom>
+          <a:noFill/>
+          <a:extLst>
+            <a:ext uri="{909E8E84-426E-40DD-AFC4-6F175D3DCCD1}">
+              <a14:hiddenFill xmlns:a14="http://schemas.microsoft.com/office/drawing/2010/main">
+                <a:solidFill>
+                  <a:srgbClr val="FFFFFF"/>
+                </a:solidFill>
+              </a14:hiddenFill>
+            </a:ext>
+          </a:extLst>
+        </p:spPr>
+      </p:pic>
+      <p:sp>
+        <p:nvSpPr>
+          <p:cNvPr id="25" name="CuadroTexto 24">
+            <a:extLst>
+              <a:ext uri="{FF2B5EF4-FFF2-40B4-BE49-F238E27FC236}">
+                <a16:creationId xmlns:a16="http://schemas.microsoft.com/office/drawing/2014/main" id="{C6C3432A-9D73-4CB9-747D-5392B294C30E}"/>
+              </a:ext>
+            </a:extLst>
+          </p:cNvPr>
+          <p:cNvSpPr txBox="1"/>
+          <p:nvPr/>
+        </p:nvSpPr>
+        <p:spPr>
+          <a:xfrm>
+            <a:off x="271070" y="793418"/>
+            <a:ext cx="5841730" cy="523220"/>
+          </a:xfrm>
+          <a:prstGeom prst="rect">
+            <a:avLst/>
+          </a:prstGeom>
+          <a:noFill/>
+        </p:spPr>
+        <p:txBody>
+          <a:bodyPr wrap="square" rtlCol="0">
+            <a:spAutoFit/>
+          </a:bodyPr>
+          <a:lstStyle/>
+          <a:p>
+            <a:r>
+              <a:rPr lang="es-ES" dirty="0">
+                <a:latin typeface="Montserrat" panose="00000500000000000000" pitchFamily="2" charset="0"/>
+              </a:rPr>
+              <a:t> 🎯 </a:t>
+            </a:r>
+            <a:r>
+              <a:rPr lang="es-ES" b="1" dirty="0">
+                <a:latin typeface="Montserrat" panose="00000500000000000000" pitchFamily="2" charset="0"/>
+              </a:rPr>
+              <a:t>Predicción de Cancelaciones</a:t>
+            </a:r>
+            <a:r>
+              <a:rPr lang="es-ES" dirty="0">
+                <a:latin typeface="Montserrat" panose="00000500000000000000" pitchFamily="2" charset="0"/>
+              </a:rPr>
+              <a:t>: Variables y Modelos</a:t>
+            </a:r>
+          </a:p>
+          <a:p>
+            <a:endParaRPr lang="es-ES" dirty="0"/>
+          </a:p>
+        </p:txBody>
+      </p:sp>
+      <p:pic>
+        <p:nvPicPr>
+          <p:cNvPr id="4" name="Imagen 3">
+            <a:extLst>
+              <a:ext uri="{FF2B5EF4-FFF2-40B4-BE49-F238E27FC236}">
+                <a16:creationId xmlns:a16="http://schemas.microsoft.com/office/drawing/2014/main" id="{EAF1DED3-32F9-EEBF-5458-8836AA194D1D}"/>
+              </a:ext>
+            </a:extLst>
+          </p:cNvPr>
+          <p:cNvPicPr>
+            <a:picLocks noChangeAspect="1"/>
+          </p:cNvPicPr>
+          <p:nvPr/>
+        </p:nvPicPr>
+        <p:blipFill>
+          <a:blip r:embed="rId4"/>
+          <a:stretch>
+            <a:fillRect/>
+          </a:stretch>
+        </p:blipFill>
+        <p:spPr>
+          <a:xfrm>
+            <a:off x="608748" y="1432746"/>
+            <a:ext cx="2379251" cy="1424583"/>
+          </a:xfrm>
+          <a:prstGeom prst="rect">
+            <a:avLst/>
+          </a:prstGeom>
+        </p:spPr>
+      </p:pic>
+      <p:pic>
+        <p:nvPicPr>
+          <p:cNvPr id="8" name="Imagen 7">
+            <a:extLst>
+              <a:ext uri="{FF2B5EF4-FFF2-40B4-BE49-F238E27FC236}">
+                <a16:creationId xmlns:a16="http://schemas.microsoft.com/office/drawing/2014/main" id="{0A5E503F-92DA-08E1-B54E-0B32F261DA19}"/>
+              </a:ext>
+            </a:extLst>
+          </p:cNvPr>
+          <p:cNvPicPr>
+            <a:picLocks noChangeAspect="1"/>
+          </p:cNvPicPr>
+          <p:nvPr/>
+        </p:nvPicPr>
+        <p:blipFill>
+          <a:blip r:embed="rId5"/>
+          <a:stretch>
+            <a:fillRect/>
+          </a:stretch>
+        </p:blipFill>
+        <p:spPr>
+          <a:xfrm>
+            <a:off x="3237166" y="1486142"/>
+            <a:ext cx="2477619" cy="1395213"/>
+          </a:xfrm>
+          <a:prstGeom prst="rect">
+            <a:avLst/>
+          </a:prstGeom>
+        </p:spPr>
+      </p:pic>
+      <p:pic>
+        <p:nvPicPr>
+          <p:cNvPr id="10" name="Imagen 9">
+            <a:extLst>
+              <a:ext uri="{FF2B5EF4-FFF2-40B4-BE49-F238E27FC236}">
+                <a16:creationId xmlns:a16="http://schemas.microsoft.com/office/drawing/2014/main" id="{9DE754A1-204F-D69A-A493-9F318B2D24DE}"/>
+              </a:ext>
+            </a:extLst>
+          </p:cNvPr>
+          <p:cNvPicPr>
+            <a:picLocks noChangeAspect="1"/>
+          </p:cNvPicPr>
+          <p:nvPr/>
+        </p:nvPicPr>
+        <p:blipFill>
+          <a:blip r:embed="rId6"/>
+          <a:stretch>
+            <a:fillRect/>
+          </a:stretch>
+        </p:blipFill>
+        <p:spPr>
+          <a:xfrm>
+            <a:off x="6100765" y="1432746"/>
+            <a:ext cx="2477619" cy="1448609"/>
+          </a:xfrm>
+          <a:prstGeom prst="rect">
+            <a:avLst/>
+          </a:prstGeom>
+        </p:spPr>
+      </p:pic>
+      <p:sp>
+        <p:nvSpPr>
+          <p:cNvPr id="11" name="CuadroTexto 10">
+            <a:extLst>
+              <a:ext uri="{FF2B5EF4-FFF2-40B4-BE49-F238E27FC236}">
+                <a16:creationId xmlns:a16="http://schemas.microsoft.com/office/drawing/2014/main" id="{3BEBD665-E74F-421F-1A3C-9C2C0BA33CE9}"/>
+              </a:ext>
+            </a:extLst>
+          </p:cNvPr>
+          <p:cNvSpPr txBox="1"/>
+          <p:nvPr/>
+        </p:nvSpPr>
+        <p:spPr>
+          <a:xfrm>
+            <a:off x="741845" y="3395750"/>
+            <a:ext cx="7670530" cy="1015663"/>
+          </a:xfrm>
+          <a:prstGeom prst="rect">
+            <a:avLst/>
+          </a:prstGeom>
+          <a:noFill/>
+        </p:spPr>
+        <p:txBody>
+          <a:bodyPr wrap="square" rtlCol="0">
+            <a:spAutoFit/>
+          </a:bodyPr>
+          <a:lstStyle/>
+          <a:p>
+            <a:r>
+              <a:rPr lang="es-ES" sz="1000" b="1" dirty="0">
+                <a:latin typeface="Montserrat" panose="00000500000000000000" pitchFamily="2" charset="0"/>
+              </a:rPr>
+              <a:t>Modelo mas eficiente: </a:t>
+            </a:r>
+          </a:p>
+          <a:p>
+            <a:endParaRPr lang="es-ES" sz="1000" b="1" dirty="0">
+              <a:latin typeface="Montserrat" panose="00000500000000000000" pitchFamily="2" charset="0"/>
+            </a:endParaRPr>
+          </a:p>
+          <a:p>
+            <a:r>
+              <a:rPr lang="es-ES" sz="1000" b="1" dirty="0">
+                <a:latin typeface="Montserrat" panose="00000500000000000000" pitchFamily="2" charset="0"/>
+              </a:rPr>
+              <a:t>	</a:t>
+            </a:r>
+            <a:r>
+              <a:rPr lang="es-ES" sz="1000" dirty="0">
+                <a:latin typeface="Montserrat" panose="00000500000000000000" pitchFamily="2" charset="0"/>
+              </a:rPr>
+              <a:t>En primera instancia, el </a:t>
+            </a:r>
+            <a:r>
+              <a:rPr lang="es-ES" sz="1000" dirty="0" err="1">
+                <a:latin typeface="Montserrat" panose="00000500000000000000" pitchFamily="2" charset="0"/>
+              </a:rPr>
+              <a:t>Random</a:t>
+            </a:r>
+            <a:r>
+              <a:rPr lang="es-ES" sz="1000" dirty="0">
+                <a:latin typeface="Montserrat" panose="00000500000000000000" pitchFamily="2" charset="0"/>
+              </a:rPr>
+              <a:t> Forest </a:t>
+            </a:r>
+            <a:r>
+              <a:rPr lang="es-ES" sz="1000" dirty="0" err="1">
+                <a:latin typeface="Montserrat" panose="00000500000000000000" pitchFamily="2" charset="0"/>
+              </a:rPr>
+              <a:t>Classifier</a:t>
+            </a:r>
+            <a:r>
+              <a:rPr lang="es-ES" sz="1000" dirty="0">
+                <a:latin typeface="Montserrat" panose="00000500000000000000" pitchFamily="2" charset="0"/>
+              </a:rPr>
+              <a:t> seria el mas eficiente para nuestro proyecto ya que es donde mejor </a:t>
+            </a:r>
+            <a:r>
+              <a:rPr lang="es-ES" sz="1000" dirty="0" err="1">
+                <a:latin typeface="Montserrat" panose="00000500000000000000" pitchFamily="2" charset="0"/>
+              </a:rPr>
+              <a:t>recall</a:t>
+            </a:r>
+            <a:r>
+              <a:rPr lang="es-ES" sz="1000" dirty="0">
+                <a:latin typeface="Montserrat" panose="00000500000000000000" pitchFamily="2" charset="0"/>
+              </a:rPr>
+              <a:t> tenemos y esto nos ayuda a identificar mejor los potenciales cancelados. </a:t>
+            </a:r>
+            <a:r>
+              <a:rPr lang="es-ES" sz="1000" dirty="0" err="1">
+                <a:latin typeface="Montserrat" panose="00000500000000000000" pitchFamily="2" charset="0"/>
+              </a:rPr>
+              <a:t>Ademas</a:t>
+            </a:r>
+            <a:r>
+              <a:rPr lang="es-ES" sz="1000" dirty="0">
+                <a:latin typeface="Montserrat" panose="00000500000000000000" pitchFamily="2" charset="0"/>
+              </a:rPr>
+              <a:t> tiene un buen balance con F1-Score y </a:t>
+            </a:r>
+            <a:r>
+              <a:rPr lang="es-ES" sz="1000" dirty="0" err="1">
+                <a:latin typeface="Montserrat" panose="00000500000000000000" pitchFamily="2" charset="0"/>
+              </a:rPr>
+              <a:t>Accuracy</a:t>
+            </a:r>
+            <a:r>
+              <a:rPr lang="es-ES" sz="1000" dirty="0">
+                <a:latin typeface="Montserrat" panose="00000500000000000000" pitchFamily="2" charset="0"/>
+              </a:rPr>
+              <a:t> aceptable.</a:t>
+            </a:r>
+          </a:p>
+          <a:p>
+            <a:endParaRPr lang="es-ES" sz="1000" dirty="0">
+              <a:latin typeface="Montserrat" panose="00000500000000000000" pitchFamily="2" charset="0"/>
+            </a:endParaRPr>
+          </a:p>
+        </p:txBody>
+      </p:sp>
+      <p:sp>
+        <p:nvSpPr>
+          <p:cNvPr id="12" name="Rectángulo 11">
+            <a:extLst>
+              <a:ext uri="{FF2B5EF4-FFF2-40B4-BE49-F238E27FC236}">
+                <a16:creationId xmlns:a16="http://schemas.microsoft.com/office/drawing/2014/main" id="{2AB10787-AD82-24DA-2DF9-9C1999A7B661}"/>
+              </a:ext>
+            </a:extLst>
+          </p:cNvPr>
+          <p:cNvSpPr/>
+          <p:nvPr/>
+        </p:nvSpPr>
+        <p:spPr>
+          <a:xfrm>
+            <a:off x="4572000" y="2343600"/>
+            <a:ext cx="288000" cy="147600"/>
+          </a:xfrm>
+          <a:prstGeom prst="rect">
+            <a:avLst/>
+          </a:prstGeom>
+          <a:noFill/>
+          <a:ln>
+            <a:solidFill>
+              <a:srgbClr val="FF0000"/>
+            </a:solidFill>
+          </a:ln>
+        </p:spPr>
+        <p:style>
+          <a:lnRef idx="2">
+            <a:schemeClr val="accent1">
+              <a:shade val="15000"/>
+            </a:schemeClr>
+          </a:lnRef>
+          <a:fillRef idx="1">
+            <a:schemeClr val="accent1"/>
+          </a:fillRef>
+          <a:effectRef idx="0">
+            <a:schemeClr val="accent1"/>
+          </a:effectRef>
+          <a:fontRef idx="minor">
+            <a:schemeClr val="lt1"/>
+          </a:fontRef>
+        </p:style>
+        <p:txBody>
+          <a:bodyPr rtlCol="0" anchor="ctr"/>
+          <a:lstStyle/>
+          <a:p>
+            <a:pPr algn="ctr"/>
+            <a:endParaRPr lang="es-ES"/>
+          </a:p>
+        </p:txBody>
+      </p:sp>
+    </p:spTree>
+    <p:extLst>
+      <p:ext uri="{BB962C8B-B14F-4D97-AF65-F5344CB8AC3E}">
+        <p14:creationId xmlns:p14="http://schemas.microsoft.com/office/powerpoint/2010/main" val="1685467900"/>
+      </p:ext>
+    </p:extLst>
+  </p:cSld>
+  <p:clrMapOvr>
+    <a:masterClrMapping/>
+  </p:clrMapOvr>
+</p:sld>
+</file>
+
+<file path=ppt/slides/slide15.xml><?xml version="1.0" encoding="utf-8"?>
+<p:sld xmlns:a="http://schemas.openxmlformats.org/drawingml/2006/main" xmlns:r="http://schemas.openxmlformats.org/officeDocument/2006/relationships" xmlns:p="http://schemas.openxmlformats.org/presentationml/2006/main">
+  <p:cSld>
+    <p:spTree>
+      <p:nvGrpSpPr>
+        <p:cNvPr id="1" name="Shape 153">
+          <a:extLst>
+            <a:ext uri="{FF2B5EF4-FFF2-40B4-BE49-F238E27FC236}">
+              <a16:creationId xmlns:a16="http://schemas.microsoft.com/office/drawing/2014/main" id="{FC1CBF1D-870F-BBF5-4E4E-8164DA35409A}"/>
+            </a:ext>
+          </a:extLst>
+        </p:cNvPr>
+        <p:cNvGrpSpPr/>
+        <p:nvPr/>
+      </p:nvGrpSpPr>
+      <p:grpSpPr>
+        <a:xfrm>
+          <a:off x="0" y="0"/>
+          <a:ext cx="0" cy="0"/>
+          <a:chOff x="0" y="0"/>
+          <a:chExt cx="0" cy="0"/>
+        </a:xfrm>
+      </p:grpSpPr>
+      <p:sp>
+        <p:nvSpPr>
+          <p:cNvPr id="155" name="Google Shape;155;p24">
+            <a:extLst>
+              <a:ext uri="{FF2B5EF4-FFF2-40B4-BE49-F238E27FC236}">
+                <a16:creationId xmlns:a16="http://schemas.microsoft.com/office/drawing/2014/main" id="{14BFB5DB-409C-1804-F803-5496CAFCD18E}"/>
+              </a:ext>
+            </a:extLst>
+          </p:cNvPr>
+          <p:cNvSpPr txBox="1"/>
+          <p:nvPr/>
+        </p:nvSpPr>
+        <p:spPr>
+          <a:xfrm>
+            <a:off x="356011" y="62251"/>
+            <a:ext cx="7105752" cy="696535"/>
+          </a:xfrm>
+          <a:prstGeom prst="rect">
+            <a:avLst/>
+          </a:prstGeom>
+          <a:noFill/>
+          <a:ln>
+            <a:noFill/>
+          </a:ln>
+        </p:spPr>
+        <p:txBody>
+          <a:bodyPr spcFirstLastPara="1" wrap="square" lIns="91425" tIns="91425" rIns="91425" bIns="91425" anchor="t" anchorCtr="0">
+            <a:noAutofit/>
+          </a:bodyPr>
+          <a:lstStyle/>
+          <a:p>
+            <a:pPr marL="0" lvl="0" indent="0" algn="l" rtl="0">
+              <a:lnSpc>
+                <a:spcPct val="90000"/>
+              </a:lnSpc>
+              <a:spcBef>
+                <a:spcPts val="0"/>
+              </a:spcBef>
+              <a:spcAft>
+                <a:spcPts val="0"/>
+              </a:spcAft>
+              <a:buClr>
+                <a:schemeClr val="dk1"/>
+              </a:buClr>
+              <a:buSzPts val="1100"/>
+              <a:buFont typeface="Arial"/>
+              <a:buNone/>
+            </a:pPr>
+            <a:r>
+              <a:rPr lang="es-ES" sz="2600" dirty="0">
+                <a:solidFill>
+                  <a:schemeClr val="accent3"/>
+                </a:solidFill>
+              </a:rPr>
+              <a:t>OPTIMIZACIONES</a:t>
+            </a:r>
+            <a:endParaRPr sz="2600" dirty="0">
+              <a:solidFill>
+                <a:schemeClr val="accent3"/>
+              </a:solidFill>
+            </a:endParaRPr>
+          </a:p>
+        </p:txBody>
+      </p:sp>
+      <p:pic>
+        <p:nvPicPr>
+          <p:cNvPr id="2" name="Picture 6">
+            <a:extLst>
+              <a:ext uri="{FF2B5EF4-FFF2-40B4-BE49-F238E27FC236}">
+                <a16:creationId xmlns:a16="http://schemas.microsoft.com/office/drawing/2014/main" id="{693CABCD-55B7-1D50-AA64-931DEA713037}"/>
+              </a:ext>
+            </a:extLst>
+          </p:cNvPr>
+          <p:cNvPicPr>
+            <a:picLocks noChangeAspect="1" noChangeArrowheads="1"/>
+          </p:cNvPicPr>
+          <p:nvPr/>
+        </p:nvPicPr>
+        <p:blipFill>
+          <a:blip r:embed="rId3">
+            <a:extLst>
+              <a:ext uri="{28A0092B-C50C-407E-A947-70E740481C1C}">
+                <a14:useLocalDpi xmlns:a14="http://schemas.microsoft.com/office/drawing/2010/main" val="0"/>
+              </a:ext>
+            </a:extLst>
+          </a:blip>
+          <a:srcRect/>
+          <a:stretch>
+            <a:fillRect/>
+          </a:stretch>
+        </p:blipFill>
+        <p:spPr bwMode="auto">
+          <a:xfrm>
+            <a:off x="7820094" y="134738"/>
+            <a:ext cx="1184562" cy="275781"/>
+          </a:xfrm>
+          <a:prstGeom prst="rect">
+            <a:avLst/>
+          </a:prstGeom>
+          <a:noFill/>
+          <a:extLst>
+            <a:ext uri="{909E8E84-426E-40DD-AFC4-6F175D3DCCD1}">
+              <a14:hiddenFill xmlns:a14="http://schemas.microsoft.com/office/drawing/2010/main">
+                <a:solidFill>
+                  <a:srgbClr val="FFFFFF"/>
+                </a:solidFill>
+              </a14:hiddenFill>
+            </a:ext>
+          </a:extLst>
+        </p:spPr>
+      </p:pic>
+      <p:sp>
+        <p:nvSpPr>
+          <p:cNvPr id="25" name="CuadroTexto 24">
+            <a:extLst>
+              <a:ext uri="{FF2B5EF4-FFF2-40B4-BE49-F238E27FC236}">
+                <a16:creationId xmlns:a16="http://schemas.microsoft.com/office/drawing/2014/main" id="{11C01839-CFBF-A34B-CBC1-BF262BA00344}"/>
+              </a:ext>
+            </a:extLst>
+          </p:cNvPr>
+          <p:cNvSpPr txBox="1"/>
+          <p:nvPr/>
+        </p:nvSpPr>
+        <p:spPr>
+          <a:xfrm>
+            <a:off x="356011" y="818423"/>
+            <a:ext cx="5841730" cy="523220"/>
+          </a:xfrm>
+          <a:prstGeom prst="rect">
+            <a:avLst/>
+          </a:prstGeom>
+          <a:noFill/>
+        </p:spPr>
+        <p:txBody>
+          <a:bodyPr wrap="square" rtlCol="0">
+            <a:spAutoFit/>
+          </a:bodyPr>
+          <a:lstStyle/>
+          <a:p>
+            <a:r>
+              <a:rPr lang="es-ES" b="1" dirty="0">
+                <a:latin typeface="Montserrat" panose="00000500000000000000" pitchFamily="2" charset="0"/>
+              </a:rPr>
+              <a:t>Modelos Optimizados</a:t>
+            </a:r>
+          </a:p>
+          <a:p>
+            <a:endParaRPr lang="es-ES" dirty="0"/>
+          </a:p>
+        </p:txBody>
+      </p:sp>
+      <p:sp>
+        <p:nvSpPr>
+          <p:cNvPr id="3" name="CuadroTexto 2">
+            <a:extLst>
+              <a:ext uri="{FF2B5EF4-FFF2-40B4-BE49-F238E27FC236}">
+                <a16:creationId xmlns:a16="http://schemas.microsoft.com/office/drawing/2014/main" id="{B3DB3289-F264-B136-EE56-F81E2CF65885}"/>
+              </a:ext>
+            </a:extLst>
+          </p:cNvPr>
+          <p:cNvSpPr txBox="1"/>
+          <p:nvPr/>
+        </p:nvSpPr>
+        <p:spPr>
+          <a:xfrm>
+            <a:off x="356011" y="1341643"/>
+            <a:ext cx="5841730" cy="261610"/>
+          </a:xfrm>
+          <a:prstGeom prst="rect">
+            <a:avLst/>
+          </a:prstGeom>
+          <a:noFill/>
+        </p:spPr>
+        <p:txBody>
+          <a:bodyPr wrap="square" rtlCol="0">
+            <a:spAutoFit/>
+          </a:bodyPr>
+          <a:lstStyle/>
+          <a:p>
+            <a:r>
+              <a:rPr lang="es-ES" sz="1100" dirty="0">
+                <a:latin typeface="Montserrat" panose="00000500000000000000" pitchFamily="2" charset="0"/>
+              </a:rPr>
+              <a:t> 🎯SMOTE para </a:t>
+            </a:r>
+            <a:r>
+              <a:rPr lang="es-ES" sz="1100" dirty="0" err="1">
+                <a:latin typeface="Montserrat" panose="00000500000000000000" pitchFamily="2" charset="0"/>
+              </a:rPr>
+              <a:t>Random</a:t>
+            </a:r>
+            <a:r>
+              <a:rPr lang="es-ES" sz="1100" dirty="0">
+                <a:latin typeface="Montserrat" panose="00000500000000000000" pitchFamily="2" charset="0"/>
+              </a:rPr>
+              <a:t> Forest y </a:t>
+            </a:r>
+            <a:r>
+              <a:rPr lang="es-ES" sz="1100" dirty="0" err="1">
+                <a:latin typeface="Montserrat" panose="00000500000000000000" pitchFamily="2" charset="0"/>
+              </a:rPr>
+              <a:t>XGBoost</a:t>
+            </a:r>
+            <a:r>
+              <a:rPr lang="es-ES" sz="1100" dirty="0">
+                <a:latin typeface="Montserrat" panose="00000500000000000000" pitchFamily="2" charset="0"/>
+              </a:rPr>
+              <a:t>: </a:t>
+            </a:r>
+            <a:endParaRPr lang="es-ES" dirty="0"/>
+          </a:p>
+        </p:txBody>
+      </p:sp>
+      <p:pic>
+        <p:nvPicPr>
+          <p:cNvPr id="6" name="Imagen 5">
+            <a:extLst>
+              <a:ext uri="{FF2B5EF4-FFF2-40B4-BE49-F238E27FC236}">
+                <a16:creationId xmlns:a16="http://schemas.microsoft.com/office/drawing/2014/main" id="{42844E0E-1389-0AC2-E6CE-40FC977241B2}"/>
+              </a:ext>
+            </a:extLst>
+          </p:cNvPr>
+          <p:cNvPicPr>
+            <a:picLocks noChangeAspect="1"/>
+          </p:cNvPicPr>
+          <p:nvPr/>
+        </p:nvPicPr>
+        <p:blipFill>
+          <a:blip r:embed="rId4"/>
+          <a:stretch>
+            <a:fillRect/>
+          </a:stretch>
+        </p:blipFill>
+        <p:spPr>
+          <a:xfrm>
+            <a:off x="702314" y="1979995"/>
+            <a:ext cx="3421647" cy="1963127"/>
+          </a:xfrm>
+          <a:prstGeom prst="rect">
+            <a:avLst/>
+          </a:prstGeom>
+        </p:spPr>
+      </p:pic>
+      <p:pic>
+        <p:nvPicPr>
+          <p:cNvPr id="9" name="Imagen 8">
+            <a:extLst>
+              <a:ext uri="{FF2B5EF4-FFF2-40B4-BE49-F238E27FC236}">
+                <a16:creationId xmlns:a16="http://schemas.microsoft.com/office/drawing/2014/main" id="{2B6C8D6A-F04A-E405-5907-D53C4E06ED3F}"/>
+              </a:ext>
+            </a:extLst>
+          </p:cNvPr>
+          <p:cNvPicPr>
+            <a:picLocks noChangeAspect="1"/>
+          </p:cNvPicPr>
+          <p:nvPr/>
+        </p:nvPicPr>
+        <p:blipFill>
+          <a:blip r:embed="rId5"/>
+          <a:stretch>
+            <a:fillRect/>
+          </a:stretch>
+        </p:blipFill>
+        <p:spPr>
+          <a:xfrm>
+            <a:off x="4495068" y="1975272"/>
+            <a:ext cx="3525732" cy="1967850"/>
+          </a:xfrm>
+          <a:prstGeom prst="rect">
+            <a:avLst/>
+          </a:prstGeom>
+        </p:spPr>
+      </p:pic>
+      <p:sp>
+        <p:nvSpPr>
+          <p:cNvPr id="12" name="Rectángulo 11">
+            <a:extLst>
+              <a:ext uri="{FF2B5EF4-FFF2-40B4-BE49-F238E27FC236}">
+                <a16:creationId xmlns:a16="http://schemas.microsoft.com/office/drawing/2014/main" id="{8C7E56B2-41CC-8C75-24A6-AC5E0E795910}"/>
+              </a:ext>
+            </a:extLst>
+          </p:cNvPr>
+          <p:cNvSpPr/>
+          <p:nvPr/>
+        </p:nvSpPr>
+        <p:spPr>
+          <a:xfrm>
+            <a:off x="6296618" y="3190691"/>
+            <a:ext cx="318927" cy="169036"/>
+          </a:xfrm>
+          <a:prstGeom prst="rect">
+            <a:avLst/>
+          </a:prstGeom>
+          <a:noFill/>
+          <a:ln>
+            <a:solidFill>
+              <a:srgbClr val="FF0000"/>
+            </a:solidFill>
+          </a:ln>
+        </p:spPr>
+        <p:style>
+          <a:lnRef idx="2">
+            <a:schemeClr val="accent1">
+              <a:shade val="15000"/>
+            </a:schemeClr>
+          </a:lnRef>
+          <a:fillRef idx="1">
+            <a:schemeClr val="accent1"/>
+          </a:fillRef>
+          <a:effectRef idx="0">
+            <a:schemeClr val="accent1"/>
+          </a:effectRef>
+          <a:fontRef idx="minor">
+            <a:schemeClr val="lt1"/>
+          </a:fontRef>
+        </p:style>
+        <p:txBody>
+          <a:bodyPr rtlCol="0" anchor="ctr"/>
+          <a:lstStyle/>
+          <a:p>
+            <a:pPr algn="ctr"/>
+            <a:endParaRPr lang="es-ES"/>
+          </a:p>
+        </p:txBody>
+      </p:sp>
+      <p:sp>
+        <p:nvSpPr>
+          <p:cNvPr id="13" name="CuadroTexto 12">
+            <a:extLst>
+              <a:ext uri="{FF2B5EF4-FFF2-40B4-BE49-F238E27FC236}">
+                <a16:creationId xmlns:a16="http://schemas.microsoft.com/office/drawing/2014/main" id="{6664AE3F-CCA8-CA33-F2DE-F5D066B8C5F5}"/>
+              </a:ext>
+            </a:extLst>
+          </p:cNvPr>
+          <p:cNvSpPr txBox="1"/>
+          <p:nvPr/>
+        </p:nvSpPr>
+        <p:spPr>
+          <a:xfrm>
+            <a:off x="554809" y="4221203"/>
+            <a:ext cx="7670530" cy="707886"/>
+          </a:xfrm>
+          <a:prstGeom prst="rect">
+            <a:avLst/>
+          </a:prstGeom>
+          <a:noFill/>
+        </p:spPr>
+        <p:txBody>
+          <a:bodyPr wrap="square" rtlCol="0">
+            <a:spAutoFit/>
+          </a:bodyPr>
+          <a:lstStyle/>
+          <a:p>
+            <a:r>
+              <a:rPr lang="es-ES" sz="1000" b="1" dirty="0">
+                <a:latin typeface="Montserrat" panose="00000500000000000000" pitchFamily="2" charset="0"/>
+              </a:rPr>
+              <a:t>	</a:t>
+            </a:r>
+            <a:r>
+              <a:rPr lang="es-ES" sz="1000" dirty="0">
+                <a:latin typeface="Montserrat" panose="00000500000000000000" pitchFamily="2" charset="0"/>
+              </a:rPr>
+              <a:t>Con técnica SMOTE (balancear data set) logramos mejorar el RECALL que era nuestro objetivo. A pesar de perder un poco de Precisión para los No cancelados, logramos mejorar en los Cancelados y el balance es mas positivo. En este caso avanzaríamos con XGBOOST (SMOTE)</a:t>
+            </a:r>
+          </a:p>
+          <a:p>
+            <a:endParaRPr lang="es-ES" sz="1000" dirty="0">
+              <a:latin typeface="Montserrat" panose="00000500000000000000" pitchFamily="2" charset="0"/>
+            </a:endParaRPr>
+          </a:p>
+        </p:txBody>
+      </p:sp>
+    </p:spTree>
+    <p:extLst>
+      <p:ext uri="{BB962C8B-B14F-4D97-AF65-F5344CB8AC3E}">
+        <p14:creationId xmlns:p14="http://schemas.microsoft.com/office/powerpoint/2010/main" val="1263034178"/>
+      </p:ext>
+    </p:extLst>
+  </p:cSld>
+  <p:clrMapOvr>
+    <a:masterClrMapping/>
+  </p:clrMapOvr>
+</p:sld>
+</file>
+
+<file path=ppt/slides/slide16.xml><?xml version="1.0" encoding="utf-8"?>
+<p:sld xmlns:a="http://schemas.openxmlformats.org/drawingml/2006/main" xmlns:r="http://schemas.openxmlformats.org/officeDocument/2006/relationships" xmlns:p="http://schemas.openxmlformats.org/presentationml/2006/main">
+  <p:cSld>
+    <p:spTree>
+      <p:nvGrpSpPr>
+        <p:cNvPr id="1" name="Shape 153">
+          <a:extLst>
+            <a:ext uri="{FF2B5EF4-FFF2-40B4-BE49-F238E27FC236}">
+              <a16:creationId xmlns:a16="http://schemas.microsoft.com/office/drawing/2014/main" id="{1064AB0A-41B8-CC04-5C89-86FDF26CB6E0}"/>
+            </a:ext>
+          </a:extLst>
+        </p:cNvPr>
+        <p:cNvGrpSpPr/>
+        <p:nvPr/>
+      </p:nvGrpSpPr>
+      <p:grpSpPr>
+        <a:xfrm>
+          <a:off x="0" y="0"/>
+          <a:ext cx="0" cy="0"/>
+          <a:chOff x="0" y="0"/>
+          <a:chExt cx="0" cy="0"/>
+        </a:xfrm>
+      </p:grpSpPr>
+      <p:sp>
+        <p:nvSpPr>
+          <p:cNvPr id="155" name="Google Shape;155;p24">
+            <a:extLst>
+              <a:ext uri="{FF2B5EF4-FFF2-40B4-BE49-F238E27FC236}">
+                <a16:creationId xmlns:a16="http://schemas.microsoft.com/office/drawing/2014/main" id="{4329C896-A8B7-BCF6-7F55-FB70D68DBE02}"/>
+              </a:ext>
+            </a:extLst>
+          </p:cNvPr>
+          <p:cNvSpPr txBox="1"/>
+          <p:nvPr/>
+        </p:nvSpPr>
+        <p:spPr>
+          <a:xfrm>
+            <a:off x="356011" y="62251"/>
+            <a:ext cx="7105752" cy="696535"/>
+          </a:xfrm>
+          <a:prstGeom prst="rect">
+            <a:avLst/>
+          </a:prstGeom>
+          <a:noFill/>
+          <a:ln>
+            <a:noFill/>
+          </a:ln>
+        </p:spPr>
+        <p:txBody>
+          <a:bodyPr spcFirstLastPara="1" wrap="square" lIns="91425" tIns="91425" rIns="91425" bIns="91425" anchor="t" anchorCtr="0">
+            <a:noAutofit/>
+          </a:bodyPr>
+          <a:lstStyle/>
+          <a:p>
+            <a:pPr marL="0" lvl="0" indent="0" algn="l" rtl="0">
+              <a:lnSpc>
+                <a:spcPct val="90000"/>
+              </a:lnSpc>
+              <a:spcBef>
+                <a:spcPts val="0"/>
+              </a:spcBef>
+              <a:spcAft>
+                <a:spcPts val="0"/>
+              </a:spcAft>
+              <a:buClr>
+                <a:schemeClr val="dk1"/>
+              </a:buClr>
+              <a:buSzPts val="1100"/>
+              <a:buFont typeface="Arial"/>
+              <a:buNone/>
+            </a:pPr>
+            <a:r>
+              <a:rPr lang="es-ES" sz="2600" dirty="0">
+                <a:solidFill>
+                  <a:schemeClr val="accent3"/>
+                </a:solidFill>
+              </a:rPr>
+              <a:t>OPTIMIZACIONES</a:t>
+            </a:r>
+            <a:endParaRPr sz="2600" dirty="0">
+              <a:solidFill>
+                <a:schemeClr val="accent3"/>
+              </a:solidFill>
+            </a:endParaRPr>
+          </a:p>
+        </p:txBody>
+      </p:sp>
+      <p:pic>
+        <p:nvPicPr>
+          <p:cNvPr id="2" name="Picture 6">
+            <a:extLst>
+              <a:ext uri="{FF2B5EF4-FFF2-40B4-BE49-F238E27FC236}">
+                <a16:creationId xmlns:a16="http://schemas.microsoft.com/office/drawing/2014/main" id="{E732CDBF-F83F-3F53-4D7B-C8DFC0BEA283}"/>
+              </a:ext>
+            </a:extLst>
+          </p:cNvPr>
+          <p:cNvPicPr>
+            <a:picLocks noChangeAspect="1" noChangeArrowheads="1"/>
+          </p:cNvPicPr>
+          <p:nvPr/>
+        </p:nvPicPr>
+        <p:blipFill>
+          <a:blip r:embed="rId3">
+            <a:extLst>
+              <a:ext uri="{28A0092B-C50C-407E-A947-70E740481C1C}">
+                <a14:useLocalDpi xmlns:a14="http://schemas.microsoft.com/office/drawing/2010/main" val="0"/>
+              </a:ext>
+            </a:extLst>
+          </a:blip>
+          <a:srcRect/>
+          <a:stretch>
+            <a:fillRect/>
+          </a:stretch>
+        </p:blipFill>
+        <p:spPr bwMode="auto">
+          <a:xfrm>
+            <a:off x="7820094" y="134738"/>
+            <a:ext cx="1184562" cy="275781"/>
+          </a:xfrm>
+          <a:prstGeom prst="rect">
+            <a:avLst/>
+          </a:prstGeom>
+          <a:noFill/>
+          <a:extLst>
+            <a:ext uri="{909E8E84-426E-40DD-AFC4-6F175D3DCCD1}">
+              <a14:hiddenFill xmlns:a14="http://schemas.microsoft.com/office/drawing/2010/main">
+                <a:solidFill>
+                  <a:srgbClr val="FFFFFF"/>
+                </a:solidFill>
+              </a14:hiddenFill>
+            </a:ext>
+          </a:extLst>
+        </p:spPr>
+      </p:pic>
+      <p:sp>
+        <p:nvSpPr>
+          <p:cNvPr id="25" name="CuadroTexto 24">
+            <a:extLst>
+              <a:ext uri="{FF2B5EF4-FFF2-40B4-BE49-F238E27FC236}">
+                <a16:creationId xmlns:a16="http://schemas.microsoft.com/office/drawing/2014/main" id="{10CB88DF-DE79-B745-DDCB-F09B724E4EE5}"/>
+              </a:ext>
+            </a:extLst>
+          </p:cNvPr>
+          <p:cNvSpPr txBox="1"/>
+          <p:nvPr/>
+        </p:nvSpPr>
+        <p:spPr>
+          <a:xfrm>
+            <a:off x="356011" y="818423"/>
+            <a:ext cx="5841730" cy="523220"/>
+          </a:xfrm>
+          <a:prstGeom prst="rect">
+            <a:avLst/>
+          </a:prstGeom>
+          <a:noFill/>
+        </p:spPr>
+        <p:txBody>
+          <a:bodyPr wrap="square" rtlCol="0">
+            <a:spAutoFit/>
+          </a:bodyPr>
+          <a:lstStyle/>
+          <a:p>
+            <a:r>
+              <a:rPr lang="es-ES" b="1" dirty="0">
+                <a:latin typeface="Montserrat" panose="00000500000000000000" pitchFamily="2" charset="0"/>
+              </a:rPr>
+              <a:t>Modelos Optimizados</a:t>
+            </a:r>
+          </a:p>
+          <a:p>
+            <a:endParaRPr lang="es-ES" dirty="0"/>
+          </a:p>
+        </p:txBody>
+      </p:sp>
+      <p:sp>
+        <p:nvSpPr>
+          <p:cNvPr id="3" name="CuadroTexto 2">
+            <a:extLst>
+              <a:ext uri="{FF2B5EF4-FFF2-40B4-BE49-F238E27FC236}">
+                <a16:creationId xmlns:a16="http://schemas.microsoft.com/office/drawing/2014/main" id="{55719086-712D-88FF-3847-3D060A4E9D11}"/>
+              </a:ext>
+            </a:extLst>
+          </p:cNvPr>
+          <p:cNvSpPr txBox="1"/>
+          <p:nvPr/>
+        </p:nvSpPr>
+        <p:spPr>
+          <a:xfrm>
+            <a:off x="356011" y="1341643"/>
+            <a:ext cx="5841730" cy="477054"/>
+          </a:xfrm>
+          <a:prstGeom prst="rect">
+            <a:avLst/>
+          </a:prstGeom>
+          <a:noFill/>
+        </p:spPr>
+        <p:txBody>
+          <a:bodyPr wrap="square" rtlCol="0">
+            <a:spAutoFit/>
+          </a:bodyPr>
+          <a:lstStyle/>
+          <a:p>
+            <a:r>
+              <a:rPr lang="es-ES" sz="1100" dirty="0">
+                <a:latin typeface="Montserrat" panose="00000500000000000000" pitchFamily="2" charset="0"/>
+              </a:rPr>
+              <a:t> 🎯HIPERPARAMETROS + </a:t>
+            </a:r>
+            <a:r>
+              <a:rPr lang="es-ES" sz="1100" dirty="0" err="1">
+                <a:latin typeface="Montserrat" panose="00000500000000000000" pitchFamily="2" charset="0"/>
+              </a:rPr>
+              <a:t>HistGradientBoostingClassifier</a:t>
+            </a:r>
+            <a:endParaRPr lang="es-ES" sz="1100" dirty="0">
+              <a:latin typeface="Montserrat" panose="00000500000000000000" pitchFamily="2" charset="0"/>
+            </a:endParaRPr>
+          </a:p>
+          <a:p>
+            <a:endParaRPr lang="es-ES" dirty="0"/>
+          </a:p>
+        </p:txBody>
+      </p:sp>
+      <p:sp>
+        <p:nvSpPr>
+          <p:cNvPr id="13" name="CuadroTexto 12">
+            <a:extLst>
+              <a:ext uri="{FF2B5EF4-FFF2-40B4-BE49-F238E27FC236}">
+                <a16:creationId xmlns:a16="http://schemas.microsoft.com/office/drawing/2014/main" id="{F7B2C11F-C719-898B-059F-F19329EE06D6}"/>
+              </a:ext>
+            </a:extLst>
+          </p:cNvPr>
+          <p:cNvSpPr txBox="1"/>
+          <p:nvPr/>
+        </p:nvSpPr>
+        <p:spPr>
+          <a:xfrm>
+            <a:off x="4046034" y="3641713"/>
+            <a:ext cx="4303413" cy="707886"/>
+          </a:xfrm>
+          <a:prstGeom prst="rect">
+            <a:avLst/>
+          </a:prstGeom>
+          <a:noFill/>
+        </p:spPr>
+        <p:txBody>
+          <a:bodyPr wrap="square" rtlCol="0">
+            <a:spAutoFit/>
+          </a:bodyPr>
+          <a:lstStyle/>
+          <a:p>
+            <a:r>
+              <a:rPr lang="es-ES" sz="1000" dirty="0">
+                <a:latin typeface="Montserrat" panose="00000500000000000000" pitchFamily="2" charset="0"/>
+              </a:rPr>
+              <a:t>Aplicando tanto optimización de </a:t>
+            </a:r>
+            <a:r>
+              <a:rPr lang="es-ES" sz="1000" dirty="0" err="1">
+                <a:latin typeface="Montserrat" panose="00000500000000000000" pitchFamily="2" charset="0"/>
+              </a:rPr>
+              <a:t>Hiperparametros</a:t>
+            </a:r>
+            <a:r>
+              <a:rPr lang="es-ES" sz="1000" dirty="0">
+                <a:latin typeface="Montserrat" panose="00000500000000000000" pitchFamily="2" charset="0"/>
+              </a:rPr>
+              <a:t> como otro método “</a:t>
+            </a:r>
+            <a:r>
+              <a:rPr lang="es-ES" sz="1000" dirty="0" err="1">
+                <a:latin typeface="Montserrat" panose="00000500000000000000" pitchFamily="2" charset="0"/>
+              </a:rPr>
+              <a:t>HistGradientBoost</a:t>
+            </a:r>
+            <a:r>
+              <a:rPr lang="es-ES" sz="1000" dirty="0">
+                <a:latin typeface="Montserrat" panose="00000500000000000000" pitchFamily="2" charset="0"/>
+              </a:rPr>
+              <a:t>”, no logramos mejorar </a:t>
+            </a:r>
+            <a:r>
+              <a:rPr lang="es-ES" sz="1000" dirty="0" err="1">
+                <a:latin typeface="Montserrat" panose="00000500000000000000" pitchFamily="2" charset="0"/>
+              </a:rPr>
+              <a:t>recall</a:t>
+            </a:r>
+            <a:r>
+              <a:rPr lang="es-ES" sz="1000" dirty="0">
+                <a:latin typeface="Montserrat" panose="00000500000000000000" pitchFamily="2" charset="0"/>
+              </a:rPr>
+              <a:t> que es nuestro primer objetivo. </a:t>
+            </a:r>
+          </a:p>
+          <a:p>
+            <a:endParaRPr lang="es-ES" sz="1000" dirty="0">
+              <a:latin typeface="Montserrat" panose="00000500000000000000" pitchFamily="2" charset="0"/>
+            </a:endParaRPr>
+          </a:p>
+        </p:txBody>
+      </p:sp>
+      <p:pic>
+        <p:nvPicPr>
+          <p:cNvPr id="5" name="Imagen 4">
+            <a:extLst>
+              <a:ext uri="{FF2B5EF4-FFF2-40B4-BE49-F238E27FC236}">
+                <a16:creationId xmlns:a16="http://schemas.microsoft.com/office/drawing/2014/main" id="{21ED8CC8-7BB1-5141-064D-2991C6BCACED}"/>
+              </a:ext>
+            </a:extLst>
+          </p:cNvPr>
+          <p:cNvPicPr>
+            <a:picLocks noChangeAspect="1"/>
+          </p:cNvPicPr>
+          <p:nvPr/>
+        </p:nvPicPr>
+        <p:blipFill>
+          <a:blip r:embed="rId4"/>
+          <a:stretch>
+            <a:fillRect/>
+          </a:stretch>
+        </p:blipFill>
+        <p:spPr>
+          <a:xfrm>
+            <a:off x="844330" y="1655642"/>
+            <a:ext cx="6975764" cy="1364308"/>
+          </a:xfrm>
+          <a:prstGeom prst="rect">
+            <a:avLst/>
+          </a:prstGeom>
+        </p:spPr>
+      </p:pic>
+      <p:pic>
+        <p:nvPicPr>
+          <p:cNvPr id="8" name="Imagen 7">
+            <a:extLst>
+              <a:ext uri="{FF2B5EF4-FFF2-40B4-BE49-F238E27FC236}">
+                <a16:creationId xmlns:a16="http://schemas.microsoft.com/office/drawing/2014/main" id="{DF283719-E106-41D6-14A4-1CFCF9BA350C}"/>
+              </a:ext>
+            </a:extLst>
+          </p:cNvPr>
+          <p:cNvPicPr>
+            <a:picLocks noChangeAspect="1"/>
+          </p:cNvPicPr>
+          <p:nvPr/>
+        </p:nvPicPr>
+        <p:blipFill>
+          <a:blip r:embed="rId5"/>
+          <a:stretch>
+            <a:fillRect/>
+          </a:stretch>
+        </p:blipFill>
+        <p:spPr>
+          <a:xfrm>
+            <a:off x="844330" y="3190691"/>
+            <a:ext cx="2825505" cy="1627312"/>
+          </a:xfrm>
+          <a:prstGeom prst="rect">
+            <a:avLst/>
+          </a:prstGeom>
+        </p:spPr>
+      </p:pic>
+    </p:spTree>
+    <p:extLst>
+      <p:ext uri="{BB962C8B-B14F-4D97-AF65-F5344CB8AC3E}">
+        <p14:creationId xmlns:p14="http://schemas.microsoft.com/office/powerpoint/2010/main" val="65684731"/>
+      </p:ext>
+    </p:extLst>
+  </p:cSld>
+  <p:clrMapOvr>
+    <a:masterClrMapping/>
+  </p:clrMapOvr>
+</p:sld>
+</file>
+
+<file path=ppt/slides/slide17.xml><?xml version="1.0" encoding="utf-8"?>
+<p:sld xmlns:a="http://schemas.openxmlformats.org/drawingml/2006/main" xmlns:r="http://schemas.openxmlformats.org/officeDocument/2006/relationships" xmlns:p="http://schemas.openxmlformats.org/presentationml/2006/main">
+  <p:cSld>
+    <p:spTree>
+      <p:nvGrpSpPr>
+        <p:cNvPr id="1" name="Shape 153">
+          <a:extLst>
+            <a:ext uri="{FF2B5EF4-FFF2-40B4-BE49-F238E27FC236}">
+              <a16:creationId xmlns:a16="http://schemas.microsoft.com/office/drawing/2014/main" id="{E4D5B66A-CF60-4427-7710-077B4462088A}"/>
+            </a:ext>
+          </a:extLst>
+        </p:cNvPr>
+        <p:cNvGrpSpPr/>
+        <p:nvPr/>
+      </p:nvGrpSpPr>
+      <p:grpSpPr>
+        <a:xfrm>
+          <a:off x="0" y="0"/>
+          <a:ext cx="0" cy="0"/>
+          <a:chOff x="0" y="0"/>
+          <a:chExt cx="0" cy="0"/>
+        </a:xfrm>
+      </p:grpSpPr>
+      <p:sp>
+        <p:nvSpPr>
+          <p:cNvPr id="155" name="Google Shape;155;p24">
+            <a:extLst>
+              <a:ext uri="{FF2B5EF4-FFF2-40B4-BE49-F238E27FC236}">
+                <a16:creationId xmlns:a16="http://schemas.microsoft.com/office/drawing/2014/main" id="{06703FD7-00F7-39E9-3B31-1B03785E4B7F}"/>
+              </a:ext>
+            </a:extLst>
+          </p:cNvPr>
+          <p:cNvSpPr txBox="1"/>
+          <p:nvPr/>
+        </p:nvSpPr>
+        <p:spPr>
+          <a:xfrm>
+            <a:off x="356011" y="62251"/>
+            <a:ext cx="7105752" cy="696535"/>
+          </a:xfrm>
+          <a:prstGeom prst="rect">
+            <a:avLst/>
+          </a:prstGeom>
+          <a:noFill/>
+          <a:ln>
+            <a:noFill/>
+          </a:ln>
+        </p:spPr>
+        <p:txBody>
+          <a:bodyPr spcFirstLastPara="1" wrap="square" lIns="91425" tIns="91425" rIns="91425" bIns="91425" anchor="t" anchorCtr="0">
+            <a:noAutofit/>
+          </a:bodyPr>
+          <a:lstStyle/>
+          <a:p>
+            <a:pPr marL="0" lvl="0" indent="0" algn="l" rtl="0">
+              <a:lnSpc>
+                <a:spcPct val="90000"/>
+              </a:lnSpc>
+              <a:spcBef>
+                <a:spcPts val="0"/>
+              </a:spcBef>
+              <a:spcAft>
+                <a:spcPts val="0"/>
+              </a:spcAft>
+              <a:buClr>
+                <a:schemeClr val="dk1"/>
+              </a:buClr>
+              <a:buSzPts val="1100"/>
+              <a:buFont typeface="Arial"/>
+              <a:buNone/>
+            </a:pPr>
+            <a:r>
+              <a:rPr lang="es-ES" sz="2600" dirty="0">
+                <a:solidFill>
+                  <a:schemeClr val="accent3"/>
+                </a:solidFill>
+              </a:rPr>
+              <a:t>CONCLUSION</a:t>
+            </a:r>
+            <a:endParaRPr sz="2600" dirty="0">
+              <a:solidFill>
+                <a:schemeClr val="accent3"/>
+              </a:solidFill>
+            </a:endParaRPr>
+          </a:p>
+        </p:txBody>
+      </p:sp>
+      <p:pic>
+        <p:nvPicPr>
+          <p:cNvPr id="2" name="Picture 6">
+            <a:extLst>
+              <a:ext uri="{FF2B5EF4-FFF2-40B4-BE49-F238E27FC236}">
+                <a16:creationId xmlns:a16="http://schemas.microsoft.com/office/drawing/2014/main" id="{BB9B8409-23C1-A61F-814C-078A5580AD2B}"/>
+              </a:ext>
+            </a:extLst>
+          </p:cNvPr>
+          <p:cNvPicPr>
+            <a:picLocks noChangeAspect="1" noChangeArrowheads="1"/>
+          </p:cNvPicPr>
+          <p:nvPr/>
+        </p:nvPicPr>
+        <p:blipFill>
+          <a:blip r:embed="rId3">
+            <a:extLst>
+              <a:ext uri="{28A0092B-C50C-407E-A947-70E740481C1C}">
+                <a14:useLocalDpi xmlns:a14="http://schemas.microsoft.com/office/drawing/2010/main" val="0"/>
+              </a:ext>
+            </a:extLst>
+          </a:blip>
+          <a:srcRect/>
+          <a:stretch>
+            <a:fillRect/>
+          </a:stretch>
+        </p:blipFill>
+        <p:spPr bwMode="auto">
+          <a:xfrm>
+            <a:off x="7820094" y="134738"/>
+            <a:ext cx="1184562" cy="275781"/>
+          </a:xfrm>
+          <a:prstGeom prst="rect">
+            <a:avLst/>
+          </a:prstGeom>
+          <a:noFill/>
+          <a:extLst>
+            <a:ext uri="{909E8E84-426E-40DD-AFC4-6F175D3DCCD1}">
+              <a14:hiddenFill xmlns:a14="http://schemas.microsoft.com/office/drawing/2010/main">
+                <a:solidFill>
+                  <a:srgbClr val="FFFFFF"/>
+                </a:solidFill>
+              </a14:hiddenFill>
+            </a:ext>
+          </a:extLst>
+        </p:spPr>
+      </p:pic>
+      <p:sp>
+        <p:nvSpPr>
+          <p:cNvPr id="3" name="CuadroTexto 2">
+            <a:extLst>
+              <a:ext uri="{FF2B5EF4-FFF2-40B4-BE49-F238E27FC236}">
+                <a16:creationId xmlns:a16="http://schemas.microsoft.com/office/drawing/2014/main" id="{ABB473DA-3CB3-8D9E-EA44-0C4AED885348}"/>
+              </a:ext>
+            </a:extLst>
+          </p:cNvPr>
+          <p:cNvSpPr txBox="1"/>
+          <p:nvPr/>
+        </p:nvSpPr>
+        <p:spPr>
+          <a:xfrm>
+            <a:off x="272883" y="758786"/>
+            <a:ext cx="8515105" cy="4739759"/>
+          </a:xfrm>
+          <a:prstGeom prst="rect">
+            <a:avLst/>
+          </a:prstGeom>
+          <a:noFill/>
+        </p:spPr>
+        <p:txBody>
+          <a:bodyPr wrap="square" rtlCol="0">
+            <a:spAutoFit/>
+          </a:bodyPr>
+          <a:lstStyle/>
+          <a:p>
+            <a:endParaRPr lang="es-ES" sz="1100" dirty="0">
+              <a:latin typeface="Montserrat" panose="00000500000000000000" pitchFamily="2" charset="0"/>
+            </a:endParaRPr>
+          </a:p>
+          <a:p>
+            <a:r>
+              <a:rPr lang="es-ES" sz="1200" b="1" dirty="0"/>
+              <a:t>✅ </a:t>
+            </a:r>
+            <a:r>
+              <a:rPr lang="es-ES" sz="1200" b="1" dirty="0">
+                <a:latin typeface="Montserrat" panose="00000500000000000000" pitchFamily="2" charset="0"/>
+              </a:rPr>
+              <a:t>Conclusiones Finales del Proyecto</a:t>
+            </a:r>
+          </a:p>
+          <a:p>
+            <a:endParaRPr lang="es-ES" sz="1200" b="1" dirty="0">
+              <a:latin typeface="Montserrat" panose="00000500000000000000" pitchFamily="2" charset="0"/>
+            </a:endParaRPr>
+          </a:p>
+          <a:p>
+            <a:r>
+              <a:rPr lang="es-ES" sz="1100" dirty="0">
+                <a:latin typeface="Montserrat" panose="00000500000000000000" pitchFamily="2" charset="0"/>
+              </a:rPr>
+              <a:t>Este proyecto se enfocó en analizar y predecir cancelaciones de reservas en alojamientos. A través del análisis exploratorio (EDA) se identificaron factores clave:</a:t>
+            </a:r>
+          </a:p>
+          <a:p>
+            <a:br>
+              <a:rPr lang="es-ES" sz="1100" dirty="0">
+                <a:latin typeface="Montserrat" panose="00000500000000000000" pitchFamily="2" charset="0"/>
+              </a:rPr>
+            </a:br>
+            <a:r>
+              <a:rPr lang="es-ES" sz="1100" dirty="0">
+                <a:latin typeface="Montserrat" panose="00000500000000000000" pitchFamily="2" charset="0"/>
+              </a:rPr>
+              <a:t>– Mayor probabilidad de cancelación con reservas anticipadas (lead time largo)</a:t>
+            </a:r>
+            <a:br>
+              <a:rPr lang="es-ES" sz="1100" dirty="0">
+                <a:latin typeface="Montserrat" panose="00000500000000000000" pitchFamily="2" charset="0"/>
+              </a:rPr>
+            </a:br>
+            <a:r>
+              <a:rPr lang="es-ES" sz="1100" dirty="0">
+                <a:latin typeface="Montserrat" panose="00000500000000000000" pitchFamily="2" charset="0"/>
+              </a:rPr>
+              <a:t>– Menor cancelación en clientes repetitivos y con pedidos especiales</a:t>
+            </a:r>
+            <a:br>
+              <a:rPr lang="es-ES" sz="1100" dirty="0">
+                <a:latin typeface="Montserrat" panose="00000500000000000000" pitchFamily="2" charset="0"/>
+              </a:rPr>
+            </a:br>
+            <a:r>
+              <a:rPr lang="es-ES" sz="1100" dirty="0">
+                <a:latin typeface="Montserrat" panose="00000500000000000000" pitchFamily="2" charset="0"/>
+              </a:rPr>
+              <a:t>– Canal online con mayor tasa de cancelaciones</a:t>
+            </a:r>
+          </a:p>
+          <a:p>
+            <a:endParaRPr lang="es-ES" sz="1100" dirty="0">
+              <a:latin typeface="Montserrat" panose="00000500000000000000" pitchFamily="2" charset="0"/>
+            </a:endParaRPr>
+          </a:p>
+          <a:p>
+            <a:r>
+              <a:rPr lang="es-ES" sz="1100" dirty="0">
+                <a:latin typeface="Montserrat" panose="00000500000000000000" pitchFamily="2" charset="0"/>
+              </a:rPr>
+              <a:t>Se crearon variables nuevas (</a:t>
+            </a:r>
+            <a:r>
+              <a:rPr lang="es-ES" sz="1100" dirty="0" err="1">
+                <a:latin typeface="Montserrat" panose="00000500000000000000" pitchFamily="2" charset="0"/>
+              </a:rPr>
+              <a:t>feature</a:t>
+            </a:r>
+            <a:r>
+              <a:rPr lang="es-ES" sz="1100" dirty="0">
+                <a:latin typeface="Montserrat" panose="00000500000000000000" pitchFamily="2" charset="0"/>
+              </a:rPr>
+              <a:t> </a:t>
+            </a:r>
+            <a:r>
+              <a:rPr lang="es-ES" sz="1100" dirty="0" err="1">
+                <a:latin typeface="Montserrat" panose="00000500000000000000" pitchFamily="2" charset="0"/>
+              </a:rPr>
+              <a:t>engineering</a:t>
+            </a:r>
+            <a:r>
+              <a:rPr lang="es-ES" sz="1100" dirty="0">
+                <a:latin typeface="Montserrat" panose="00000500000000000000" pitchFamily="2" charset="0"/>
+              </a:rPr>
+              <a:t>) como duración de estadía, total de huéspedes y categoría de anticipación, y se preprocesaron los datos para el modelado.</a:t>
+            </a:r>
+          </a:p>
+          <a:p>
+            <a:endParaRPr lang="es-ES" sz="1100" dirty="0">
+              <a:latin typeface="Montserrat" panose="00000500000000000000" pitchFamily="2" charset="0"/>
+            </a:endParaRPr>
+          </a:p>
+          <a:p>
+            <a:r>
+              <a:rPr lang="es-ES" sz="1100" dirty="0">
+                <a:latin typeface="Montserrat" panose="00000500000000000000" pitchFamily="2" charset="0"/>
+              </a:rPr>
+              <a:t>Se entrenaron varios modelos, priorizando aquellos con mayor </a:t>
+            </a:r>
+            <a:r>
+              <a:rPr lang="es-ES" sz="1100" dirty="0" err="1">
+                <a:latin typeface="Montserrat" panose="00000500000000000000" pitchFamily="2" charset="0"/>
+              </a:rPr>
+              <a:t>recall</a:t>
+            </a:r>
+            <a:r>
+              <a:rPr lang="es-ES" sz="1100" dirty="0">
+                <a:latin typeface="Montserrat" panose="00000500000000000000" pitchFamily="2" charset="0"/>
+              </a:rPr>
+              <a:t> en la clase cancelada para reducir falsos negativos:</a:t>
+            </a:r>
+          </a:p>
+          <a:p>
+            <a:endParaRPr lang="es-ES" sz="1100" dirty="0">
+              <a:latin typeface="Montserrat" panose="00000500000000000000" pitchFamily="2" charset="0"/>
+            </a:endParaRPr>
+          </a:p>
+          <a:p>
+            <a:r>
+              <a:rPr lang="es-ES" sz="1100" dirty="0">
+                <a:latin typeface="Montserrat" panose="00000500000000000000" pitchFamily="2" charset="0"/>
+              </a:rPr>
+              <a:t>	- </a:t>
+            </a:r>
+            <a:r>
+              <a:rPr lang="es-ES" sz="1100" dirty="0" err="1">
+                <a:latin typeface="Montserrat" panose="00000500000000000000" pitchFamily="2" charset="0"/>
+              </a:rPr>
+              <a:t>Random</a:t>
+            </a:r>
+            <a:r>
+              <a:rPr lang="es-ES" sz="1100" dirty="0">
+                <a:latin typeface="Montserrat" panose="00000500000000000000" pitchFamily="2" charset="0"/>
+              </a:rPr>
+              <a:t> Forest y </a:t>
+            </a:r>
+            <a:r>
+              <a:rPr lang="es-ES" sz="1100" dirty="0" err="1">
+                <a:latin typeface="Montserrat" panose="00000500000000000000" pitchFamily="2" charset="0"/>
+              </a:rPr>
+              <a:t>XGBoost</a:t>
+            </a:r>
+            <a:r>
+              <a:rPr lang="es-ES" sz="1100" dirty="0">
+                <a:latin typeface="Montserrat" panose="00000500000000000000" pitchFamily="2" charset="0"/>
+              </a:rPr>
+              <a:t> fueron los más efectivos</a:t>
+            </a:r>
+          </a:p>
+          <a:p>
+            <a:r>
+              <a:rPr lang="es-ES" sz="1100" dirty="0">
+                <a:latin typeface="Montserrat" panose="00000500000000000000" pitchFamily="2" charset="0"/>
+              </a:rPr>
+              <a:t>	- El uso de SMOTE para balancear los datos mejoró significativamente la detección de cancelaciones</a:t>
+            </a:r>
+          </a:p>
+          <a:p>
+            <a:r>
+              <a:rPr lang="es-ES" sz="1100" dirty="0">
+                <a:latin typeface="Montserrat" panose="00000500000000000000" pitchFamily="2" charset="0"/>
+              </a:rPr>
+              <a:t>	- El mejor modelo fue </a:t>
+            </a:r>
+            <a:r>
+              <a:rPr lang="es-ES" sz="1100" dirty="0" err="1">
+                <a:latin typeface="Montserrat" panose="00000500000000000000" pitchFamily="2" charset="0"/>
+              </a:rPr>
+              <a:t>XGBoost</a:t>
+            </a:r>
+            <a:r>
+              <a:rPr lang="es-ES" sz="1100" dirty="0">
+                <a:latin typeface="Montserrat" panose="00000500000000000000" pitchFamily="2" charset="0"/>
+              </a:rPr>
+              <a:t> + SMOTE, alcanzando un </a:t>
+            </a:r>
+            <a:r>
+              <a:rPr lang="es-ES" sz="1100" dirty="0" err="1">
+                <a:latin typeface="Montserrat" panose="00000500000000000000" pitchFamily="2" charset="0"/>
+              </a:rPr>
+              <a:t>recall</a:t>
+            </a:r>
+            <a:r>
+              <a:rPr lang="es-ES" sz="1100" dirty="0">
+                <a:latin typeface="Montserrat" panose="00000500000000000000" pitchFamily="2" charset="0"/>
+              </a:rPr>
+              <a:t> del 82% para cancelaciones reales</a:t>
+            </a:r>
+          </a:p>
+          <a:p>
+            <a:endParaRPr lang="es-ES" sz="1100" dirty="0">
+              <a:latin typeface="Montserrat" panose="00000500000000000000" pitchFamily="2" charset="0"/>
+            </a:endParaRPr>
+          </a:p>
+          <a:p>
+            <a:endParaRPr lang="es-ES" sz="1100" dirty="0">
+              <a:latin typeface="Montserrat" panose="00000500000000000000" pitchFamily="2" charset="0"/>
+            </a:endParaRPr>
+          </a:p>
+          <a:p>
+            <a:r>
+              <a:rPr lang="es-ES" sz="1100" dirty="0">
+                <a:latin typeface="Montserrat" panose="00000500000000000000" pitchFamily="2" charset="0"/>
+              </a:rPr>
+              <a:t>🔎 </a:t>
+            </a:r>
+            <a:r>
+              <a:rPr lang="es-ES" sz="1100" b="1" dirty="0">
+                <a:latin typeface="Montserrat" panose="00000500000000000000" pitchFamily="2" charset="0"/>
+              </a:rPr>
+              <a:t>Conclusión</a:t>
+            </a:r>
+            <a:r>
+              <a:rPr lang="es-ES" sz="1100" dirty="0">
+                <a:latin typeface="Montserrat" panose="00000500000000000000" pitchFamily="2" charset="0"/>
+              </a:rPr>
+              <a:t>: El modelo desarrollado permite anticipar cancelaciones con alta efectividad, ofreciendo al negocio herramientas para tomar medidas preventivas y reducir el impacto económico.</a:t>
+            </a:r>
+          </a:p>
+          <a:p>
+            <a:endParaRPr lang="es-ES" sz="1100" dirty="0">
+              <a:latin typeface="Montserrat" panose="00000500000000000000" pitchFamily="2" charset="0"/>
+            </a:endParaRPr>
+          </a:p>
+          <a:p>
+            <a:endParaRPr lang="es-ES" sz="1100" dirty="0">
+              <a:latin typeface="Montserrat" panose="00000500000000000000" pitchFamily="2" charset="0"/>
+            </a:endParaRPr>
+          </a:p>
+          <a:p>
+            <a:endParaRPr lang="es-ES" sz="1100" dirty="0">
+              <a:latin typeface="Montserrat" panose="00000500000000000000" pitchFamily="2" charset="0"/>
+            </a:endParaRPr>
+          </a:p>
+          <a:p>
+            <a:endParaRPr lang="es-ES" dirty="0"/>
+          </a:p>
+        </p:txBody>
+      </p:sp>
+    </p:spTree>
+    <p:extLst>
+      <p:ext uri="{BB962C8B-B14F-4D97-AF65-F5344CB8AC3E}">
+        <p14:creationId xmlns:p14="http://schemas.microsoft.com/office/powerpoint/2010/main" val="388345922"/>
+      </p:ext>
+    </p:extLst>
+  </p:cSld>
+  <p:clrMapOvr>
+    <a:masterClrMapping/>
+  </p:clrMapOvr>
+</p:sld>
+</file>
+
+<file path=ppt/slides/slide18.xml><?xml version="1.0" encoding="utf-8"?>
 <p:sld xmlns:a="http://schemas.openxmlformats.org/drawingml/2006/main" xmlns:r="http://schemas.openxmlformats.org/officeDocument/2006/relationships" xmlns:p="http://schemas.openxmlformats.org/presentationml/2006/main">
   <p:cSld>
     <p:bg>
